--- a/slides/claimloop-slides.pptx
+++ b/slides/claimloop-slides.pptx
@@ -17,9 +17,10 @@
     <p:sldId id="265" r:id="rId11"/>
     <p:sldId id="266" r:id="rId12"/>
     <p:sldId id="267" r:id="rId13"/>
+    <p:sldId id="268" r:id="rId14"/>
   </p:sldIdLst>
   <p:notesMasterIdLst>
-    <p:notesMasterId r:id="rId14"/>
+    <p:notesMasterId r:id="rId15"/>
   </p:notesMasterIdLst>
   <p:sldSz cx="12192000" cy="6858000"/>
   <p:notesSz cx="6858000" cy="12192000"/>
@@ -1553,7 +1554,7 @@
           <a:p>
             <a:r>
               <a:rPr lang="en-US" dirty="0"/>
-              <a:t>I also asked the question every applied team asks: do I need the expensive model? I ran two configurations: a budget profile with gpt-5.6-luna everywhere, OpenAI's cheapest current tier, and a balanced profile that upgrades the coder and resolver to terra, which costs about ten times more per token. On the twenty encounters both tiers ran, the outcomes were identical: nineteen of twenty first pass, twenty of twenty final. The budget tier costs about four tenths of a cent per encounter, and the entire sixty-encounter study cost twenty-three cents. The honest engineering conclusion for this workflow: with structured outputs, tool-verified codes, and a rules-based adversary giving structured feedback, the scaffolding earned far more than the model upgrade. That is a very practical finding for anyone budgeting an agent system.</a:t>
+              <a:t>Which denials can agents actually fix? It depends sharply on the category. Prior authorization denials were fully automated away: the resolver recognized the reason code, called the payer's authorization portal as a tool, got an approval number, attached it to the service line, and resubmitted. Two out of two, no human needed. Documentation-level denials for high-intensity visits were also both fixed: once by adding a diagnosis that was documented in the note but dropped by the coder, and once by honestly downcoding the visit. Never upcoding, that is forbidden by instruction. Medical necessity was the hard category, six of eight recovered. Two of those recoveries were written appeals, where the agent argued from the documentation and the payer's review overturned the denial both times.</a:t>
             </a:r>
             <a:endParaRPr lang="en-US" dirty="0"/>
           </a:p>
@@ -1641,7 +1642,7 @@
           <a:p>
             <a:r>
               <a:rPr lang="en-US" dirty="0"/>
-              <a:t>The two unpaid claims taught me more than the 58 paid ones. First, the oscillator. A urinalysis was denied for medical necessity. The resolver repointed it to a different documented diagnosis. Denied again. So it pointed back to the first one, which recreated the original claim exactly, and the payer rejected it as a duplicate. The agent was not being stupid; the architecture was: each resolution sees only the current denial, never what was already tried. No bigger model fixes that. State design does, and that is my top future-work item. Second, the refusal. An A1c lab billed against type 1 diabetes, which my illustrative policy simply does not cover. The resolver checked the documentation, found no legitimate fix, and abandoned the line rather than invent a diagnosis. That is the anti-fraud guardrail working exactly as instructed. And because the payer is deterministic, I can separate cleanly what was a gap in my policy from what was a flaw in the agent.</a:t>
+              <a:t>I also asked the question every applied team asks: do I need the expensive model? I ran two configurations: a budget profile with gpt-5.6-luna everywhere, OpenAI's cheapest current tier, and a balanced profile that upgrades the coder and resolver to terra, which costs about ten times more per token. On the twenty encounters both tiers ran, the outcomes were identical: nineteen of twenty first pass, twenty of twenty final. The budget tier costs about four tenths of a cent per encounter, and the entire sixty-encounter study cost twenty-three cents. The honest engineering conclusion for this workflow: with structured outputs, tool-verified codes, and a rules-based adversary giving structured feedback, the scaffolding earned far more than the model upgrade. That is a very practical finding for anyone budgeting an agent system.</a:t>
             </a:r>
             <a:endParaRPr lang="en-US" dirty="0"/>
           </a:p>
@@ -1729,7 +1730,7 @@
           <a:p>
             <a:r>
               <a:rPr lang="en-US" dirty="0"/>
-              <a:t>Let me close the way I would in an engineering review, because that is my actual vantage point: I am an applied AI engineer, not a healthcare professional. This system is deliberately not production ready, and the gaps are AI-production gaps first. There is no human review gate in front of submissions, and an autonomous biller is not something anyone should ship. Observability is per-run JSON files, where production needs tracing, aggregation, and alerts. There are no regression evals wired into CI, so a prompt tweak could silently drop the acceptance rate. The resolver needs real state design, memory of the attempt history, which is exactly what the oscillation failure demonstrated. And there are no cost budgets, idempotency keys, or versioned prompts. The domain side I will mention briefly, because it shaped the design even though it is not my expertise: CPT licensing, real X12 transactions, and the fact that PHI compliance would dominate everything the moment real patient data entered. My takeaway after building it: the agent stack was the easy half. Productionizing judgment is the work. Thank you for watching.</a:t>
+              <a:t>The two unpaid claims taught me more than the 58 paid ones. First, the oscillator. A urinalysis was denied for medical necessity. The resolver repointed it to a different documented diagnosis. Denied again. So it pointed back to the first one, which recreated the original claim exactly, and the payer rejected it as a duplicate. The agent was not being stupid; the architecture was: each resolution sees only the current denial, never what was already tried. No bigger model fixes that. State design does, and that is my top future-work item. Second, the refusal. An A1c lab billed against type 1 diabetes, which my illustrative policy simply does not cover. The resolver checked the documentation, found no legitimate fix, and abandoned the line rather than invent a diagnosis. That is the anti-fraud guardrail working exactly as instructed. And because the payer is deterministic, I can separate cleanly what was a gap in my policy from what was a flaw in the agent.</a:t>
             </a:r>
             <a:endParaRPr lang="en-US" dirty="0"/>
           </a:p>
@@ -1753,6 +1754,94 @@
             <a:fld id="{F7021451-1387-4CA6-816F-3879F97B5CBC}" type="slidenum">
               <a:rPr lang="en-US"/>
               <a:t>12</a:t>
+            </a:fld>
+            <a:endParaRPr lang="en-US"/>
+          </a:p>
+        </p:txBody>
+      </p:sp>
+    </p:spTree>
+    <p:extLst>
+      <p:ext uri="{BB962C8B-B14F-4D97-AF65-F5344CB8AC3E}">
+        <p14:creationId xmlns:p14="http://schemas.microsoft.com/office/powerpoint/2010/main" val="1024086991"/>
+      </p:ext>
+    </p:extLst>
+  </p:cSld>
+  <p:clrMapOvr>
+    <a:masterClrMapping/>
+  </p:clrMapOvr>
+</p:notes>
+</file>
+
+<file path=ppt/notesSlides/notesSlide13.xml><?xml version="1.0" encoding="utf-8"?>
+<p:notes xmlns:a="http://schemas.openxmlformats.org/drawingml/2006/main" xmlns:r="http://schemas.openxmlformats.org/officeDocument/2006/relationships" xmlns:p="http://schemas.openxmlformats.org/presentationml/2006/main">
+  <p:cSld>
+    <p:spTree>
+      <p:nvGrpSpPr>
+        <p:cNvPr id="1" name=""/>
+        <p:cNvGrpSpPr/>
+        <p:nvPr/>
+      </p:nvGrpSpPr>
+      <p:grpSpPr>
+        <a:xfrm>
+          <a:off x="0" y="0"/>
+          <a:ext cx="0" cy="0"/>
+          <a:chOff x="0" y="0"/>
+          <a:chExt cx="0" cy="0"/>
+        </a:xfrm>
+      </p:grpSpPr>
+      <p:sp>
+        <p:nvSpPr>
+          <p:cNvPr id="2" name="Slide Image Placeholder 1"/>
+          <p:cNvSpPr>
+            <a:spLocks noGrp="1" noRot="1" noChangeAspect="1"/>
+          </p:cNvSpPr>
+          <p:nvPr>
+            <p:ph type="sldImg"/>
+          </p:nvPr>
+        </p:nvSpPr>
+        <p:spPr/>
+      </p:sp>
+      <p:sp>
+        <p:nvSpPr>
+          <p:cNvPr id="3" name="Notes Placeholder 2"/>
+          <p:cNvSpPr>
+            <a:spLocks noGrp="1"/>
+          </p:cNvSpPr>
+          <p:nvPr>
+            <p:ph type="body" idx="1"/>
+          </p:nvPr>
+        </p:nvSpPr>
+        <p:spPr/>
+        <p:txBody>
+          <a:bodyPr/>
+          <a:lstStyle/>
+          <a:p>
+            <a:r>
+              <a:rPr lang="en-US" dirty="0"/>
+              <a:t>Let me close the way I would in an engineering review, because that is my actual vantage point: I am an applied AI engineer, not a healthcare professional. This system is deliberately not production ready, and the gaps are AI-production gaps first. There is no human review gate in front of submissions, and an autonomous biller is not something anyone should ship. Observability is per-run JSON files, where production needs tracing, aggregation, and alerts. There are no regression evals wired into CI, so a prompt tweak could silently drop the acceptance rate. The resolver needs real state design, memory of the attempt history, which is exactly what the oscillation failure demonstrated. And there are no cost budgets, idempotency keys, or versioned prompts. The domain side I will mention briefly, because it shaped the design even though it is not my expertise: CPT licensing, real X12 transactions, and the fact that PHI compliance would dominate everything the moment real patient data entered. My takeaway after building it: the agent stack was the easy half. Productionizing judgment is the work. Thank you for watching.</a:t>
+            </a:r>
+            <a:endParaRPr lang="en-US" dirty="0"/>
+          </a:p>
+        </p:txBody>
+      </p:sp>
+      <p:sp>
+        <p:nvSpPr>
+          <p:cNvPr id="4" name="Slide Number Placeholder 3"/>
+          <p:cNvSpPr>
+            <a:spLocks noGrp="1"/>
+          </p:cNvSpPr>
+          <p:nvPr>
+            <p:ph type="sldNum" sz="quarter" idx="10"/>
+          </p:nvPr>
+        </p:nvSpPr>
+        <p:spPr/>
+        <p:txBody>
+          <a:bodyPr/>
+          <a:lstStyle/>
+          <a:p>
+            <a:fld id="{F7021451-1387-4CA6-816F-3879F97B5CBC}" type="slidenum">
+              <a:rPr lang="en-US"/>
+              <a:t>13</a:t>
             </a:fld>
             <a:endParaRPr lang="en-US"/>
           </a:p>
@@ -2169,7 +2258,7 @@
           <a:p>
             <a:r>
               <a:rPr lang="en-US" dirty="0"/>
-              <a:t>Meet the adversary. The payer enforces seven rules, and each denial uses the real public reason codes maintained by X12. It checks completeness, whether every diagnosis code actually exists, whether procedures are on the fee schedule, whether the linked diagnosis justifies each procedure, whether prior authorization is on file for imaging, whether the documentation supports a high-level visit, and it rejects unchanged resubmissions as duplicates, which blocks the lazy strategy of just retrying. Two design notes. Appeals are not rubber-stamped: the payer re-reviews the full documented diagnosis list, which models a human reviewer reading the whole record. And the necessity policy is illustrative fiction, disclosed as exactly that. It is the test environment, not training data; the input encounters are a real public benchmark corpus.</a:t>
+              <a:t>Let me open the hood for a moment, because the architecture is where most of the engineering actually went. Six layers. Reading down: a React console, a FastAPI service that streams every event over server-sent events, and then the orchestrator, which is just a plain async loop. That is a deliberate choice: agent frameworks push you toward handoffs, where agents pass control to each other, but my workflow order never changes, so a loop you can read top to bottom is better engineering than a dynamic handoff graph. The agents layer is the only place where a model call happens. Each agent declares a strict structured output type, so the SDK constrains generation to a schema and my code never parses free text. And notice the tools column: tools are granted per agent, not globally. Only the coder and resolver can look up diagnosis codes, only the resolver can request authorization, and the scribe has no tools at all, so it physically cannot reach outside the transcript it was handed. That is what makes my guarantees enforceable rather than aspirational: it is the type system and the tool grants doing the work, not a politely worded prompt. Below that, the claim builder and payer are ordinary code with no model in the path, which is exactly what makes the recovery results attributable to the agent.</a:t>
             </a:r>
             <a:endParaRPr lang="en-US" dirty="0"/>
           </a:p>
@@ -2257,7 +2346,7 @@
           <a:p>
             <a:r>
               <a:rPr lang="en-US" dirty="0"/>
-              <a:t>Because this is an AI-first project, the process itself is the product, so the interface is built for inspection. The screen starts with the thing everything derives from: the transcript of the visit, readable turn by turn. Below it, the pipeline stages report their status, and an activity log streams the model's output token by token, with every tool call shown the moment it happens: here the coder verifying a knee-pain code against the official ICD-10 table, and the resolver calling the payer's authorization portal and getting an approval. On the right, the artifacts assemble: the visit note, the code tables with the coder's own confidence, and the claim rendered as an actual claim document with patient, provider, diagnoses, and service lines, not a wall of JSON. Denials arrive stamped with the payer's reason codes, and the resolver's decisions and appeal letters appear in full. At this point in the video I will switch to the live application and run one encounter end to end.</a:t>
+              <a:t>Meet the adversary. The payer enforces seven rules, and each denial uses the real public reason codes maintained by X12. It checks completeness, whether every diagnosis code actually exists, whether procedures are on the fee schedule, whether the linked diagnosis justifies each procedure, whether prior authorization is on file for imaging, whether the documentation supports a high-level visit, and it rejects unchanged resubmissions as duplicates, which blocks the lazy strategy of just retrying. Two design notes. Appeals are not rubber-stamped: the payer re-reviews the full documented diagnosis list, which models a human reviewer reading the whole record. And the necessity policy is illustrative fiction, disclosed as exactly that. It is the test environment, not training data; the input encounters are a real public benchmark corpus.</a:t>
             </a:r>
             <a:endParaRPr lang="en-US" dirty="0"/>
           </a:p>
@@ -2345,7 +2434,7 @@
           <a:p>
             <a:r>
               <a:rPr lang="en-US" dirty="0"/>
-              <a:t>Now the results. I ran the full pipeline over sixty encounters from ACI-Bench, a public benchmark of simulated doctor-patient conversations written with clinician input. Every encounter completed. Fifty of the sixty claims, 83.3 percent, were accepted on the very first submission. Ten came back denied, and this is where the loop earns its name: the resolver recovered eight of those ten, lifting final acceptance to 96.7 percent, 58 paid claims out of 60, with an average of 1.17 submissions per encounter. The two claims that stayed unpaid are actually my favorite result, and I will come back to them in a moment.</a:t>
+              <a:t>Because this is an AI-first project, the process itself is the product, so the interface is built for inspection. The screen starts with the thing everything derives from: the transcript of the visit, readable turn by turn. Below it, the pipeline stages report their status, and an activity log streams the model's output token by token, with every tool call shown the moment it happens: here the coder verifying a knee-pain code against the official ICD-10 table, and the resolver calling the payer's authorization portal and getting an approval. On the right, the artifacts assemble: the visit note, the code tables with the coder's own confidence, and the claim rendered as an actual claim document with patient, provider, diagnoses, and service lines, not a wall of JSON. Denials arrive stamped with the payer's reason codes, and the resolver's decisions and appeal letters appear in full. At this point in the video I will switch to the live application and run one encounter end to end.</a:t>
             </a:r>
             <a:endParaRPr lang="en-US" dirty="0"/>
           </a:p>
@@ -2433,7 +2522,7 @@
           <a:p>
             <a:r>
               <a:rPr lang="en-US" dirty="0"/>
-              <a:t>Which denials can agents actually fix? It depends sharply on the category. Prior authorization denials were fully automated away: the resolver recognized the reason code, called the payer's authorization portal as a tool, got an approval number, attached it to the service line, and resubmitted. Two out of two, no human needed. Documentation-level denials for high-intensity visits were also both fixed: once by adding a diagnosis that was documented in the note but dropped by the coder, and once by honestly downcoding the visit. Never upcoding, that is forbidden by instruction. Medical necessity was the hard category, six of eight recovered. Two of those recoveries were written appeals, where the agent argued from the documentation and the payer's review overturned the denial both times.</a:t>
+              <a:t>Now the results. I ran the full pipeline over sixty encounters from ACI-Bench, a public benchmark of simulated doctor-patient conversations written with clinician input. Every encounter completed. Fifty of the sixty claims, 83.3 percent, were accepted on the very first submission. Ten came back denied, and this is where the loop earns its name: the resolver recovered eight of those ten, lifting final acceptance to 96.7 percent, 58 paid claims out of 60, with an average of 1.17 submissions per encounter. The two claims that stayed unpaid are actually my favorite result, and I will come back to them in a moment.</a:t>
             </a:r>
             <a:endParaRPr lang="en-US" dirty="0"/>
           </a:p>
@@ -3170,7 +3259,7 @@
                 <a:ea typeface="Cambria" pitchFamily="34" charset="-122"/>
                 <a:cs typeface="Cambria" pitchFamily="34" charset="-120"/>
               </a:rPr>
-              <a:t>The cheap model was enough</a:t>
+              <a:t>What the loop can and cannot fix</a:t>
             </a:r>
             <a:endParaRPr lang="en-US" sz="2900" dirty="0"/>
           </a:p>
@@ -3184,7 +3273,7 @@
         </p:nvGraphicFramePr>
         <p:xfrm>
           <a:off x="594360" y="1691640"/>
-          <a:ext cx="6035040" cy="3749040"/>
+          <a:ext cx="6583680" cy="3840480"/>
         </p:xfrm>
         <a:graphic xmlns:a="http://schemas.openxmlformats.org/drawingml/2006/main">
           <a:graphicData uri="http://schemas.openxmlformats.org/drawingml/2006/chart">
@@ -3200,14 +3289,22 @@
         </p:nvSpPr>
         <p:spPr>
           <a:xfrm>
-            <a:off x="594360" y="5532120"/>
-            <a:ext cx="6035040" cy="365760"/>
-          </a:xfrm>
-          <a:prstGeom prst="rect">
-            <a:avLst/>
-          </a:prstGeom>
-          <a:noFill/>
-          <a:ln/>
+            <a:off x="7452360" y="1691640"/>
+            <a:ext cx="740664" cy="292608"/>
+          </a:xfrm>
+          <a:prstGeom prst="roundRect">
+            <a:avLst>
+              <a:gd name="adj" fmla="val 10938"/>
+            </a:avLst>
+          </a:prstGeom>
+          <a:solidFill>
+            <a:srgbClr val="FFFFFF"/>
+          </a:solidFill>
+          <a:ln w="9525">
+            <a:solidFill>
+              <a:srgbClr val="CFCBC2"/>
+            </a:solidFill>
+          </a:ln>
         </p:spPr>
         <p:txBody>
           <a:bodyPr wrap="square" lIns="0" tIns="0" rIns="0" bIns="0" rtlCol="0" anchor="ctr"/>
@@ -3217,56 +3314,56 @@
               <a:buNone/>
             </a:pPr>
             <a:r>
-              <a:rPr lang="en-US" sz="1200" i="1" dirty="0">
-                <a:solidFill>
-                  <a:srgbClr val="9AA1AA"/>
+              <a:rPr lang="en-US" sz="1050" b="1" dirty="0">
+                <a:solidFill>
+                  <a:srgbClr val="2E7D4F"/>
+                </a:solidFill>
+                <a:latin typeface="Courier New" pitchFamily="34" charset="0"/>
+                <a:ea typeface="Courier New" pitchFamily="34" charset="-122"/>
+                <a:cs typeface="Courier New" pitchFamily="34" charset="-120"/>
+              </a:rPr>
+              <a:t>CO-197</a:t>
+            </a:r>
+            <a:endParaRPr lang="en-US" sz="1050" dirty="0"/>
+          </a:p>
+        </p:txBody>
+      </p:sp>
+      <p:sp>
+        <p:nvSpPr>
+          <p:cNvPr id="6" name="Text 3"/>
+          <p:cNvSpPr/>
+          <p:nvPr/>
+        </p:nvSpPr>
+        <p:spPr>
+          <a:xfrm>
+            <a:off x="8549640" y="1664208"/>
+            <a:ext cx="3017520" cy="365760"/>
+          </a:xfrm>
+          <a:prstGeom prst="rect">
+            <a:avLst/>
+          </a:prstGeom>
+          <a:noFill/>
+          <a:ln/>
+        </p:spPr>
+        <p:txBody>
+          <a:bodyPr wrap="square" lIns="0" tIns="0" rIns="0" bIns="0" rtlCol="0" anchor="ctr"/>
+          <a:lstStyle/>
+          <a:p>
+            <a:pPr indent="0" marL="0">
+              <a:buNone/>
+            </a:pPr>
+            <a:r>
+              <a:rPr lang="en-US" sz="1350" b="1" dirty="0">
+                <a:solidFill>
+                  <a:srgbClr val="23272C"/>
                 </a:solidFill>
                 <a:latin typeface="Calibri" pitchFamily="34" charset="0"/>
                 <a:ea typeface="Calibri" pitchFamily="34" charset="-122"/>
                 <a:cs typeface="Calibri" pitchFamily="34" charset="-120"/>
               </a:rPr>
-              <a:t>identical outcomes on the shared 20 encounters</a:t>
-            </a:r>
-            <a:endParaRPr lang="en-US" sz="1200" dirty="0"/>
-          </a:p>
-        </p:txBody>
-      </p:sp>
-      <p:sp>
-        <p:nvSpPr>
-          <p:cNvPr id="6" name="Text 3"/>
-          <p:cNvSpPr/>
-          <p:nvPr/>
-        </p:nvSpPr>
-        <p:spPr>
-          <a:xfrm>
-            <a:off x="7223760" y="1691640"/>
-            <a:ext cx="4206240" cy="822960"/>
-          </a:xfrm>
-          <a:prstGeom prst="rect">
-            <a:avLst/>
-          </a:prstGeom>
-          <a:noFill/>
-          <a:ln/>
-        </p:spPr>
-        <p:txBody>
-          <a:bodyPr wrap="square" lIns="0" tIns="0" rIns="0" bIns="0" rtlCol="0" anchor="ctr"/>
-          <a:lstStyle/>
-          <a:p>
-            <a:pPr indent="0" marL="0">
-              <a:buNone/>
-            </a:pPr>
-            <a:r>
-              <a:rPr lang="en-US" sz="4600" b="1" dirty="0">
-                <a:solidFill>
-                  <a:srgbClr val="35639C"/>
-                </a:solidFill>
-                <a:latin typeface="Cambria" pitchFamily="34" charset="0"/>
-                <a:ea typeface="Cambria" pitchFamily="34" charset="-122"/>
-                <a:cs typeface="Cambria" pitchFamily="34" charset="-120"/>
-              </a:rPr>
-              <a:t>$0.0039</a:t>
-            </a:r>
-            <a:endParaRPr lang="en-US" sz="4600" dirty="0"/>
+              <a:t>prior authorization</a:t>
+            </a:r>
+            <a:endParaRPr lang="en-US" sz="1350" dirty="0"/>
           </a:p>
         </p:txBody>
       </p:sp>
@@ -3278,24 +3375,24 @@
         </p:nvSpPr>
         <p:spPr>
           <a:xfrm>
-            <a:off x="7223760" y="2532888"/>
-            <a:ext cx="4206240" cy="822960"/>
-          </a:xfrm>
-          <a:prstGeom prst="rect">
-            <a:avLst/>
-          </a:prstGeom>
-          <a:noFill/>
-          <a:ln/>
-        </p:spPr>
-        <p:txBody>
-          <a:bodyPr wrap="square" lIns="0" tIns="0" rIns="0" bIns="0" rtlCol="0" anchor="ctr"/>
-          <a:lstStyle/>
-          <a:p>
-            <a:pPr indent="0" marL="0">
-              <a:buNone/>
-            </a:pPr>
-            <a:r>
-              <a:rPr lang="en-US" sz="1250" dirty="0">
+            <a:off x="7452360" y="2057400"/>
+            <a:ext cx="4114800" cy="914400"/>
+          </a:xfrm>
+          <a:prstGeom prst="rect">
+            <a:avLst/>
+          </a:prstGeom>
+          <a:noFill/>
+          <a:ln/>
+        </p:spPr>
+        <p:txBody>
+          <a:bodyPr wrap="square" lIns="0" tIns="0" rIns="0" bIns="0" rtlCol="0" anchor="ctr"/>
+          <a:lstStyle/>
+          <a:p>
+            <a:pPr indent="0" marL="0">
+              <a:buNone/>
+            </a:pPr>
+            <a:r>
+              <a:rPr lang="en-US" sz="1150" dirty="0">
                 <a:solidFill>
                   <a:srgbClr val="6A727C"/>
                 </a:solidFill>
@@ -3303,9 +3400,9 @@
                 <a:ea typeface="Calibri" pitchFamily="34" charset="-122"/>
                 <a:cs typeface="Calibri" pitchFamily="34" charset="-120"/>
               </a:rPr>
-              <a:t>per encounter on the budget tier; terra costs 5.5x for the same outcome here</a:t>
-            </a:r>
-            <a:endParaRPr lang="en-US" sz="1250" dirty="0"/>
+              <a:t>2 of 2 automated away: the resolver calls the auth portal tool and resubmits with the number attached</a:t>
+            </a:r>
+            <a:endParaRPr lang="en-US" sz="1150" dirty="0"/>
           </a:p>
         </p:txBody>
       </p:sp>
@@ -3317,73 +3414,81 @@
         </p:nvSpPr>
         <p:spPr>
           <a:xfrm>
-            <a:off x="7223760" y="3429000"/>
-            <a:ext cx="4206240" cy="822960"/>
-          </a:xfrm>
-          <a:prstGeom prst="rect">
-            <a:avLst/>
-          </a:prstGeom>
-          <a:noFill/>
-          <a:ln/>
-        </p:spPr>
-        <p:txBody>
-          <a:bodyPr wrap="square" lIns="0" tIns="0" rIns="0" bIns="0" rtlCol="0" anchor="ctr"/>
-          <a:lstStyle/>
-          <a:p>
-            <a:pPr indent="0" marL="0">
-              <a:buNone/>
-            </a:pPr>
-            <a:r>
-              <a:rPr lang="en-US" sz="4600" b="1" dirty="0">
+            <a:off x="7452360" y="3063240"/>
+            <a:ext cx="740664" cy="292608"/>
+          </a:xfrm>
+          <a:prstGeom prst="roundRect">
+            <a:avLst>
+              <a:gd name="adj" fmla="val 10938"/>
+            </a:avLst>
+          </a:prstGeom>
+          <a:solidFill>
+            <a:srgbClr val="FFFFFF"/>
+          </a:solidFill>
+          <a:ln w="9525">
+            <a:solidFill>
+              <a:srgbClr val="CFCBC2"/>
+            </a:solidFill>
+          </a:ln>
+        </p:spPr>
+        <p:txBody>
+          <a:bodyPr wrap="square" lIns="0" tIns="0" rIns="0" bIns="0" rtlCol="0" anchor="ctr"/>
+          <a:lstStyle/>
+          <a:p>
+            <a:pPr algn="ctr" indent="0" marL="0">
+              <a:buNone/>
+            </a:pPr>
+            <a:r>
+              <a:rPr lang="en-US" sz="1050" b="1" dirty="0">
+                <a:solidFill>
+                  <a:srgbClr val="2E7D4F"/>
+                </a:solidFill>
+                <a:latin typeface="Courier New" pitchFamily="34" charset="0"/>
+                <a:ea typeface="Courier New" pitchFamily="34" charset="-122"/>
+                <a:cs typeface="Courier New" pitchFamily="34" charset="-120"/>
+              </a:rPr>
+              <a:t>CO-150</a:t>
+            </a:r>
+            <a:endParaRPr lang="en-US" sz="1050" dirty="0"/>
+          </a:p>
+        </p:txBody>
+      </p:sp>
+      <p:sp>
+        <p:nvSpPr>
+          <p:cNvPr id="9" name="Text 6"/>
+          <p:cNvSpPr/>
+          <p:nvPr/>
+        </p:nvSpPr>
+        <p:spPr>
+          <a:xfrm>
+            <a:off x="8549640" y="3035808"/>
+            <a:ext cx="3017520" cy="365760"/>
+          </a:xfrm>
+          <a:prstGeom prst="rect">
+            <a:avLst/>
+          </a:prstGeom>
+          <a:noFill/>
+          <a:ln/>
+        </p:spPr>
+        <p:txBody>
+          <a:bodyPr wrap="square" lIns="0" tIns="0" rIns="0" bIns="0" rtlCol="0" anchor="ctr"/>
+          <a:lstStyle/>
+          <a:p>
+            <a:pPr indent="0" marL="0">
+              <a:buNone/>
+            </a:pPr>
+            <a:r>
+              <a:rPr lang="en-US" sz="1350" b="1" dirty="0">
                 <a:solidFill>
                   <a:srgbClr val="23272C"/>
-                </a:solidFill>
-                <a:latin typeface="Cambria" pitchFamily="34" charset="0"/>
-                <a:ea typeface="Cambria" pitchFamily="34" charset="-122"/>
-                <a:cs typeface="Cambria" pitchFamily="34" charset="-120"/>
-              </a:rPr>
-              <a:t>$0.23</a:t>
-            </a:r>
-            <a:endParaRPr lang="en-US" sz="4600" dirty="0"/>
-          </a:p>
-        </p:txBody>
-      </p:sp>
-      <p:sp>
-        <p:nvSpPr>
-          <p:cNvPr id="9" name="Text 6"/>
-          <p:cNvSpPr/>
-          <p:nvPr/>
-        </p:nvSpPr>
-        <p:spPr>
-          <a:xfrm>
-            <a:off x="7223760" y="4270248"/>
-            <a:ext cx="4206240" cy="822960"/>
-          </a:xfrm>
-          <a:prstGeom prst="rect">
-            <a:avLst/>
-          </a:prstGeom>
-          <a:noFill/>
-          <a:ln/>
-        </p:spPr>
-        <p:txBody>
-          <a:bodyPr wrap="square" lIns="0" tIns="0" rIns="0" bIns="0" rtlCol="0" anchor="ctr"/>
-          <a:lstStyle/>
-          <a:p>
-            <a:pPr indent="0" marL="0">
-              <a:buNone/>
-            </a:pPr>
-            <a:r>
-              <a:rPr lang="en-US" sz="1250" dirty="0">
-                <a:solidFill>
-                  <a:srgbClr val="6A727C"/>
                 </a:solidFill>
                 <a:latin typeface="Calibri" pitchFamily="34" charset="0"/>
                 <a:ea typeface="Calibri" pitchFamily="34" charset="-122"/>
                 <a:cs typeface="Calibri" pitchFamily="34" charset="-120"/>
               </a:rPr>
-              <a:t>total inference cost of the entire 60-encounter study</a:t>
-            </a:r>
-            <a:endParaRPr lang="en-US" sz="1250" dirty="0"/>
+              <a:t>documentation level</a:t>
+            </a:r>
+            <a:endParaRPr lang="en-US" sz="1350" dirty="0"/>
           </a:p>
         </p:txBody>
       </p:sp>
@@ -3395,34 +3500,159 @@
         </p:nvSpPr>
         <p:spPr>
           <a:xfrm>
-            <a:off x="7223760" y="5394960"/>
-            <a:ext cx="4206240" cy="548640"/>
-          </a:xfrm>
-          <a:prstGeom prst="rect">
-            <a:avLst/>
-          </a:prstGeom>
-          <a:noFill/>
-          <a:ln/>
-        </p:spPr>
-        <p:txBody>
-          <a:bodyPr wrap="square" lIns="0" tIns="0" rIns="0" bIns="0" rtlCol="0" anchor="ctr"/>
-          <a:lstStyle/>
-          <a:p>
-            <a:pPr indent="0" marL="0">
-              <a:buNone/>
-            </a:pPr>
-            <a:r>
-              <a:rPr lang="en-US" sz="1500" b="1" i="1" dirty="0">
+            <a:off x="7452360" y="3429000"/>
+            <a:ext cx="4114800" cy="914400"/>
+          </a:xfrm>
+          <a:prstGeom prst="rect">
+            <a:avLst/>
+          </a:prstGeom>
+          <a:noFill/>
+          <a:ln/>
+        </p:spPr>
+        <p:txBody>
+          <a:bodyPr wrap="square" lIns="0" tIns="0" rIns="0" bIns="0" rtlCol="0" anchor="ctr"/>
+          <a:lstStyle/>
+          <a:p>
+            <a:pPr indent="0" marL="0">
+              <a:buNone/>
+            </a:pPr>
+            <a:r>
+              <a:rPr lang="en-US" sz="1150" dirty="0">
+                <a:solidFill>
+                  <a:srgbClr val="6A727C"/>
+                </a:solidFill>
+                <a:latin typeface="Calibri" pitchFamily="34" charset="0"/>
+                <a:ea typeface="Calibri" pitchFamily="34" charset="-122"/>
+                <a:cs typeface="Calibri" pitchFamily="34" charset="-120"/>
+              </a:rPr>
+              <a:t>2 of 2 fixed: added a documented diagnosis the coder dropped, or downcoded the visit. Never upcoded.</a:t>
+            </a:r>
+            <a:endParaRPr lang="en-US" sz="1150" dirty="0"/>
+          </a:p>
+        </p:txBody>
+      </p:sp>
+      <p:sp>
+        <p:nvSpPr>
+          <p:cNvPr id="11" name="Text 8"/>
+          <p:cNvSpPr/>
+          <p:nvPr/>
+        </p:nvSpPr>
+        <p:spPr>
+          <a:xfrm>
+            <a:off x="7452360" y="4434840"/>
+            <a:ext cx="662940" cy="292608"/>
+          </a:xfrm>
+          <a:prstGeom prst="roundRect">
+            <a:avLst>
+              <a:gd name="adj" fmla="val 10938"/>
+            </a:avLst>
+          </a:prstGeom>
+          <a:solidFill>
+            <a:srgbClr val="FFFFFF"/>
+          </a:solidFill>
+          <a:ln w="9525">
+            <a:solidFill>
+              <a:srgbClr val="CFCBC2"/>
+            </a:solidFill>
+          </a:ln>
+        </p:spPr>
+        <p:txBody>
+          <a:bodyPr wrap="square" lIns="0" tIns="0" rIns="0" bIns="0" rtlCol="0" anchor="ctr"/>
+          <a:lstStyle/>
+          <a:p>
+            <a:pPr algn="ctr" indent="0" marL="0">
+              <a:buNone/>
+            </a:pPr>
+            <a:r>
+              <a:rPr lang="en-US" sz="1050" b="1" dirty="0">
+                <a:solidFill>
+                  <a:srgbClr val="8A6116"/>
+                </a:solidFill>
+                <a:latin typeface="Courier New" pitchFamily="34" charset="0"/>
+                <a:ea typeface="Courier New" pitchFamily="34" charset="-122"/>
+                <a:cs typeface="Courier New" pitchFamily="34" charset="-120"/>
+              </a:rPr>
+              <a:t>CO-50</a:t>
+            </a:r>
+            <a:endParaRPr lang="en-US" sz="1050" dirty="0"/>
+          </a:p>
+        </p:txBody>
+      </p:sp>
+      <p:sp>
+        <p:nvSpPr>
+          <p:cNvPr id="12" name="Text 9"/>
+          <p:cNvSpPr/>
+          <p:nvPr/>
+        </p:nvSpPr>
+        <p:spPr>
+          <a:xfrm>
+            <a:off x="8549640" y="4407408"/>
+            <a:ext cx="3017520" cy="365760"/>
+          </a:xfrm>
+          <a:prstGeom prst="rect">
+            <a:avLst/>
+          </a:prstGeom>
+          <a:noFill/>
+          <a:ln/>
+        </p:spPr>
+        <p:txBody>
+          <a:bodyPr wrap="square" lIns="0" tIns="0" rIns="0" bIns="0" rtlCol="0" anchor="ctr"/>
+          <a:lstStyle/>
+          <a:p>
+            <a:pPr indent="0" marL="0">
+              <a:buNone/>
+            </a:pPr>
+            <a:r>
+              <a:rPr lang="en-US" sz="1350" b="1" dirty="0">
                 <a:solidFill>
                   <a:srgbClr val="23272C"/>
                 </a:solidFill>
-                <a:latin typeface="Cambria" pitchFamily="34" charset="0"/>
-                <a:ea typeface="Cambria" pitchFamily="34" charset="-122"/>
-                <a:cs typeface="Cambria" pitchFamily="34" charset="-120"/>
-              </a:rPr>
-              <a:t>Scaffolding earned more than the model upgrade.</a:t>
-            </a:r>
-            <a:endParaRPr lang="en-US" sz="1500" dirty="0"/>
+                <a:latin typeface="Calibri" pitchFamily="34" charset="0"/>
+                <a:ea typeface="Calibri" pitchFamily="34" charset="-122"/>
+                <a:cs typeface="Calibri" pitchFamily="34" charset="-120"/>
+              </a:rPr>
+              <a:t>medical necessity</a:t>
+            </a:r>
+            <a:endParaRPr lang="en-US" sz="1350" dirty="0"/>
+          </a:p>
+        </p:txBody>
+      </p:sp>
+      <p:sp>
+        <p:nvSpPr>
+          <p:cNvPr id="13" name="Text 10"/>
+          <p:cNvSpPr/>
+          <p:nvPr/>
+        </p:nvSpPr>
+        <p:spPr>
+          <a:xfrm>
+            <a:off x="7452360" y="4800600"/>
+            <a:ext cx="4114800" cy="914400"/>
+          </a:xfrm>
+          <a:prstGeom prst="rect">
+            <a:avLst/>
+          </a:prstGeom>
+          <a:noFill/>
+          <a:ln/>
+        </p:spPr>
+        <p:txBody>
+          <a:bodyPr wrap="square" lIns="0" tIns="0" rIns="0" bIns="0" rtlCol="0" anchor="ctr"/>
+          <a:lstStyle/>
+          <a:p>
+            <a:pPr indent="0" marL="0">
+              <a:buNone/>
+            </a:pPr>
+            <a:r>
+              <a:rPr lang="en-US" sz="1150" dirty="0">
+                <a:solidFill>
+                  <a:srgbClr val="6A727C"/>
+                </a:solidFill>
+                <a:latin typeface="Calibri" pitchFamily="34" charset="0"/>
+                <a:ea typeface="Calibri" pitchFamily="34" charset="-122"/>
+                <a:cs typeface="Calibri" pitchFamily="34" charset="-120"/>
+              </a:rPr>
+              <a:t>6 of 8, the hard category. Includes 2 written appeals, both overturned on review</a:t>
+            </a:r>
+            <a:endParaRPr lang="en-US" sz="1150" dirty="0"/>
           </a:p>
         </p:txBody>
       </p:sp>
@@ -3491,7 +3721,7 @@
                 <a:ea typeface="Calibri" pitchFamily="34" charset="-122"/>
                 <a:cs typeface="Calibri" pitchFamily="34" charset="-120"/>
               </a:rPr>
-              <a:t>FAILURE ANALYSIS</a:t>
+              <a:t>RESULTS</a:t>
             </a:r>
             <a:endParaRPr lang="en-US" sz="1050" dirty="0"/>
           </a:p>
@@ -3530,565 +3760,194 @@
                 <a:ea typeface="Cambria" pitchFamily="34" charset="-122"/>
                 <a:cs typeface="Cambria" pitchFamily="34" charset="-120"/>
               </a:rPr>
-              <a:t>Two failures worth more than the wins</a:t>
+              <a:t>The cheap model was enough</a:t>
             </a:r>
             <a:endParaRPr lang="en-US" sz="2900" dirty="0"/>
           </a:p>
         </p:txBody>
       </p:sp>
-      <p:sp>
-        <p:nvSpPr>
-          <p:cNvPr id="4" name="Shape 2"/>
-          <p:cNvSpPr/>
-          <p:nvPr/>
-        </p:nvSpPr>
-        <p:spPr>
-          <a:xfrm>
-            <a:off x="594360" y="1600200"/>
-            <a:ext cx="5486400" cy="3931920"/>
-          </a:xfrm>
-          <a:prstGeom prst="roundRect">
-            <a:avLst>
-              <a:gd name="adj" fmla="val 1047"/>
-            </a:avLst>
-          </a:prstGeom>
-          <a:solidFill>
-            <a:srgbClr val="FFFFFF"/>
-          </a:solidFill>
-          <a:ln w="12700">
-            <a:solidFill>
-              <a:srgbClr val="E3E0DA"/>
-            </a:solidFill>
-            <a:prstDash val="solid"/>
-          </a:ln>
-        </p:spPr>
-      </p:sp>
-      <p:sp>
-        <p:nvSpPr>
-          <p:cNvPr id="5" name="Text 3"/>
-          <p:cNvSpPr/>
-          <p:nvPr/>
-        </p:nvSpPr>
-        <p:spPr>
-          <a:xfrm>
-            <a:off x="960120" y="1920240"/>
-            <a:ext cx="4572000" cy="237744"/>
-          </a:xfrm>
-          <a:prstGeom prst="rect">
-            <a:avLst/>
-          </a:prstGeom>
-          <a:noFill/>
-          <a:ln/>
-        </p:spPr>
-        <p:txBody>
-          <a:bodyPr wrap="square" lIns="0" tIns="0" rIns="0" bIns="0" rtlCol="0" anchor="ctr"/>
-          <a:lstStyle/>
-          <a:p>
-            <a:pPr indent="0" marL="0">
-              <a:buNone/>
-            </a:pPr>
-            <a:r>
-              <a:rPr lang="en-US" sz="950" b="1" spc="200" kern="0" dirty="0">
-                <a:solidFill>
-                  <a:srgbClr val="35639C"/>
+      <p:graphicFrame>
+        <p:nvGraphicFramePr>
+          <p:cNvPr id="4" name="Chart 0" descr=""/>
+          <p:cNvGraphicFramePr/>
+          <p:nvPr/>
+        </p:nvGraphicFramePr>
+        <p:xfrm>
+          <a:off x="594360" y="1691640"/>
+          <a:ext cx="6035040" cy="3749040"/>
+        </p:xfrm>
+        <a:graphic xmlns:a="http://schemas.openxmlformats.org/drawingml/2006/main">
+          <a:graphicData uri="http://schemas.openxmlformats.org/drawingml/2006/chart">
+            <c:chart xmlns:c="http://schemas.openxmlformats.org/drawingml/2006/chart" r:id="rId1"/>
+          </a:graphicData>
+        </a:graphic>
+      </p:graphicFrame>
+      <p:sp>
+        <p:nvSpPr>
+          <p:cNvPr id="5" name="Text 2"/>
+          <p:cNvSpPr/>
+          <p:nvPr/>
+        </p:nvSpPr>
+        <p:spPr>
+          <a:xfrm>
+            <a:off x="594360" y="5532120"/>
+            <a:ext cx="6035040" cy="365760"/>
+          </a:xfrm>
+          <a:prstGeom prst="rect">
+            <a:avLst/>
+          </a:prstGeom>
+          <a:noFill/>
+          <a:ln/>
+        </p:spPr>
+        <p:txBody>
+          <a:bodyPr wrap="square" lIns="0" tIns="0" rIns="0" bIns="0" rtlCol="0" anchor="ctr"/>
+          <a:lstStyle/>
+          <a:p>
+            <a:pPr algn="ctr" indent="0" marL="0">
+              <a:buNone/>
+            </a:pPr>
+            <a:r>
+              <a:rPr lang="en-US" sz="1200" i="1" dirty="0">
+                <a:solidFill>
+                  <a:srgbClr val="9AA1AA"/>
                 </a:solidFill>
                 <a:latin typeface="Calibri" pitchFamily="34" charset="0"/>
                 <a:ea typeface="Calibri" pitchFamily="34" charset="-122"/>
                 <a:cs typeface="Calibri" pitchFamily="34" charset="-120"/>
               </a:rPr>
-              <a:t>ENCOUNTER D2N102</a:t>
-            </a:r>
-            <a:endParaRPr lang="en-US" sz="950" dirty="0"/>
-          </a:p>
-        </p:txBody>
-      </p:sp>
-      <p:sp>
-        <p:nvSpPr>
-          <p:cNvPr id="6" name="Text 4"/>
-          <p:cNvSpPr/>
-          <p:nvPr/>
-        </p:nvSpPr>
-        <p:spPr>
-          <a:xfrm>
-            <a:off x="960120" y="2194560"/>
-            <a:ext cx="4206240" cy="411480"/>
-          </a:xfrm>
-          <a:prstGeom prst="rect">
-            <a:avLst/>
-          </a:prstGeom>
-          <a:noFill/>
-          <a:ln/>
-        </p:spPr>
-        <p:txBody>
-          <a:bodyPr wrap="square" lIns="0" tIns="0" rIns="0" bIns="0" rtlCol="0" anchor="ctr"/>
-          <a:lstStyle/>
-          <a:p>
-            <a:pPr indent="0" marL="0">
-              <a:buNone/>
-            </a:pPr>
-            <a:r>
-              <a:rPr lang="en-US" sz="1700" b="1" dirty="0">
-                <a:solidFill>
-                  <a:srgbClr val="23272C"/>
+              <a:t>identical outcomes on the shared 20 encounters</a:t>
+            </a:r>
+            <a:endParaRPr lang="en-US" sz="1200" dirty="0"/>
+          </a:p>
+        </p:txBody>
+      </p:sp>
+      <p:sp>
+        <p:nvSpPr>
+          <p:cNvPr id="6" name="Text 3"/>
+          <p:cNvSpPr/>
+          <p:nvPr/>
+        </p:nvSpPr>
+        <p:spPr>
+          <a:xfrm>
+            <a:off x="7223760" y="1691640"/>
+            <a:ext cx="4206240" cy="822960"/>
+          </a:xfrm>
+          <a:prstGeom prst="rect">
+            <a:avLst/>
+          </a:prstGeom>
+          <a:noFill/>
+          <a:ln/>
+        </p:spPr>
+        <p:txBody>
+          <a:bodyPr wrap="square" lIns="0" tIns="0" rIns="0" bIns="0" rtlCol="0" anchor="ctr"/>
+          <a:lstStyle/>
+          <a:p>
+            <a:pPr indent="0" marL="0">
+              <a:buNone/>
+            </a:pPr>
+            <a:r>
+              <a:rPr lang="en-US" sz="4600" b="1" dirty="0">
+                <a:solidFill>
+                  <a:srgbClr val="35639C"/>
+                </a:solidFill>
+                <a:latin typeface="Cambria" pitchFamily="34" charset="0"/>
+                <a:ea typeface="Cambria" pitchFamily="34" charset="-122"/>
+                <a:cs typeface="Cambria" pitchFamily="34" charset="-120"/>
+              </a:rPr>
+              <a:t>$0.0039</a:t>
+            </a:r>
+            <a:endParaRPr lang="en-US" sz="4600" dirty="0"/>
+          </a:p>
+        </p:txBody>
+      </p:sp>
+      <p:sp>
+        <p:nvSpPr>
+          <p:cNvPr id="7" name="Text 4"/>
+          <p:cNvSpPr/>
+          <p:nvPr/>
+        </p:nvSpPr>
+        <p:spPr>
+          <a:xfrm>
+            <a:off x="7223760" y="2532888"/>
+            <a:ext cx="4206240" cy="822960"/>
+          </a:xfrm>
+          <a:prstGeom prst="rect">
+            <a:avLst/>
+          </a:prstGeom>
+          <a:noFill/>
+          <a:ln/>
+        </p:spPr>
+        <p:txBody>
+          <a:bodyPr wrap="square" lIns="0" tIns="0" rIns="0" bIns="0" rtlCol="0" anchor="ctr"/>
+          <a:lstStyle/>
+          <a:p>
+            <a:pPr indent="0" marL="0">
+              <a:buNone/>
+            </a:pPr>
+            <a:r>
+              <a:rPr lang="en-US" sz="1250" dirty="0">
+                <a:solidFill>
+                  <a:srgbClr val="6A727C"/>
                 </a:solidFill>
                 <a:latin typeface="Calibri" pitchFamily="34" charset="0"/>
                 <a:ea typeface="Calibri" pitchFamily="34" charset="-122"/>
                 <a:cs typeface="Calibri" pitchFamily="34" charset="-120"/>
               </a:rPr>
-              <a:t>The oscillator</a:t>
-            </a:r>
-            <a:endParaRPr lang="en-US" sz="1700" dirty="0"/>
-          </a:p>
-        </p:txBody>
-      </p:sp>
-      <p:sp>
-        <p:nvSpPr>
-          <p:cNvPr id="7" name="Text 5"/>
-          <p:cNvSpPr/>
-          <p:nvPr/>
-        </p:nvSpPr>
-        <p:spPr>
-          <a:xfrm>
-            <a:off x="960120" y="2743200"/>
-            <a:ext cx="685800" cy="274320"/>
-          </a:xfrm>
-          <a:prstGeom prst="roundRect">
-            <a:avLst>
-              <a:gd name="adj" fmla="val 11667"/>
-            </a:avLst>
-          </a:prstGeom>
-          <a:solidFill>
-            <a:srgbClr val="FFFFFF"/>
-          </a:solidFill>
-          <a:ln w="9525">
-            <a:solidFill>
-              <a:srgbClr val="CFCBC2"/>
-            </a:solidFill>
-          </a:ln>
-        </p:spPr>
-        <p:txBody>
-          <a:bodyPr wrap="square" lIns="0" tIns="0" rIns="0" bIns="0" rtlCol="0" anchor="ctr"/>
-          <a:lstStyle/>
-          <a:p>
-            <a:pPr algn="ctr" indent="0" marL="0">
-              <a:buNone/>
-            </a:pPr>
-            <a:r>
-              <a:rPr lang="en-US" sz="950" b="1" dirty="0">
+              <a:t>per encounter on the budget tier; terra costs 5.5x for the same outcome here</a:t>
+            </a:r>
+            <a:endParaRPr lang="en-US" sz="1250" dirty="0"/>
+          </a:p>
+        </p:txBody>
+      </p:sp>
+      <p:sp>
+        <p:nvSpPr>
+          <p:cNvPr id="8" name="Text 5"/>
+          <p:cNvSpPr/>
+          <p:nvPr/>
+        </p:nvSpPr>
+        <p:spPr>
+          <a:xfrm>
+            <a:off x="7223760" y="3429000"/>
+            <a:ext cx="4206240" cy="822960"/>
+          </a:xfrm>
+          <a:prstGeom prst="rect">
+            <a:avLst/>
+          </a:prstGeom>
+          <a:noFill/>
+          <a:ln/>
+        </p:spPr>
+        <p:txBody>
+          <a:bodyPr wrap="square" lIns="0" tIns="0" rIns="0" bIns="0" rtlCol="0" anchor="ctr"/>
+          <a:lstStyle/>
+          <a:p>
+            <a:pPr indent="0" marL="0">
+              <a:buNone/>
+            </a:pPr>
+            <a:r>
+              <a:rPr lang="en-US" sz="4600" b="1" dirty="0">
                 <a:solidFill>
                   <a:srgbClr val="23272C"/>
                 </a:solidFill>
-                <a:latin typeface="Courier New" pitchFamily="34" charset="0"/>
-                <a:ea typeface="Courier New" pitchFamily="34" charset="-122"/>
-                <a:cs typeface="Courier New" pitchFamily="34" charset="-120"/>
-              </a:rPr>
-              <a:t>R31.0</a:t>
-            </a:r>
-            <a:endParaRPr lang="en-US" sz="950" dirty="0"/>
-          </a:p>
-        </p:txBody>
-      </p:sp>
-      <p:sp>
-        <p:nvSpPr>
-          <p:cNvPr id="8" name="Text 6"/>
-          <p:cNvSpPr/>
-          <p:nvPr/>
-        </p:nvSpPr>
-        <p:spPr>
-          <a:xfrm>
-            <a:off x="1668780" y="2743200"/>
-            <a:ext cx="164592" cy="274320"/>
-          </a:xfrm>
-          <a:prstGeom prst="rect">
-            <a:avLst/>
-          </a:prstGeom>
-          <a:noFill/>
-          <a:ln/>
-        </p:spPr>
-        <p:txBody>
-          <a:bodyPr wrap="square" lIns="0" tIns="0" rIns="0" bIns="0" rtlCol="0" anchor="ctr"/>
-          <a:lstStyle/>
-          <a:p>
-            <a:pPr algn="ctr" indent="0" marL="0">
-              <a:buNone/>
-            </a:pPr>
-            <a:r>
-              <a:rPr lang="en-US" sz="1050" b="1" dirty="0">
-                <a:solidFill>
-                  <a:srgbClr val="9AA1AA"/>
-                </a:solidFill>
-                <a:latin typeface="Courier New" pitchFamily="34" charset="0"/>
-                <a:ea typeface="Courier New" pitchFamily="34" charset="-122"/>
-                <a:cs typeface="Courier New" pitchFamily="34" charset="-120"/>
-              </a:rPr>
-              <a:t>&gt;</a:t>
-            </a:r>
-            <a:endParaRPr lang="en-US" sz="1050" dirty="0"/>
-          </a:p>
-        </p:txBody>
-      </p:sp>
-      <p:sp>
-        <p:nvSpPr>
-          <p:cNvPr id="9" name="Text 7"/>
-          <p:cNvSpPr/>
-          <p:nvPr/>
-        </p:nvSpPr>
-        <p:spPr>
-          <a:xfrm>
-            <a:off x="1856232" y="2743200"/>
-            <a:ext cx="685800" cy="274320"/>
-          </a:xfrm>
-          <a:prstGeom prst="roundRect">
-            <a:avLst>
-              <a:gd name="adj" fmla="val 11667"/>
-            </a:avLst>
-          </a:prstGeom>
-          <a:solidFill>
-            <a:srgbClr val="FFFFFF"/>
-          </a:solidFill>
-          <a:ln w="9525">
-            <a:solidFill>
-              <a:srgbClr val="CFCBC2"/>
-            </a:solidFill>
-          </a:ln>
-        </p:spPr>
-        <p:txBody>
-          <a:bodyPr wrap="square" lIns="0" tIns="0" rIns="0" bIns="0" rtlCol="0" anchor="ctr"/>
-          <a:lstStyle/>
-          <a:p>
-            <a:pPr algn="ctr" indent="0" marL="0">
-              <a:buNone/>
-            </a:pPr>
-            <a:r>
-              <a:rPr lang="en-US" sz="950" b="1" dirty="0">
-                <a:solidFill>
-                  <a:srgbClr val="A8402F"/>
-                </a:solidFill>
-                <a:latin typeface="Courier New" pitchFamily="34" charset="0"/>
-                <a:ea typeface="Courier New" pitchFamily="34" charset="-122"/>
-                <a:cs typeface="Courier New" pitchFamily="34" charset="-120"/>
-              </a:rPr>
-              <a:t>CO-50</a:t>
-            </a:r>
-            <a:endParaRPr lang="en-US" sz="950" dirty="0"/>
-          </a:p>
-        </p:txBody>
-      </p:sp>
-      <p:sp>
-        <p:nvSpPr>
-          <p:cNvPr id="10" name="Text 8"/>
-          <p:cNvSpPr/>
-          <p:nvPr/>
-        </p:nvSpPr>
-        <p:spPr>
-          <a:xfrm>
-            <a:off x="2564892" y="2743200"/>
-            <a:ext cx="164592" cy="274320"/>
-          </a:xfrm>
-          <a:prstGeom prst="rect">
-            <a:avLst/>
-          </a:prstGeom>
-          <a:noFill/>
-          <a:ln/>
-        </p:spPr>
-        <p:txBody>
-          <a:bodyPr wrap="square" lIns="0" tIns="0" rIns="0" bIns="0" rtlCol="0" anchor="ctr"/>
-          <a:lstStyle/>
-          <a:p>
-            <a:pPr algn="ctr" indent="0" marL="0">
-              <a:buNone/>
-            </a:pPr>
-            <a:r>
-              <a:rPr lang="en-US" sz="1050" b="1" dirty="0">
-                <a:solidFill>
-                  <a:srgbClr val="9AA1AA"/>
-                </a:solidFill>
-                <a:latin typeface="Courier New" pitchFamily="34" charset="0"/>
-                <a:ea typeface="Courier New" pitchFamily="34" charset="-122"/>
-                <a:cs typeface="Courier New" pitchFamily="34" charset="-120"/>
-              </a:rPr>
-              <a:t>&gt;</a:t>
-            </a:r>
-            <a:endParaRPr lang="en-US" sz="1050" dirty="0"/>
-          </a:p>
-        </p:txBody>
-      </p:sp>
-      <p:sp>
-        <p:nvSpPr>
-          <p:cNvPr id="11" name="Text 9"/>
-          <p:cNvSpPr/>
-          <p:nvPr/>
-        </p:nvSpPr>
-        <p:spPr>
-          <a:xfrm>
-            <a:off x="2752344" y="2743200"/>
-            <a:ext cx="685800" cy="274320"/>
-          </a:xfrm>
-          <a:prstGeom prst="roundRect">
-            <a:avLst>
-              <a:gd name="adj" fmla="val 11667"/>
-            </a:avLst>
-          </a:prstGeom>
-          <a:solidFill>
-            <a:srgbClr val="FFFFFF"/>
-          </a:solidFill>
-          <a:ln w="9525">
-            <a:solidFill>
-              <a:srgbClr val="CFCBC2"/>
-            </a:solidFill>
-          </a:ln>
-        </p:spPr>
-        <p:txBody>
-          <a:bodyPr wrap="square" lIns="0" tIns="0" rIns="0" bIns="0" rtlCol="0" anchor="ctr"/>
-          <a:lstStyle/>
-          <a:p>
-            <a:pPr algn="ctr" indent="0" marL="0">
-              <a:buNone/>
-            </a:pPr>
-            <a:r>
-              <a:rPr lang="en-US" sz="950" b="1" dirty="0">
-                <a:solidFill>
-                  <a:srgbClr val="23272C"/>
-                </a:solidFill>
-                <a:latin typeface="Courier New" pitchFamily="34" charset="0"/>
-                <a:ea typeface="Courier New" pitchFamily="34" charset="-122"/>
-                <a:cs typeface="Courier New" pitchFamily="34" charset="-120"/>
-              </a:rPr>
-              <a:t>N20.0</a:t>
-            </a:r>
-            <a:endParaRPr lang="en-US" sz="950" dirty="0"/>
-          </a:p>
-        </p:txBody>
-      </p:sp>
-      <p:sp>
-        <p:nvSpPr>
-          <p:cNvPr id="12" name="Text 10"/>
-          <p:cNvSpPr/>
-          <p:nvPr/>
-        </p:nvSpPr>
-        <p:spPr>
-          <a:xfrm>
-            <a:off x="3461004" y="2743200"/>
-            <a:ext cx="164592" cy="274320"/>
-          </a:xfrm>
-          <a:prstGeom prst="rect">
-            <a:avLst/>
-          </a:prstGeom>
-          <a:noFill/>
-          <a:ln/>
-        </p:spPr>
-        <p:txBody>
-          <a:bodyPr wrap="square" lIns="0" tIns="0" rIns="0" bIns="0" rtlCol="0" anchor="ctr"/>
-          <a:lstStyle/>
-          <a:p>
-            <a:pPr algn="ctr" indent="0" marL="0">
-              <a:buNone/>
-            </a:pPr>
-            <a:r>
-              <a:rPr lang="en-US" sz="1050" b="1" dirty="0">
-                <a:solidFill>
-                  <a:srgbClr val="9AA1AA"/>
-                </a:solidFill>
-                <a:latin typeface="Courier New" pitchFamily="34" charset="0"/>
-                <a:ea typeface="Courier New" pitchFamily="34" charset="-122"/>
-                <a:cs typeface="Courier New" pitchFamily="34" charset="-120"/>
-              </a:rPr>
-              <a:t>&gt;</a:t>
-            </a:r>
-            <a:endParaRPr lang="en-US" sz="1050" dirty="0"/>
-          </a:p>
-        </p:txBody>
-      </p:sp>
-      <p:sp>
-        <p:nvSpPr>
-          <p:cNvPr id="13" name="Text 11"/>
-          <p:cNvSpPr/>
-          <p:nvPr/>
-        </p:nvSpPr>
-        <p:spPr>
-          <a:xfrm>
-            <a:off x="3648456" y="2743200"/>
-            <a:ext cx="685800" cy="274320"/>
-          </a:xfrm>
-          <a:prstGeom prst="roundRect">
-            <a:avLst>
-              <a:gd name="adj" fmla="val 11667"/>
-            </a:avLst>
-          </a:prstGeom>
-          <a:solidFill>
-            <a:srgbClr val="FFFFFF"/>
-          </a:solidFill>
-          <a:ln w="9525">
-            <a:solidFill>
-              <a:srgbClr val="CFCBC2"/>
-            </a:solidFill>
-          </a:ln>
-        </p:spPr>
-        <p:txBody>
-          <a:bodyPr wrap="square" lIns="0" tIns="0" rIns="0" bIns="0" rtlCol="0" anchor="ctr"/>
-          <a:lstStyle/>
-          <a:p>
-            <a:pPr algn="ctr" indent="0" marL="0">
-              <a:buNone/>
-            </a:pPr>
-            <a:r>
-              <a:rPr lang="en-US" sz="950" b="1" dirty="0">
-                <a:solidFill>
-                  <a:srgbClr val="A8402F"/>
-                </a:solidFill>
-                <a:latin typeface="Courier New" pitchFamily="34" charset="0"/>
-                <a:ea typeface="Courier New" pitchFamily="34" charset="-122"/>
-                <a:cs typeface="Courier New" pitchFamily="34" charset="-120"/>
-              </a:rPr>
-              <a:t>CO-50</a:t>
-            </a:r>
-            <a:endParaRPr lang="en-US" sz="950" dirty="0"/>
-          </a:p>
-        </p:txBody>
-      </p:sp>
-      <p:sp>
-        <p:nvSpPr>
-          <p:cNvPr id="14" name="Text 12"/>
-          <p:cNvSpPr/>
-          <p:nvPr/>
-        </p:nvSpPr>
-        <p:spPr>
-          <a:xfrm>
-            <a:off x="960120" y="3127248"/>
-            <a:ext cx="1188720" cy="274320"/>
-          </a:xfrm>
-          <a:prstGeom prst="roundRect">
-            <a:avLst>
-              <a:gd name="adj" fmla="val 11667"/>
-            </a:avLst>
-          </a:prstGeom>
-          <a:solidFill>
-            <a:srgbClr val="FFFFFF"/>
-          </a:solidFill>
-          <a:ln w="9525">
-            <a:solidFill>
-              <a:srgbClr val="CFCBC2"/>
-            </a:solidFill>
-          </a:ln>
-        </p:spPr>
-        <p:txBody>
-          <a:bodyPr wrap="square" lIns="0" tIns="0" rIns="0" bIns="0" rtlCol="0" anchor="ctr"/>
-          <a:lstStyle/>
-          <a:p>
-            <a:pPr algn="ctr" indent="0" marL="0">
-              <a:buNone/>
-            </a:pPr>
-            <a:r>
-              <a:rPr lang="en-US" sz="950" b="1" dirty="0">
-                <a:solidFill>
-                  <a:srgbClr val="23272C"/>
-                </a:solidFill>
-                <a:latin typeface="Courier New" pitchFamily="34" charset="0"/>
-                <a:ea typeface="Courier New" pitchFamily="34" charset="-122"/>
-                <a:cs typeface="Courier New" pitchFamily="34" charset="-120"/>
-              </a:rPr>
-              <a:t>back to R31.0</a:t>
-            </a:r>
-            <a:endParaRPr lang="en-US" sz="950" dirty="0"/>
-          </a:p>
-        </p:txBody>
-      </p:sp>
-      <p:sp>
-        <p:nvSpPr>
-          <p:cNvPr id="15" name="Text 13"/>
-          <p:cNvSpPr/>
-          <p:nvPr/>
-        </p:nvSpPr>
-        <p:spPr>
-          <a:xfrm>
-            <a:off x="2171700" y="3127248"/>
-            <a:ext cx="164592" cy="274320"/>
-          </a:xfrm>
-          <a:prstGeom prst="rect">
-            <a:avLst/>
-          </a:prstGeom>
-          <a:noFill/>
-          <a:ln/>
-        </p:spPr>
-        <p:txBody>
-          <a:bodyPr wrap="square" lIns="0" tIns="0" rIns="0" bIns="0" rtlCol="0" anchor="ctr"/>
-          <a:lstStyle/>
-          <a:p>
-            <a:pPr algn="ctr" indent="0" marL="0">
-              <a:buNone/>
-            </a:pPr>
-            <a:r>
-              <a:rPr lang="en-US" sz="1050" b="1" dirty="0">
-                <a:solidFill>
-                  <a:srgbClr val="9AA1AA"/>
-                </a:solidFill>
-                <a:latin typeface="Courier New" pitchFamily="34" charset="0"/>
-                <a:ea typeface="Courier New" pitchFamily="34" charset="-122"/>
-                <a:cs typeface="Courier New" pitchFamily="34" charset="-120"/>
-              </a:rPr>
-              <a:t>&gt;</a:t>
-            </a:r>
-            <a:endParaRPr lang="en-US" sz="1050" dirty="0"/>
-          </a:p>
-        </p:txBody>
-      </p:sp>
-      <p:sp>
-        <p:nvSpPr>
-          <p:cNvPr id="16" name="Text 14"/>
-          <p:cNvSpPr/>
-          <p:nvPr/>
-        </p:nvSpPr>
-        <p:spPr>
-          <a:xfrm>
-            <a:off x="2359152" y="3127248"/>
-            <a:ext cx="1325880" cy="274320"/>
-          </a:xfrm>
-          <a:prstGeom prst="roundRect">
-            <a:avLst>
-              <a:gd name="adj" fmla="val 11667"/>
-            </a:avLst>
-          </a:prstGeom>
-          <a:solidFill>
-            <a:srgbClr val="FFFFFF"/>
-          </a:solidFill>
-          <a:ln w="9525">
-            <a:solidFill>
-              <a:srgbClr val="CFCBC2"/>
-            </a:solidFill>
-          </a:ln>
-        </p:spPr>
-        <p:txBody>
-          <a:bodyPr wrap="square" lIns="0" tIns="0" rIns="0" bIns="0" rtlCol="0" anchor="ctr"/>
-          <a:lstStyle/>
-          <a:p>
-            <a:pPr algn="ctr" indent="0" marL="0">
-              <a:buNone/>
-            </a:pPr>
-            <a:r>
-              <a:rPr lang="en-US" sz="950" b="1" dirty="0">
-                <a:solidFill>
-                  <a:srgbClr val="A8402F"/>
-                </a:solidFill>
-                <a:latin typeface="Courier New" pitchFamily="34" charset="0"/>
-                <a:ea typeface="Courier New" pitchFamily="34" charset="-122"/>
-                <a:cs typeface="Courier New" pitchFamily="34" charset="-120"/>
-              </a:rPr>
-              <a:t>CO-18 duplicate</a:t>
-            </a:r>
-            <a:endParaRPr lang="en-US" sz="950" dirty="0"/>
-          </a:p>
-        </p:txBody>
-      </p:sp>
-      <p:sp>
-        <p:nvSpPr>
-          <p:cNvPr id="17" name="Text 15"/>
-          <p:cNvSpPr/>
-          <p:nvPr/>
-        </p:nvSpPr>
-        <p:spPr>
-          <a:xfrm>
-            <a:off x="960120" y="3611880"/>
-            <a:ext cx="4754880" cy="1097280"/>
+                <a:latin typeface="Cambria" pitchFamily="34" charset="0"/>
+                <a:ea typeface="Cambria" pitchFamily="34" charset="-122"/>
+                <a:cs typeface="Cambria" pitchFamily="34" charset="-120"/>
+              </a:rPr>
+              <a:t>$0.23</a:t>
+            </a:r>
+            <a:endParaRPr lang="en-US" sz="4600" dirty="0"/>
+          </a:p>
+        </p:txBody>
+      </p:sp>
+      <p:sp>
+        <p:nvSpPr>
+          <p:cNvPr id="9" name="Text 6"/>
+          <p:cNvSpPr/>
+          <p:nvPr/>
+        </p:nvSpPr>
+        <p:spPr>
+          <a:xfrm>
+            <a:off x="7223760" y="4270248"/>
+            <a:ext cx="4206240" cy="822960"/>
           </a:xfrm>
           <a:prstGeom prst="rect">
             <a:avLst/>
@@ -4112,7 +3971,7 @@
                 <a:ea typeface="Calibri" pitchFamily="34" charset="-122"/>
                 <a:cs typeface="Calibri" pitchFamily="34" charset="-120"/>
               </a:rPr>
-              <a:t>The resolver swapped between two diagnosis pointers and walked straight back into its own first claim. Each resolution sees only the current denial, never the attempt history.</a:t>
+              <a:t>total inference cost of the entire 60-encounter study</a:t>
             </a:r>
             <a:endParaRPr lang="en-US" sz="1250" dirty="0"/>
           </a:p>
@@ -4120,262 +3979,40 @@
       </p:sp>
       <p:sp>
         <p:nvSpPr>
-          <p:cNvPr id="18" name="Text 16"/>
-          <p:cNvSpPr/>
-          <p:nvPr/>
-        </p:nvSpPr>
-        <p:spPr>
-          <a:xfrm>
-            <a:off x="960120" y="4800600"/>
-            <a:ext cx="4754880" cy="411480"/>
-          </a:xfrm>
-          <a:prstGeom prst="rect">
-            <a:avLst/>
-          </a:prstGeom>
-          <a:noFill/>
-          <a:ln/>
-        </p:spPr>
-        <p:txBody>
-          <a:bodyPr wrap="square" lIns="0" tIns="0" rIns="0" bIns="0" rtlCol="0" anchor="ctr"/>
-          <a:lstStyle/>
-          <a:p>
-            <a:pPr indent="0" marL="0">
-              <a:buNone/>
-            </a:pPr>
-            <a:r>
-              <a:rPr lang="en-US" sz="1350" b="1" dirty="0">
-                <a:solidFill>
-                  <a:srgbClr val="A8402F"/>
-                </a:solidFill>
-                <a:latin typeface="Calibri" pitchFamily="34" charset="0"/>
-                <a:ea typeface="Calibri" pitchFamily="34" charset="-122"/>
-                <a:cs typeface="Calibri" pitchFamily="34" charset="-120"/>
-              </a:rPr>
-              <a:t>An architecture gap, not a model gap.</a:t>
-            </a:r>
-            <a:endParaRPr lang="en-US" sz="1350" dirty="0"/>
-          </a:p>
-        </p:txBody>
-      </p:sp>
-      <p:sp>
-        <p:nvSpPr>
-          <p:cNvPr id="19" name="Shape 17"/>
-          <p:cNvSpPr/>
-          <p:nvPr/>
-        </p:nvSpPr>
-        <p:spPr>
-          <a:xfrm>
-            <a:off x="6400800" y="1600200"/>
-            <a:ext cx="5212080" cy="3931920"/>
-          </a:xfrm>
-          <a:prstGeom prst="roundRect">
-            <a:avLst>
-              <a:gd name="adj" fmla="val 1047"/>
-            </a:avLst>
-          </a:prstGeom>
-          <a:solidFill>
-            <a:srgbClr val="FFFFFF"/>
-          </a:solidFill>
-          <a:ln w="12700">
-            <a:solidFill>
-              <a:srgbClr val="E3E0DA"/>
-            </a:solidFill>
-            <a:prstDash val="solid"/>
-          </a:ln>
-        </p:spPr>
-      </p:sp>
-      <p:sp>
-        <p:nvSpPr>
-          <p:cNvPr id="20" name="Text 18"/>
-          <p:cNvSpPr/>
-          <p:nvPr/>
-        </p:nvSpPr>
-        <p:spPr>
-          <a:xfrm>
-            <a:off x="6766560" y="1920240"/>
-            <a:ext cx="4389120" cy="237744"/>
-          </a:xfrm>
-          <a:prstGeom prst="rect">
-            <a:avLst/>
-          </a:prstGeom>
-          <a:noFill/>
-          <a:ln/>
-        </p:spPr>
-        <p:txBody>
-          <a:bodyPr wrap="square" lIns="0" tIns="0" rIns="0" bIns="0" rtlCol="0" anchor="ctr"/>
-          <a:lstStyle/>
-          <a:p>
-            <a:pPr indent="0" marL="0">
-              <a:buNone/>
-            </a:pPr>
-            <a:r>
-              <a:rPr lang="en-US" sz="950" b="1" spc="200" kern="0" dirty="0">
-                <a:solidFill>
-                  <a:srgbClr val="35639C"/>
-                </a:solidFill>
-                <a:latin typeface="Calibri" pitchFamily="34" charset="0"/>
-                <a:ea typeface="Calibri" pitchFamily="34" charset="-122"/>
-                <a:cs typeface="Calibri" pitchFamily="34" charset="-120"/>
-              </a:rPr>
-              <a:t>ENCOUNTER D2N093</a:t>
-            </a:r>
-            <a:endParaRPr lang="en-US" sz="950" dirty="0"/>
-          </a:p>
-        </p:txBody>
-      </p:sp>
-      <p:sp>
-        <p:nvSpPr>
-          <p:cNvPr id="21" name="Text 19"/>
-          <p:cNvSpPr/>
-          <p:nvPr/>
-        </p:nvSpPr>
-        <p:spPr>
-          <a:xfrm>
-            <a:off x="6766560" y="2194560"/>
-            <a:ext cx="3931920" cy="411480"/>
-          </a:xfrm>
-          <a:prstGeom prst="rect">
-            <a:avLst/>
-          </a:prstGeom>
-          <a:noFill/>
-          <a:ln/>
-        </p:spPr>
-        <p:txBody>
-          <a:bodyPr wrap="square" lIns="0" tIns="0" rIns="0" bIns="0" rtlCol="0" anchor="ctr"/>
-          <a:lstStyle/>
-          <a:p>
-            <a:pPr indent="0" marL="0">
-              <a:buNone/>
-            </a:pPr>
-            <a:r>
-              <a:rPr lang="en-US" sz="1700" b="1" dirty="0">
+          <p:cNvPr id="10" name="Text 7"/>
+          <p:cNvSpPr/>
+          <p:nvPr/>
+        </p:nvSpPr>
+        <p:spPr>
+          <a:xfrm>
+            <a:off x="7223760" y="5394960"/>
+            <a:ext cx="4206240" cy="548640"/>
+          </a:xfrm>
+          <a:prstGeom prst="rect">
+            <a:avLst/>
+          </a:prstGeom>
+          <a:noFill/>
+          <a:ln/>
+        </p:spPr>
+        <p:txBody>
+          <a:bodyPr wrap="square" lIns="0" tIns="0" rIns="0" bIns="0" rtlCol="0" anchor="ctr"/>
+          <a:lstStyle/>
+          <a:p>
+            <a:pPr indent="0" marL="0">
+              <a:buNone/>
+            </a:pPr>
+            <a:r>
+              <a:rPr lang="en-US" sz="1500" b="1" i="1" dirty="0">
                 <a:solidFill>
                   <a:srgbClr val="23272C"/>
                 </a:solidFill>
-                <a:latin typeface="Calibri" pitchFamily="34" charset="0"/>
-                <a:ea typeface="Calibri" pitchFamily="34" charset="-122"/>
-                <a:cs typeface="Calibri" pitchFamily="34" charset="-120"/>
-              </a:rPr>
-              <a:t>The refusal</a:t>
-            </a:r>
-            <a:endParaRPr lang="en-US" sz="1700" dirty="0"/>
-          </a:p>
-        </p:txBody>
-      </p:sp>
-      <p:sp>
-        <p:nvSpPr>
-          <p:cNvPr id="22" name="Text 20"/>
-          <p:cNvSpPr/>
-          <p:nvPr/>
-        </p:nvSpPr>
-        <p:spPr>
-          <a:xfrm>
-            <a:off x="6766560" y="2743200"/>
-            <a:ext cx="4480560" cy="1417320"/>
-          </a:xfrm>
-          <a:prstGeom prst="rect">
-            <a:avLst/>
-          </a:prstGeom>
-          <a:noFill/>
-          <a:ln/>
-        </p:spPr>
-        <p:txBody>
-          <a:bodyPr wrap="square" lIns="0" tIns="0" rIns="0" bIns="0" rtlCol="0" anchor="ctr"/>
-          <a:lstStyle/>
-          <a:p>
-            <a:pPr indent="0" marL="0">
-              <a:buNone/>
-            </a:pPr>
-            <a:r>
-              <a:rPr lang="en-US" sz="1250" dirty="0">
-                <a:solidFill>
-                  <a:srgbClr val="6A727C"/>
-                </a:solidFill>
-                <a:latin typeface="Calibri" pitchFamily="34" charset="0"/>
-                <a:ea typeface="Calibri" pitchFamily="34" charset="-122"/>
-                <a:cs typeface="Calibri" pitchFamily="34" charset="-120"/>
-              </a:rPr>
-              <a:t>An A1c lab was billed against type 1 diabetes, which the demo policy does not cover. The resolver examined the note, found no compliant fix, refused to invent a diagnosis, and abandoned the line.</a:t>
-            </a:r>
-            <a:endParaRPr lang="en-US" sz="1250" dirty="0"/>
-          </a:p>
-        </p:txBody>
-      </p:sp>
-      <p:sp>
-        <p:nvSpPr>
-          <p:cNvPr id="23" name="Text 21"/>
-          <p:cNvSpPr/>
-          <p:nvPr/>
-        </p:nvSpPr>
-        <p:spPr>
-          <a:xfrm>
-            <a:off x="6766560" y="4206240"/>
-            <a:ext cx="4480560" cy="685800"/>
-          </a:xfrm>
-          <a:prstGeom prst="rect">
-            <a:avLst/>
-          </a:prstGeom>
-          <a:noFill/>
-          <a:ln/>
-        </p:spPr>
-        <p:txBody>
-          <a:bodyPr wrap="square" lIns="0" tIns="0" rIns="0" bIns="0" rtlCol="0" anchor="ctr"/>
-          <a:lstStyle/>
-          <a:p>
-            <a:pPr indent="0" marL="0">
-              <a:buNone/>
-            </a:pPr>
-            <a:r>
-              <a:rPr lang="en-US" sz="1350" b="1" dirty="0">
-                <a:solidFill>
-                  <a:srgbClr val="2E7D4F"/>
-                </a:solidFill>
-                <a:latin typeface="Calibri" pitchFamily="34" charset="0"/>
-                <a:ea typeface="Calibri" pitchFamily="34" charset="-122"/>
-                <a:cs typeface="Calibri" pitchFamily="34" charset="-120"/>
-              </a:rPr>
-              <a:t>The guardrail behaving exactly as instructed: never fabricate clinical facts.</a:t>
-            </a:r>
-            <a:endParaRPr lang="en-US" sz="1350" dirty="0"/>
-          </a:p>
-        </p:txBody>
-      </p:sp>
-      <p:sp>
-        <p:nvSpPr>
-          <p:cNvPr id="24" name="Text 22"/>
-          <p:cNvSpPr/>
-          <p:nvPr/>
-        </p:nvSpPr>
-        <p:spPr>
-          <a:xfrm>
-            <a:off x="594360" y="5806440"/>
-            <a:ext cx="11018520" cy="411480"/>
-          </a:xfrm>
-          <a:prstGeom prst="rect">
-            <a:avLst/>
-          </a:prstGeom>
-          <a:noFill/>
-          <a:ln/>
-        </p:spPr>
-        <p:txBody>
-          <a:bodyPr wrap="square" lIns="0" tIns="0" rIns="0" bIns="0" rtlCol="0" anchor="ctr"/>
-          <a:lstStyle/>
-          <a:p>
-            <a:pPr algn="ctr" indent="0" marL="0">
-              <a:buNone/>
-            </a:pPr>
-            <a:r>
-              <a:rPr lang="en-US" sz="1300" i="1" dirty="0">
-                <a:solidFill>
-                  <a:srgbClr val="6A727C"/>
-                </a:solidFill>
-                <a:latin typeface="Calibri" pitchFamily="34" charset="0"/>
-                <a:ea typeface="Calibri" pitchFamily="34" charset="-122"/>
-                <a:cs typeface="Calibri" pitchFamily="34" charset="-120"/>
-              </a:rPr>
-              <a:t>A deterministic payer makes policy gaps and agent flaws cleanly separable.</a:t>
-            </a:r>
-            <a:endParaRPr lang="en-US" sz="1300" dirty="0"/>
+                <a:latin typeface="Cambria" pitchFamily="34" charset="0"/>
+                <a:ea typeface="Cambria" pitchFamily="34" charset="-122"/>
+                <a:cs typeface="Cambria" pitchFamily="34" charset="-120"/>
+              </a:rPr>
+              <a:t>Scaffolding earned more than the model upgrade.</a:t>
+            </a:r>
+            <a:endParaRPr lang="en-US" sz="1500" dirty="0"/>
           </a:p>
         </p:txBody>
       </p:sp>
@@ -4444,6 +4081,959 @@
                 <a:ea typeface="Calibri" pitchFamily="34" charset="-122"/>
                 <a:cs typeface="Calibri" pitchFamily="34" charset="-120"/>
               </a:rPr>
+              <a:t>FAILURE ANALYSIS</a:t>
+            </a:r>
+            <a:endParaRPr lang="en-US" sz="1050" dirty="0"/>
+          </a:p>
+        </p:txBody>
+      </p:sp>
+      <p:sp>
+        <p:nvSpPr>
+          <p:cNvPr id="3" name="Text 1"/>
+          <p:cNvSpPr/>
+          <p:nvPr/>
+        </p:nvSpPr>
+        <p:spPr>
+          <a:xfrm>
+            <a:off x="548640" y="566928"/>
+            <a:ext cx="11064240" cy="685800"/>
+          </a:xfrm>
+          <a:prstGeom prst="rect">
+            <a:avLst/>
+          </a:prstGeom>
+          <a:noFill/>
+          <a:ln/>
+        </p:spPr>
+        <p:txBody>
+          <a:bodyPr wrap="square" lIns="0" tIns="0" rIns="0" bIns="0" rtlCol="0" anchor="ctr"/>
+          <a:lstStyle/>
+          <a:p>
+            <a:pPr indent="0" marL="0">
+              <a:buNone/>
+            </a:pPr>
+            <a:r>
+              <a:rPr lang="en-US" sz="2900" b="1" dirty="0">
+                <a:solidFill>
+                  <a:srgbClr val="23272C"/>
+                </a:solidFill>
+                <a:latin typeface="Cambria" pitchFamily="34" charset="0"/>
+                <a:ea typeface="Cambria" pitchFamily="34" charset="-122"/>
+                <a:cs typeface="Cambria" pitchFamily="34" charset="-120"/>
+              </a:rPr>
+              <a:t>Two failures worth more than the wins</a:t>
+            </a:r>
+            <a:endParaRPr lang="en-US" sz="2900" dirty="0"/>
+          </a:p>
+        </p:txBody>
+      </p:sp>
+      <p:sp>
+        <p:nvSpPr>
+          <p:cNvPr id="4" name="Shape 2"/>
+          <p:cNvSpPr/>
+          <p:nvPr/>
+        </p:nvSpPr>
+        <p:spPr>
+          <a:xfrm>
+            <a:off x="594360" y="1600200"/>
+            <a:ext cx="5486400" cy="3931920"/>
+          </a:xfrm>
+          <a:prstGeom prst="roundRect">
+            <a:avLst>
+              <a:gd name="adj" fmla="val 1047"/>
+            </a:avLst>
+          </a:prstGeom>
+          <a:solidFill>
+            <a:srgbClr val="FFFFFF"/>
+          </a:solidFill>
+          <a:ln w="12700">
+            <a:solidFill>
+              <a:srgbClr val="E3E0DA"/>
+            </a:solidFill>
+            <a:prstDash val="solid"/>
+          </a:ln>
+        </p:spPr>
+      </p:sp>
+      <p:sp>
+        <p:nvSpPr>
+          <p:cNvPr id="5" name="Text 3"/>
+          <p:cNvSpPr/>
+          <p:nvPr/>
+        </p:nvSpPr>
+        <p:spPr>
+          <a:xfrm>
+            <a:off x="960120" y="1920240"/>
+            <a:ext cx="4572000" cy="237744"/>
+          </a:xfrm>
+          <a:prstGeom prst="rect">
+            <a:avLst/>
+          </a:prstGeom>
+          <a:noFill/>
+          <a:ln/>
+        </p:spPr>
+        <p:txBody>
+          <a:bodyPr wrap="square" lIns="0" tIns="0" rIns="0" bIns="0" rtlCol="0" anchor="ctr"/>
+          <a:lstStyle/>
+          <a:p>
+            <a:pPr indent="0" marL="0">
+              <a:buNone/>
+            </a:pPr>
+            <a:r>
+              <a:rPr lang="en-US" sz="950" b="1" spc="200" kern="0" dirty="0">
+                <a:solidFill>
+                  <a:srgbClr val="35639C"/>
+                </a:solidFill>
+                <a:latin typeface="Calibri" pitchFamily="34" charset="0"/>
+                <a:ea typeface="Calibri" pitchFamily="34" charset="-122"/>
+                <a:cs typeface="Calibri" pitchFamily="34" charset="-120"/>
+              </a:rPr>
+              <a:t>ENCOUNTER D2N102</a:t>
+            </a:r>
+            <a:endParaRPr lang="en-US" sz="950" dirty="0"/>
+          </a:p>
+        </p:txBody>
+      </p:sp>
+      <p:sp>
+        <p:nvSpPr>
+          <p:cNvPr id="6" name="Text 4"/>
+          <p:cNvSpPr/>
+          <p:nvPr/>
+        </p:nvSpPr>
+        <p:spPr>
+          <a:xfrm>
+            <a:off x="960120" y="2194560"/>
+            <a:ext cx="4206240" cy="411480"/>
+          </a:xfrm>
+          <a:prstGeom prst="rect">
+            <a:avLst/>
+          </a:prstGeom>
+          <a:noFill/>
+          <a:ln/>
+        </p:spPr>
+        <p:txBody>
+          <a:bodyPr wrap="square" lIns="0" tIns="0" rIns="0" bIns="0" rtlCol="0" anchor="ctr"/>
+          <a:lstStyle/>
+          <a:p>
+            <a:pPr indent="0" marL="0">
+              <a:buNone/>
+            </a:pPr>
+            <a:r>
+              <a:rPr lang="en-US" sz="1700" b="1" dirty="0">
+                <a:solidFill>
+                  <a:srgbClr val="23272C"/>
+                </a:solidFill>
+                <a:latin typeface="Calibri" pitchFamily="34" charset="0"/>
+                <a:ea typeface="Calibri" pitchFamily="34" charset="-122"/>
+                <a:cs typeface="Calibri" pitchFamily="34" charset="-120"/>
+              </a:rPr>
+              <a:t>The oscillator</a:t>
+            </a:r>
+            <a:endParaRPr lang="en-US" sz="1700" dirty="0"/>
+          </a:p>
+        </p:txBody>
+      </p:sp>
+      <p:sp>
+        <p:nvSpPr>
+          <p:cNvPr id="7" name="Text 5"/>
+          <p:cNvSpPr/>
+          <p:nvPr/>
+        </p:nvSpPr>
+        <p:spPr>
+          <a:xfrm>
+            <a:off x="960120" y="2743200"/>
+            <a:ext cx="685800" cy="274320"/>
+          </a:xfrm>
+          <a:prstGeom prst="roundRect">
+            <a:avLst>
+              <a:gd name="adj" fmla="val 11667"/>
+            </a:avLst>
+          </a:prstGeom>
+          <a:solidFill>
+            <a:srgbClr val="FFFFFF"/>
+          </a:solidFill>
+          <a:ln w="9525">
+            <a:solidFill>
+              <a:srgbClr val="CFCBC2"/>
+            </a:solidFill>
+          </a:ln>
+        </p:spPr>
+        <p:txBody>
+          <a:bodyPr wrap="square" lIns="0" tIns="0" rIns="0" bIns="0" rtlCol="0" anchor="ctr"/>
+          <a:lstStyle/>
+          <a:p>
+            <a:pPr algn="ctr" indent="0" marL="0">
+              <a:buNone/>
+            </a:pPr>
+            <a:r>
+              <a:rPr lang="en-US" sz="950" b="1" dirty="0">
+                <a:solidFill>
+                  <a:srgbClr val="23272C"/>
+                </a:solidFill>
+                <a:latin typeface="Courier New" pitchFamily="34" charset="0"/>
+                <a:ea typeface="Courier New" pitchFamily="34" charset="-122"/>
+                <a:cs typeface="Courier New" pitchFamily="34" charset="-120"/>
+              </a:rPr>
+              <a:t>R31.0</a:t>
+            </a:r>
+            <a:endParaRPr lang="en-US" sz="950" dirty="0"/>
+          </a:p>
+        </p:txBody>
+      </p:sp>
+      <p:sp>
+        <p:nvSpPr>
+          <p:cNvPr id="8" name="Text 6"/>
+          <p:cNvSpPr/>
+          <p:nvPr/>
+        </p:nvSpPr>
+        <p:spPr>
+          <a:xfrm>
+            <a:off x="1668780" y="2743200"/>
+            <a:ext cx="164592" cy="274320"/>
+          </a:xfrm>
+          <a:prstGeom prst="rect">
+            <a:avLst/>
+          </a:prstGeom>
+          <a:noFill/>
+          <a:ln/>
+        </p:spPr>
+        <p:txBody>
+          <a:bodyPr wrap="square" lIns="0" tIns="0" rIns="0" bIns="0" rtlCol="0" anchor="ctr"/>
+          <a:lstStyle/>
+          <a:p>
+            <a:pPr algn="ctr" indent="0" marL="0">
+              <a:buNone/>
+            </a:pPr>
+            <a:r>
+              <a:rPr lang="en-US" sz="1050" b="1" dirty="0">
+                <a:solidFill>
+                  <a:srgbClr val="9AA1AA"/>
+                </a:solidFill>
+                <a:latin typeface="Courier New" pitchFamily="34" charset="0"/>
+                <a:ea typeface="Courier New" pitchFamily="34" charset="-122"/>
+                <a:cs typeface="Courier New" pitchFamily="34" charset="-120"/>
+              </a:rPr>
+              <a:t>&gt;</a:t>
+            </a:r>
+            <a:endParaRPr lang="en-US" sz="1050" dirty="0"/>
+          </a:p>
+        </p:txBody>
+      </p:sp>
+      <p:sp>
+        <p:nvSpPr>
+          <p:cNvPr id="9" name="Text 7"/>
+          <p:cNvSpPr/>
+          <p:nvPr/>
+        </p:nvSpPr>
+        <p:spPr>
+          <a:xfrm>
+            <a:off x="1856232" y="2743200"/>
+            <a:ext cx="685800" cy="274320"/>
+          </a:xfrm>
+          <a:prstGeom prst="roundRect">
+            <a:avLst>
+              <a:gd name="adj" fmla="val 11667"/>
+            </a:avLst>
+          </a:prstGeom>
+          <a:solidFill>
+            <a:srgbClr val="FFFFFF"/>
+          </a:solidFill>
+          <a:ln w="9525">
+            <a:solidFill>
+              <a:srgbClr val="CFCBC2"/>
+            </a:solidFill>
+          </a:ln>
+        </p:spPr>
+        <p:txBody>
+          <a:bodyPr wrap="square" lIns="0" tIns="0" rIns="0" bIns="0" rtlCol="0" anchor="ctr"/>
+          <a:lstStyle/>
+          <a:p>
+            <a:pPr algn="ctr" indent="0" marL="0">
+              <a:buNone/>
+            </a:pPr>
+            <a:r>
+              <a:rPr lang="en-US" sz="950" b="1" dirty="0">
+                <a:solidFill>
+                  <a:srgbClr val="A8402F"/>
+                </a:solidFill>
+                <a:latin typeface="Courier New" pitchFamily="34" charset="0"/>
+                <a:ea typeface="Courier New" pitchFamily="34" charset="-122"/>
+                <a:cs typeface="Courier New" pitchFamily="34" charset="-120"/>
+              </a:rPr>
+              <a:t>CO-50</a:t>
+            </a:r>
+            <a:endParaRPr lang="en-US" sz="950" dirty="0"/>
+          </a:p>
+        </p:txBody>
+      </p:sp>
+      <p:sp>
+        <p:nvSpPr>
+          <p:cNvPr id="10" name="Text 8"/>
+          <p:cNvSpPr/>
+          <p:nvPr/>
+        </p:nvSpPr>
+        <p:spPr>
+          <a:xfrm>
+            <a:off x="2564892" y="2743200"/>
+            <a:ext cx="164592" cy="274320"/>
+          </a:xfrm>
+          <a:prstGeom prst="rect">
+            <a:avLst/>
+          </a:prstGeom>
+          <a:noFill/>
+          <a:ln/>
+        </p:spPr>
+        <p:txBody>
+          <a:bodyPr wrap="square" lIns="0" tIns="0" rIns="0" bIns="0" rtlCol="0" anchor="ctr"/>
+          <a:lstStyle/>
+          <a:p>
+            <a:pPr algn="ctr" indent="0" marL="0">
+              <a:buNone/>
+            </a:pPr>
+            <a:r>
+              <a:rPr lang="en-US" sz="1050" b="1" dirty="0">
+                <a:solidFill>
+                  <a:srgbClr val="9AA1AA"/>
+                </a:solidFill>
+                <a:latin typeface="Courier New" pitchFamily="34" charset="0"/>
+                <a:ea typeface="Courier New" pitchFamily="34" charset="-122"/>
+                <a:cs typeface="Courier New" pitchFamily="34" charset="-120"/>
+              </a:rPr>
+              <a:t>&gt;</a:t>
+            </a:r>
+            <a:endParaRPr lang="en-US" sz="1050" dirty="0"/>
+          </a:p>
+        </p:txBody>
+      </p:sp>
+      <p:sp>
+        <p:nvSpPr>
+          <p:cNvPr id="11" name="Text 9"/>
+          <p:cNvSpPr/>
+          <p:nvPr/>
+        </p:nvSpPr>
+        <p:spPr>
+          <a:xfrm>
+            <a:off x="2752344" y="2743200"/>
+            <a:ext cx="685800" cy="274320"/>
+          </a:xfrm>
+          <a:prstGeom prst="roundRect">
+            <a:avLst>
+              <a:gd name="adj" fmla="val 11667"/>
+            </a:avLst>
+          </a:prstGeom>
+          <a:solidFill>
+            <a:srgbClr val="FFFFFF"/>
+          </a:solidFill>
+          <a:ln w="9525">
+            <a:solidFill>
+              <a:srgbClr val="CFCBC2"/>
+            </a:solidFill>
+          </a:ln>
+        </p:spPr>
+        <p:txBody>
+          <a:bodyPr wrap="square" lIns="0" tIns="0" rIns="0" bIns="0" rtlCol="0" anchor="ctr"/>
+          <a:lstStyle/>
+          <a:p>
+            <a:pPr algn="ctr" indent="0" marL="0">
+              <a:buNone/>
+            </a:pPr>
+            <a:r>
+              <a:rPr lang="en-US" sz="950" b="1" dirty="0">
+                <a:solidFill>
+                  <a:srgbClr val="23272C"/>
+                </a:solidFill>
+                <a:latin typeface="Courier New" pitchFamily="34" charset="0"/>
+                <a:ea typeface="Courier New" pitchFamily="34" charset="-122"/>
+                <a:cs typeface="Courier New" pitchFamily="34" charset="-120"/>
+              </a:rPr>
+              <a:t>N20.0</a:t>
+            </a:r>
+            <a:endParaRPr lang="en-US" sz="950" dirty="0"/>
+          </a:p>
+        </p:txBody>
+      </p:sp>
+      <p:sp>
+        <p:nvSpPr>
+          <p:cNvPr id="12" name="Text 10"/>
+          <p:cNvSpPr/>
+          <p:nvPr/>
+        </p:nvSpPr>
+        <p:spPr>
+          <a:xfrm>
+            <a:off x="3461004" y="2743200"/>
+            <a:ext cx="164592" cy="274320"/>
+          </a:xfrm>
+          <a:prstGeom prst="rect">
+            <a:avLst/>
+          </a:prstGeom>
+          <a:noFill/>
+          <a:ln/>
+        </p:spPr>
+        <p:txBody>
+          <a:bodyPr wrap="square" lIns="0" tIns="0" rIns="0" bIns="0" rtlCol="0" anchor="ctr"/>
+          <a:lstStyle/>
+          <a:p>
+            <a:pPr algn="ctr" indent="0" marL="0">
+              <a:buNone/>
+            </a:pPr>
+            <a:r>
+              <a:rPr lang="en-US" sz="1050" b="1" dirty="0">
+                <a:solidFill>
+                  <a:srgbClr val="9AA1AA"/>
+                </a:solidFill>
+                <a:latin typeface="Courier New" pitchFamily="34" charset="0"/>
+                <a:ea typeface="Courier New" pitchFamily="34" charset="-122"/>
+                <a:cs typeface="Courier New" pitchFamily="34" charset="-120"/>
+              </a:rPr>
+              <a:t>&gt;</a:t>
+            </a:r>
+            <a:endParaRPr lang="en-US" sz="1050" dirty="0"/>
+          </a:p>
+        </p:txBody>
+      </p:sp>
+      <p:sp>
+        <p:nvSpPr>
+          <p:cNvPr id="13" name="Text 11"/>
+          <p:cNvSpPr/>
+          <p:nvPr/>
+        </p:nvSpPr>
+        <p:spPr>
+          <a:xfrm>
+            <a:off x="3648456" y="2743200"/>
+            <a:ext cx="685800" cy="274320"/>
+          </a:xfrm>
+          <a:prstGeom prst="roundRect">
+            <a:avLst>
+              <a:gd name="adj" fmla="val 11667"/>
+            </a:avLst>
+          </a:prstGeom>
+          <a:solidFill>
+            <a:srgbClr val="FFFFFF"/>
+          </a:solidFill>
+          <a:ln w="9525">
+            <a:solidFill>
+              <a:srgbClr val="CFCBC2"/>
+            </a:solidFill>
+          </a:ln>
+        </p:spPr>
+        <p:txBody>
+          <a:bodyPr wrap="square" lIns="0" tIns="0" rIns="0" bIns="0" rtlCol="0" anchor="ctr"/>
+          <a:lstStyle/>
+          <a:p>
+            <a:pPr algn="ctr" indent="0" marL="0">
+              <a:buNone/>
+            </a:pPr>
+            <a:r>
+              <a:rPr lang="en-US" sz="950" b="1" dirty="0">
+                <a:solidFill>
+                  <a:srgbClr val="A8402F"/>
+                </a:solidFill>
+                <a:latin typeface="Courier New" pitchFamily="34" charset="0"/>
+                <a:ea typeface="Courier New" pitchFamily="34" charset="-122"/>
+                <a:cs typeface="Courier New" pitchFamily="34" charset="-120"/>
+              </a:rPr>
+              <a:t>CO-50</a:t>
+            </a:r>
+            <a:endParaRPr lang="en-US" sz="950" dirty="0"/>
+          </a:p>
+        </p:txBody>
+      </p:sp>
+      <p:sp>
+        <p:nvSpPr>
+          <p:cNvPr id="14" name="Text 12"/>
+          <p:cNvSpPr/>
+          <p:nvPr/>
+        </p:nvSpPr>
+        <p:spPr>
+          <a:xfrm>
+            <a:off x="960120" y="3127248"/>
+            <a:ext cx="1188720" cy="274320"/>
+          </a:xfrm>
+          <a:prstGeom prst="roundRect">
+            <a:avLst>
+              <a:gd name="adj" fmla="val 11667"/>
+            </a:avLst>
+          </a:prstGeom>
+          <a:solidFill>
+            <a:srgbClr val="FFFFFF"/>
+          </a:solidFill>
+          <a:ln w="9525">
+            <a:solidFill>
+              <a:srgbClr val="CFCBC2"/>
+            </a:solidFill>
+          </a:ln>
+        </p:spPr>
+        <p:txBody>
+          <a:bodyPr wrap="square" lIns="0" tIns="0" rIns="0" bIns="0" rtlCol="0" anchor="ctr"/>
+          <a:lstStyle/>
+          <a:p>
+            <a:pPr algn="ctr" indent="0" marL="0">
+              <a:buNone/>
+            </a:pPr>
+            <a:r>
+              <a:rPr lang="en-US" sz="950" b="1" dirty="0">
+                <a:solidFill>
+                  <a:srgbClr val="23272C"/>
+                </a:solidFill>
+                <a:latin typeface="Courier New" pitchFamily="34" charset="0"/>
+                <a:ea typeface="Courier New" pitchFamily="34" charset="-122"/>
+                <a:cs typeface="Courier New" pitchFamily="34" charset="-120"/>
+              </a:rPr>
+              <a:t>back to R31.0</a:t>
+            </a:r>
+            <a:endParaRPr lang="en-US" sz="950" dirty="0"/>
+          </a:p>
+        </p:txBody>
+      </p:sp>
+      <p:sp>
+        <p:nvSpPr>
+          <p:cNvPr id="15" name="Text 13"/>
+          <p:cNvSpPr/>
+          <p:nvPr/>
+        </p:nvSpPr>
+        <p:spPr>
+          <a:xfrm>
+            <a:off x="2171700" y="3127248"/>
+            <a:ext cx="164592" cy="274320"/>
+          </a:xfrm>
+          <a:prstGeom prst="rect">
+            <a:avLst/>
+          </a:prstGeom>
+          <a:noFill/>
+          <a:ln/>
+        </p:spPr>
+        <p:txBody>
+          <a:bodyPr wrap="square" lIns="0" tIns="0" rIns="0" bIns="0" rtlCol="0" anchor="ctr"/>
+          <a:lstStyle/>
+          <a:p>
+            <a:pPr algn="ctr" indent="0" marL="0">
+              <a:buNone/>
+            </a:pPr>
+            <a:r>
+              <a:rPr lang="en-US" sz="1050" b="1" dirty="0">
+                <a:solidFill>
+                  <a:srgbClr val="9AA1AA"/>
+                </a:solidFill>
+                <a:latin typeface="Courier New" pitchFamily="34" charset="0"/>
+                <a:ea typeface="Courier New" pitchFamily="34" charset="-122"/>
+                <a:cs typeface="Courier New" pitchFamily="34" charset="-120"/>
+              </a:rPr>
+              <a:t>&gt;</a:t>
+            </a:r>
+            <a:endParaRPr lang="en-US" sz="1050" dirty="0"/>
+          </a:p>
+        </p:txBody>
+      </p:sp>
+      <p:sp>
+        <p:nvSpPr>
+          <p:cNvPr id="16" name="Text 14"/>
+          <p:cNvSpPr/>
+          <p:nvPr/>
+        </p:nvSpPr>
+        <p:spPr>
+          <a:xfrm>
+            <a:off x="2359152" y="3127248"/>
+            <a:ext cx="1325880" cy="274320"/>
+          </a:xfrm>
+          <a:prstGeom prst="roundRect">
+            <a:avLst>
+              <a:gd name="adj" fmla="val 11667"/>
+            </a:avLst>
+          </a:prstGeom>
+          <a:solidFill>
+            <a:srgbClr val="FFFFFF"/>
+          </a:solidFill>
+          <a:ln w="9525">
+            <a:solidFill>
+              <a:srgbClr val="CFCBC2"/>
+            </a:solidFill>
+          </a:ln>
+        </p:spPr>
+        <p:txBody>
+          <a:bodyPr wrap="square" lIns="0" tIns="0" rIns="0" bIns="0" rtlCol="0" anchor="ctr"/>
+          <a:lstStyle/>
+          <a:p>
+            <a:pPr algn="ctr" indent="0" marL="0">
+              <a:buNone/>
+            </a:pPr>
+            <a:r>
+              <a:rPr lang="en-US" sz="950" b="1" dirty="0">
+                <a:solidFill>
+                  <a:srgbClr val="A8402F"/>
+                </a:solidFill>
+                <a:latin typeface="Courier New" pitchFamily="34" charset="0"/>
+                <a:ea typeface="Courier New" pitchFamily="34" charset="-122"/>
+                <a:cs typeface="Courier New" pitchFamily="34" charset="-120"/>
+              </a:rPr>
+              <a:t>CO-18 duplicate</a:t>
+            </a:r>
+            <a:endParaRPr lang="en-US" sz="950" dirty="0"/>
+          </a:p>
+        </p:txBody>
+      </p:sp>
+      <p:sp>
+        <p:nvSpPr>
+          <p:cNvPr id="17" name="Text 15"/>
+          <p:cNvSpPr/>
+          <p:nvPr/>
+        </p:nvSpPr>
+        <p:spPr>
+          <a:xfrm>
+            <a:off x="960120" y="3611880"/>
+            <a:ext cx="4754880" cy="1097280"/>
+          </a:xfrm>
+          <a:prstGeom prst="rect">
+            <a:avLst/>
+          </a:prstGeom>
+          <a:noFill/>
+          <a:ln/>
+        </p:spPr>
+        <p:txBody>
+          <a:bodyPr wrap="square" lIns="0" tIns="0" rIns="0" bIns="0" rtlCol="0" anchor="ctr"/>
+          <a:lstStyle/>
+          <a:p>
+            <a:pPr indent="0" marL="0">
+              <a:buNone/>
+            </a:pPr>
+            <a:r>
+              <a:rPr lang="en-US" sz="1250" dirty="0">
+                <a:solidFill>
+                  <a:srgbClr val="6A727C"/>
+                </a:solidFill>
+                <a:latin typeface="Calibri" pitchFamily="34" charset="0"/>
+                <a:ea typeface="Calibri" pitchFamily="34" charset="-122"/>
+                <a:cs typeface="Calibri" pitchFamily="34" charset="-120"/>
+              </a:rPr>
+              <a:t>The resolver swapped between two diagnosis pointers and walked straight back into its own first claim. Each resolution sees only the current denial, never the attempt history.</a:t>
+            </a:r>
+            <a:endParaRPr lang="en-US" sz="1250" dirty="0"/>
+          </a:p>
+        </p:txBody>
+      </p:sp>
+      <p:sp>
+        <p:nvSpPr>
+          <p:cNvPr id="18" name="Text 16"/>
+          <p:cNvSpPr/>
+          <p:nvPr/>
+        </p:nvSpPr>
+        <p:spPr>
+          <a:xfrm>
+            <a:off x="960120" y="4800600"/>
+            <a:ext cx="4754880" cy="411480"/>
+          </a:xfrm>
+          <a:prstGeom prst="rect">
+            <a:avLst/>
+          </a:prstGeom>
+          <a:noFill/>
+          <a:ln/>
+        </p:spPr>
+        <p:txBody>
+          <a:bodyPr wrap="square" lIns="0" tIns="0" rIns="0" bIns="0" rtlCol="0" anchor="ctr"/>
+          <a:lstStyle/>
+          <a:p>
+            <a:pPr indent="0" marL="0">
+              <a:buNone/>
+            </a:pPr>
+            <a:r>
+              <a:rPr lang="en-US" sz="1350" b="1" dirty="0">
+                <a:solidFill>
+                  <a:srgbClr val="A8402F"/>
+                </a:solidFill>
+                <a:latin typeface="Calibri" pitchFamily="34" charset="0"/>
+                <a:ea typeface="Calibri" pitchFamily="34" charset="-122"/>
+                <a:cs typeface="Calibri" pitchFamily="34" charset="-120"/>
+              </a:rPr>
+              <a:t>An architecture gap, not a model gap.</a:t>
+            </a:r>
+            <a:endParaRPr lang="en-US" sz="1350" dirty="0"/>
+          </a:p>
+        </p:txBody>
+      </p:sp>
+      <p:sp>
+        <p:nvSpPr>
+          <p:cNvPr id="19" name="Shape 17"/>
+          <p:cNvSpPr/>
+          <p:nvPr/>
+        </p:nvSpPr>
+        <p:spPr>
+          <a:xfrm>
+            <a:off x="6400800" y="1600200"/>
+            <a:ext cx="5212080" cy="3931920"/>
+          </a:xfrm>
+          <a:prstGeom prst="roundRect">
+            <a:avLst>
+              <a:gd name="adj" fmla="val 1047"/>
+            </a:avLst>
+          </a:prstGeom>
+          <a:solidFill>
+            <a:srgbClr val="FFFFFF"/>
+          </a:solidFill>
+          <a:ln w="12700">
+            <a:solidFill>
+              <a:srgbClr val="E3E0DA"/>
+            </a:solidFill>
+            <a:prstDash val="solid"/>
+          </a:ln>
+        </p:spPr>
+      </p:sp>
+      <p:sp>
+        <p:nvSpPr>
+          <p:cNvPr id="20" name="Text 18"/>
+          <p:cNvSpPr/>
+          <p:nvPr/>
+        </p:nvSpPr>
+        <p:spPr>
+          <a:xfrm>
+            <a:off x="6766560" y="1920240"/>
+            <a:ext cx="4389120" cy="237744"/>
+          </a:xfrm>
+          <a:prstGeom prst="rect">
+            <a:avLst/>
+          </a:prstGeom>
+          <a:noFill/>
+          <a:ln/>
+        </p:spPr>
+        <p:txBody>
+          <a:bodyPr wrap="square" lIns="0" tIns="0" rIns="0" bIns="0" rtlCol="0" anchor="ctr"/>
+          <a:lstStyle/>
+          <a:p>
+            <a:pPr indent="0" marL="0">
+              <a:buNone/>
+            </a:pPr>
+            <a:r>
+              <a:rPr lang="en-US" sz="950" b="1" spc="200" kern="0" dirty="0">
+                <a:solidFill>
+                  <a:srgbClr val="35639C"/>
+                </a:solidFill>
+                <a:latin typeface="Calibri" pitchFamily="34" charset="0"/>
+                <a:ea typeface="Calibri" pitchFamily="34" charset="-122"/>
+                <a:cs typeface="Calibri" pitchFamily="34" charset="-120"/>
+              </a:rPr>
+              <a:t>ENCOUNTER D2N093</a:t>
+            </a:r>
+            <a:endParaRPr lang="en-US" sz="950" dirty="0"/>
+          </a:p>
+        </p:txBody>
+      </p:sp>
+      <p:sp>
+        <p:nvSpPr>
+          <p:cNvPr id="21" name="Text 19"/>
+          <p:cNvSpPr/>
+          <p:nvPr/>
+        </p:nvSpPr>
+        <p:spPr>
+          <a:xfrm>
+            <a:off x="6766560" y="2194560"/>
+            <a:ext cx="3931920" cy="411480"/>
+          </a:xfrm>
+          <a:prstGeom prst="rect">
+            <a:avLst/>
+          </a:prstGeom>
+          <a:noFill/>
+          <a:ln/>
+        </p:spPr>
+        <p:txBody>
+          <a:bodyPr wrap="square" lIns="0" tIns="0" rIns="0" bIns="0" rtlCol="0" anchor="ctr"/>
+          <a:lstStyle/>
+          <a:p>
+            <a:pPr indent="0" marL="0">
+              <a:buNone/>
+            </a:pPr>
+            <a:r>
+              <a:rPr lang="en-US" sz="1700" b="1" dirty="0">
+                <a:solidFill>
+                  <a:srgbClr val="23272C"/>
+                </a:solidFill>
+                <a:latin typeface="Calibri" pitchFamily="34" charset="0"/>
+                <a:ea typeface="Calibri" pitchFamily="34" charset="-122"/>
+                <a:cs typeface="Calibri" pitchFamily="34" charset="-120"/>
+              </a:rPr>
+              <a:t>The refusal</a:t>
+            </a:r>
+            <a:endParaRPr lang="en-US" sz="1700" dirty="0"/>
+          </a:p>
+        </p:txBody>
+      </p:sp>
+      <p:sp>
+        <p:nvSpPr>
+          <p:cNvPr id="22" name="Text 20"/>
+          <p:cNvSpPr/>
+          <p:nvPr/>
+        </p:nvSpPr>
+        <p:spPr>
+          <a:xfrm>
+            <a:off x="6766560" y="2743200"/>
+            <a:ext cx="4480560" cy="1417320"/>
+          </a:xfrm>
+          <a:prstGeom prst="rect">
+            <a:avLst/>
+          </a:prstGeom>
+          <a:noFill/>
+          <a:ln/>
+        </p:spPr>
+        <p:txBody>
+          <a:bodyPr wrap="square" lIns="0" tIns="0" rIns="0" bIns="0" rtlCol="0" anchor="ctr"/>
+          <a:lstStyle/>
+          <a:p>
+            <a:pPr indent="0" marL="0">
+              <a:buNone/>
+            </a:pPr>
+            <a:r>
+              <a:rPr lang="en-US" sz="1250" dirty="0">
+                <a:solidFill>
+                  <a:srgbClr val="6A727C"/>
+                </a:solidFill>
+                <a:latin typeface="Calibri" pitchFamily="34" charset="0"/>
+                <a:ea typeface="Calibri" pitchFamily="34" charset="-122"/>
+                <a:cs typeface="Calibri" pitchFamily="34" charset="-120"/>
+              </a:rPr>
+              <a:t>An A1c lab was billed against type 1 diabetes, which the demo policy does not cover. The resolver examined the note, found no compliant fix, refused to invent a diagnosis, and abandoned the line.</a:t>
+            </a:r>
+            <a:endParaRPr lang="en-US" sz="1250" dirty="0"/>
+          </a:p>
+        </p:txBody>
+      </p:sp>
+      <p:sp>
+        <p:nvSpPr>
+          <p:cNvPr id="23" name="Text 21"/>
+          <p:cNvSpPr/>
+          <p:nvPr/>
+        </p:nvSpPr>
+        <p:spPr>
+          <a:xfrm>
+            <a:off x="6766560" y="4206240"/>
+            <a:ext cx="4480560" cy="685800"/>
+          </a:xfrm>
+          <a:prstGeom prst="rect">
+            <a:avLst/>
+          </a:prstGeom>
+          <a:noFill/>
+          <a:ln/>
+        </p:spPr>
+        <p:txBody>
+          <a:bodyPr wrap="square" lIns="0" tIns="0" rIns="0" bIns="0" rtlCol="0" anchor="ctr"/>
+          <a:lstStyle/>
+          <a:p>
+            <a:pPr indent="0" marL="0">
+              <a:buNone/>
+            </a:pPr>
+            <a:r>
+              <a:rPr lang="en-US" sz="1350" b="1" dirty="0">
+                <a:solidFill>
+                  <a:srgbClr val="2E7D4F"/>
+                </a:solidFill>
+                <a:latin typeface="Calibri" pitchFamily="34" charset="0"/>
+                <a:ea typeface="Calibri" pitchFamily="34" charset="-122"/>
+                <a:cs typeface="Calibri" pitchFamily="34" charset="-120"/>
+              </a:rPr>
+              <a:t>The guardrail behaving exactly as instructed: never fabricate clinical facts.</a:t>
+            </a:r>
+            <a:endParaRPr lang="en-US" sz="1350" dirty="0"/>
+          </a:p>
+        </p:txBody>
+      </p:sp>
+      <p:sp>
+        <p:nvSpPr>
+          <p:cNvPr id="24" name="Text 22"/>
+          <p:cNvSpPr/>
+          <p:nvPr/>
+        </p:nvSpPr>
+        <p:spPr>
+          <a:xfrm>
+            <a:off x="594360" y="5806440"/>
+            <a:ext cx="11018520" cy="411480"/>
+          </a:xfrm>
+          <a:prstGeom prst="rect">
+            <a:avLst/>
+          </a:prstGeom>
+          <a:noFill/>
+          <a:ln/>
+        </p:spPr>
+        <p:txBody>
+          <a:bodyPr wrap="square" lIns="0" tIns="0" rIns="0" bIns="0" rtlCol="0" anchor="ctr"/>
+          <a:lstStyle/>
+          <a:p>
+            <a:pPr algn="ctr" indent="0" marL="0">
+              <a:buNone/>
+            </a:pPr>
+            <a:r>
+              <a:rPr lang="en-US" sz="1300" i="1" dirty="0">
+                <a:solidFill>
+                  <a:srgbClr val="6A727C"/>
+                </a:solidFill>
+                <a:latin typeface="Calibri" pitchFamily="34" charset="0"/>
+                <a:ea typeface="Calibri" pitchFamily="34" charset="-122"/>
+                <a:cs typeface="Calibri" pitchFamily="34" charset="-120"/>
+              </a:rPr>
+              <a:t>A deterministic payer makes policy gaps and agent flaws cleanly separable.</a:t>
+            </a:r>
+            <a:endParaRPr lang="en-US" sz="1300" dirty="0"/>
+          </a:p>
+        </p:txBody>
+      </p:sp>
+    </p:spTree>
+  </p:cSld>
+  <p:clrMapOvr>
+    <a:masterClrMapping/>
+  </p:clrMapOvr>
+</p:sld>
+</file>
+
+<file path=ppt/slides/slide13.xml><?xml version="1.0" encoding="utf-8"?>
+<p:sld xmlns:a="http://schemas.openxmlformats.org/drawingml/2006/main" xmlns:r="http://schemas.openxmlformats.org/officeDocument/2006/relationships" xmlns:p="http://schemas.openxmlformats.org/presentationml/2006/main">
+  <p:cSld name="Slide 13">
+    <p:bg>
+      <p:bgPr>
+        <a:solidFill>
+          <a:srgbClr val="FBFAF7"/>
+        </a:solidFill>
+      </p:bgPr>
+    </p:bg>
+    <p:spTree>
+      <p:nvGrpSpPr>
+        <p:cNvPr id="1" name=""/>
+        <p:cNvGrpSpPr/>
+        <p:nvPr/>
+      </p:nvGrpSpPr>
+      <p:grpSpPr>
+        <a:xfrm>
+          <a:off x="0" y="0"/>
+          <a:ext cx="0" cy="0"/>
+          <a:chOff x="0" y="0"/>
+          <a:chExt cx="0" cy="0"/>
+        </a:xfrm>
+      </p:grpSpPr>
+      <p:sp>
+        <p:nvSpPr>
+          <p:cNvPr id="2" name="Text 0"/>
+          <p:cNvSpPr/>
+          <p:nvPr/>
+        </p:nvSpPr>
+        <p:spPr>
+          <a:xfrm>
+            <a:off x="548640" y="292608"/>
+            <a:ext cx="11064240" cy="274320"/>
+          </a:xfrm>
+          <a:prstGeom prst="rect">
+            <a:avLst/>
+          </a:prstGeom>
+          <a:noFill/>
+          <a:ln/>
+        </p:spPr>
+        <p:txBody>
+          <a:bodyPr wrap="square" lIns="0" tIns="0" rIns="0" bIns="0" rtlCol="0" anchor="ctr"/>
+          <a:lstStyle/>
+          <a:p>
+            <a:pPr indent="0" marL="0">
+              <a:buNone/>
+            </a:pPr>
+            <a:r>
+              <a:rPr lang="en-US" sz="1050" b="1" spc="300" kern="0" dirty="0">
+                <a:solidFill>
+                  <a:srgbClr val="35639C"/>
+                </a:solidFill>
+                <a:latin typeface="Calibri" pitchFamily="34" charset="0"/>
+                <a:ea typeface="Calibri" pitchFamily="34" charset="-122"/>
+                <a:cs typeface="Calibri" pitchFamily="34" charset="-120"/>
+              </a:rPr>
               <a:t>ENGINEERING VIEW</a:t>
             </a:r>
             <a:endParaRPr lang="en-US" sz="1050" dirty="0"/>
@@ -7152,7 +7742,7 @@
                 <a:ea typeface="Calibri" pitchFamily="34" charset="-122"/>
                 <a:cs typeface="Calibri" pitchFamily="34" charset="-120"/>
               </a:rPr>
-              <a:t>THE ADVERSARY</a:t>
+              <a:t>ARCHITECTURE</a:t>
             </a:r>
             <a:endParaRPr lang="en-US" sz="1050" dirty="0"/>
           </a:p>
@@ -7191,7 +7781,7 @@
                 <a:ea typeface="Cambria" pitchFamily="34" charset="-122"/>
                 <a:cs typeface="Cambria" pitchFamily="34" charset="-120"/>
               </a:rPr>
-              <a:t>A payer you can argue with</a:t>
+              <a:t>Under the hood: where the models actually are</a:t>
             </a:r>
             <a:endParaRPr lang="en-US" sz="2900" dirty="0"/>
           </a:p>
@@ -7199,758 +7789,18 @@
       </p:sp>
       <p:sp>
         <p:nvSpPr>
-          <p:cNvPr id="4" name="Text 2"/>
-          <p:cNvSpPr/>
-          <p:nvPr/>
-        </p:nvSpPr>
-        <p:spPr>
-          <a:xfrm>
-            <a:off x="640080" y="1645920"/>
-            <a:ext cx="4846320" cy="384048"/>
-          </a:xfrm>
-          <a:prstGeom prst="rect">
-            <a:avLst/>
-          </a:prstGeom>
-          <a:noFill/>
-          <a:ln/>
-        </p:spPr>
-        <p:txBody>
-          <a:bodyPr wrap="square" lIns="0" tIns="0" rIns="0" bIns="0" rtlCol="0" anchor="ctr"/>
-          <a:lstStyle/>
-          <a:p>
-            <a:pPr indent="0" marL="0">
-              <a:buNone/>
-            </a:pPr>
-            <a:r>
-              <a:rPr lang="en-US" sz="1400" dirty="0">
-                <a:solidFill>
-                  <a:srgbClr val="23272C"/>
-                </a:solidFill>
-                <a:latin typeface="Calibri" pitchFamily="34" charset="0"/>
-                <a:ea typeface="Calibri" pitchFamily="34" charset="-122"/>
-                <a:cs typeface="Calibri" pitchFamily="34" charset="-120"/>
-              </a:rPr>
-              <a:t>Required fields present</a:t>
-            </a:r>
-            <a:endParaRPr lang="en-US" sz="1400" dirty="0"/>
-          </a:p>
-        </p:txBody>
-      </p:sp>
-      <p:sp>
-        <p:nvSpPr>
-          <p:cNvPr id="5" name="Text 3"/>
-          <p:cNvSpPr/>
-          <p:nvPr/>
-        </p:nvSpPr>
-        <p:spPr>
-          <a:xfrm>
-            <a:off x="5623560" y="1691640"/>
-            <a:ext cx="662940" cy="292608"/>
+          <p:cNvPr id="4" name="Shape 2"/>
+          <p:cNvSpPr/>
+          <p:nvPr/>
+        </p:nvSpPr>
+        <p:spPr>
+          <a:xfrm>
+            <a:off x="1783080" y="1481328"/>
+            <a:ext cx="9921240" cy="530352"/>
           </a:xfrm>
           <a:prstGeom prst="roundRect">
             <a:avLst>
-              <a:gd name="adj" fmla="val 10938"/>
-            </a:avLst>
-          </a:prstGeom>
-          <a:solidFill>
-            <a:srgbClr val="FFFFFF"/>
-          </a:solidFill>
-          <a:ln w="9525">
-            <a:solidFill>
-              <a:srgbClr val="CFCBC2"/>
-            </a:solidFill>
-          </a:ln>
-        </p:spPr>
-        <p:txBody>
-          <a:bodyPr wrap="square" lIns="0" tIns="0" rIns="0" bIns="0" rtlCol="0" anchor="ctr"/>
-          <a:lstStyle/>
-          <a:p>
-            <a:pPr algn="ctr" indent="0" marL="0">
-              <a:buNone/>
-            </a:pPr>
-            <a:r>
-              <a:rPr lang="en-US" sz="1050" b="1" dirty="0">
-                <a:solidFill>
-                  <a:srgbClr val="8A6116"/>
-                </a:solidFill>
-                <a:latin typeface="Courier New" pitchFamily="34" charset="0"/>
-                <a:ea typeface="Courier New" pitchFamily="34" charset="-122"/>
-                <a:cs typeface="Courier New" pitchFamily="34" charset="-120"/>
-              </a:rPr>
-              <a:t>CO-16</a:t>
-            </a:r>
-            <a:endParaRPr lang="en-US" sz="1050" dirty="0"/>
-          </a:p>
-        </p:txBody>
-      </p:sp>
-      <p:sp>
-        <p:nvSpPr>
-          <p:cNvPr id="6" name="Shape 4"/>
-          <p:cNvSpPr/>
-          <p:nvPr/>
-        </p:nvSpPr>
-        <p:spPr>
-          <a:xfrm>
-            <a:off x="640080" y="2148840"/>
-            <a:ext cx="5943600" cy="0"/>
-          </a:xfrm>
-          <a:prstGeom prst="line">
-            <a:avLst/>
-          </a:prstGeom>
-          <a:noFill/>
-          <a:ln w="9525">
-            <a:solidFill>
-              <a:srgbClr val="E3E0DA"/>
-            </a:solidFill>
-            <a:prstDash val="solid"/>
-          </a:ln>
-        </p:spPr>
-      </p:sp>
-      <p:sp>
-        <p:nvSpPr>
-          <p:cNvPr id="7" name="Text 5"/>
-          <p:cNvSpPr/>
-          <p:nvPr/>
-        </p:nvSpPr>
-        <p:spPr>
-          <a:xfrm>
-            <a:off x="640080" y="2221992"/>
-            <a:ext cx="4846320" cy="384048"/>
-          </a:xfrm>
-          <a:prstGeom prst="rect">
-            <a:avLst/>
-          </a:prstGeom>
-          <a:noFill/>
-          <a:ln/>
-        </p:spPr>
-        <p:txBody>
-          <a:bodyPr wrap="square" lIns="0" tIns="0" rIns="0" bIns="0" rtlCol="0" anchor="ctr"/>
-          <a:lstStyle/>
-          <a:p>
-            <a:pPr indent="0" marL="0">
-              <a:buNone/>
-            </a:pPr>
-            <a:r>
-              <a:rPr lang="en-US" sz="1400" dirty="0">
-                <a:solidFill>
-                  <a:srgbClr val="23272C"/>
-                </a:solidFill>
-                <a:latin typeface="Calibri" pitchFamily="34" charset="0"/>
-                <a:ea typeface="Calibri" pitchFamily="34" charset="-122"/>
-                <a:cs typeface="Calibri" pitchFamily="34" charset="-120"/>
-              </a:rPr>
-              <a:t>Diagnosis codes exist (live NLM check)</a:t>
-            </a:r>
-            <a:endParaRPr lang="en-US" sz="1400" dirty="0"/>
-          </a:p>
-        </p:txBody>
-      </p:sp>
-      <p:sp>
-        <p:nvSpPr>
-          <p:cNvPr id="8" name="Text 6"/>
-          <p:cNvSpPr/>
-          <p:nvPr/>
-        </p:nvSpPr>
-        <p:spPr>
-          <a:xfrm>
-            <a:off x="5623560" y="2267712"/>
-            <a:ext cx="740664" cy="292608"/>
-          </a:xfrm>
-          <a:prstGeom prst="roundRect">
-            <a:avLst>
-              <a:gd name="adj" fmla="val 10938"/>
-            </a:avLst>
-          </a:prstGeom>
-          <a:solidFill>
-            <a:srgbClr val="FFFFFF"/>
-          </a:solidFill>
-          <a:ln w="9525">
-            <a:solidFill>
-              <a:srgbClr val="CFCBC2"/>
-            </a:solidFill>
-          </a:ln>
-        </p:spPr>
-        <p:txBody>
-          <a:bodyPr wrap="square" lIns="0" tIns="0" rIns="0" bIns="0" rtlCol="0" anchor="ctr"/>
-          <a:lstStyle/>
-          <a:p>
-            <a:pPr algn="ctr" indent="0" marL="0">
-              <a:buNone/>
-            </a:pPr>
-            <a:r>
-              <a:rPr lang="en-US" sz="1050" b="1" dirty="0">
-                <a:solidFill>
-                  <a:srgbClr val="8A6116"/>
-                </a:solidFill>
-                <a:latin typeface="Courier New" pitchFamily="34" charset="0"/>
-                <a:ea typeface="Courier New" pitchFamily="34" charset="-122"/>
-                <a:cs typeface="Courier New" pitchFamily="34" charset="-120"/>
-              </a:rPr>
-              <a:t>CO-146</a:t>
-            </a:r>
-            <a:endParaRPr lang="en-US" sz="1050" dirty="0"/>
-          </a:p>
-        </p:txBody>
-      </p:sp>
-      <p:sp>
-        <p:nvSpPr>
-          <p:cNvPr id="9" name="Shape 7"/>
-          <p:cNvSpPr/>
-          <p:nvPr/>
-        </p:nvSpPr>
-        <p:spPr>
-          <a:xfrm>
-            <a:off x="640080" y="2724912"/>
-            <a:ext cx="5943600" cy="0"/>
-          </a:xfrm>
-          <a:prstGeom prst="line">
-            <a:avLst/>
-          </a:prstGeom>
-          <a:noFill/>
-          <a:ln w="9525">
-            <a:solidFill>
-              <a:srgbClr val="E3E0DA"/>
-            </a:solidFill>
-            <a:prstDash val="solid"/>
-          </a:ln>
-        </p:spPr>
-      </p:sp>
-      <p:sp>
-        <p:nvSpPr>
-          <p:cNvPr id="10" name="Text 8"/>
-          <p:cNvSpPr/>
-          <p:nvPr/>
-        </p:nvSpPr>
-        <p:spPr>
-          <a:xfrm>
-            <a:off x="640080" y="2798064"/>
-            <a:ext cx="4846320" cy="384048"/>
-          </a:xfrm>
-          <a:prstGeom prst="rect">
-            <a:avLst/>
-          </a:prstGeom>
-          <a:noFill/>
-          <a:ln/>
-        </p:spPr>
-        <p:txBody>
-          <a:bodyPr wrap="square" lIns="0" tIns="0" rIns="0" bIns="0" rtlCol="0" anchor="ctr"/>
-          <a:lstStyle/>
-          <a:p>
-            <a:pPr indent="0" marL="0">
-              <a:buNone/>
-            </a:pPr>
-            <a:r>
-              <a:rPr lang="en-US" sz="1400" dirty="0">
-                <a:solidFill>
-                  <a:srgbClr val="23272C"/>
-                </a:solidFill>
-                <a:latin typeface="Calibri" pitchFamily="34" charset="0"/>
-                <a:ea typeface="Calibri" pitchFamily="34" charset="-122"/>
-                <a:cs typeface="Calibri" pitchFamily="34" charset="-120"/>
-              </a:rPr>
-              <a:t>Procedure on the fee schedule</a:t>
-            </a:r>
-            <a:endParaRPr lang="en-US" sz="1400" dirty="0"/>
-          </a:p>
-        </p:txBody>
-      </p:sp>
-      <p:sp>
-        <p:nvSpPr>
-          <p:cNvPr id="11" name="Text 9"/>
-          <p:cNvSpPr/>
-          <p:nvPr/>
-        </p:nvSpPr>
-        <p:spPr>
-          <a:xfrm>
-            <a:off x="5623560" y="2843784"/>
-            <a:ext cx="740664" cy="292608"/>
-          </a:xfrm>
-          <a:prstGeom prst="roundRect">
-            <a:avLst>
-              <a:gd name="adj" fmla="val 10938"/>
-            </a:avLst>
-          </a:prstGeom>
-          <a:solidFill>
-            <a:srgbClr val="FFFFFF"/>
-          </a:solidFill>
-          <a:ln w="9525">
-            <a:solidFill>
-              <a:srgbClr val="CFCBC2"/>
-            </a:solidFill>
-          </a:ln>
-        </p:spPr>
-        <p:txBody>
-          <a:bodyPr wrap="square" lIns="0" tIns="0" rIns="0" bIns="0" rtlCol="0" anchor="ctr"/>
-          <a:lstStyle/>
-          <a:p>
-            <a:pPr algn="ctr" indent="0" marL="0">
-              <a:buNone/>
-            </a:pPr>
-            <a:r>
-              <a:rPr lang="en-US" sz="1050" b="1" dirty="0">
-                <a:solidFill>
-                  <a:srgbClr val="8A6116"/>
-                </a:solidFill>
-                <a:latin typeface="Courier New" pitchFamily="34" charset="0"/>
-                <a:ea typeface="Courier New" pitchFamily="34" charset="-122"/>
-                <a:cs typeface="Courier New" pitchFamily="34" charset="-120"/>
-              </a:rPr>
-              <a:t>CO-181</a:t>
-            </a:r>
-            <a:endParaRPr lang="en-US" sz="1050" dirty="0"/>
-          </a:p>
-        </p:txBody>
-      </p:sp>
-      <p:sp>
-        <p:nvSpPr>
-          <p:cNvPr id="12" name="Shape 10"/>
-          <p:cNvSpPr/>
-          <p:nvPr/>
-        </p:nvSpPr>
-        <p:spPr>
-          <a:xfrm>
-            <a:off x="640080" y="3300984"/>
-            <a:ext cx="5943600" cy="0"/>
-          </a:xfrm>
-          <a:prstGeom prst="line">
-            <a:avLst/>
-          </a:prstGeom>
-          <a:noFill/>
-          <a:ln w="9525">
-            <a:solidFill>
-              <a:srgbClr val="E3E0DA"/>
-            </a:solidFill>
-            <a:prstDash val="solid"/>
-          </a:ln>
-        </p:spPr>
-      </p:sp>
-      <p:sp>
-        <p:nvSpPr>
-          <p:cNvPr id="13" name="Text 11"/>
-          <p:cNvSpPr/>
-          <p:nvPr/>
-        </p:nvSpPr>
-        <p:spPr>
-          <a:xfrm>
-            <a:off x="640080" y="3374136"/>
-            <a:ext cx="4846320" cy="384048"/>
-          </a:xfrm>
-          <a:prstGeom prst="rect">
-            <a:avLst/>
-          </a:prstGeom>
-          <a:noFill/>
-          <a:ln/>
-        </p:spPr>
-        <p:txBody>
-          <a:bodyPr wrap="square" lIns="0" tIns="0" rIns="0" bIns="0" rtlCol="0" anchor="ctr"/>
-          <a:lstStyle/>
-          <a:p>
-            <a:pPr indent="0" marL="0">
-              <a:buNone/>
-            </a:pPr>
-            <a:r>
-              <a:rPr lang="en-US" sz="1400" dirty="0">
-                <a:solidFill>
-                  <a:srgbClr val="23272C"/>
-                </a:solidFill>
-                <a:latin typeface="Calibri" pitchFamily="34" charset="0"/>
-                <a:ea typeface="Calibri" pitchFamily="34" charset="-122"/>
-                <a:cs typeface="Calibri" pitchFamily="34" charset="-120"/>
-              </a:rPr>
-              <a:t>Diagnosis supports the procedure</a:t>
-            </a:r>
-            <a:endParaRPr lang="en-US" sz="1400" dirty="0"/>
-          </a:p>
-        </p:txBody>
-      </p:sp>
-      <p:sp>
-        <p:nvSpPr>
-          <p:cNvPr id="14" name="Text 12"/>
-          <p:cNvSpPr/>
-          <p:nvPr/>
-        </p:nvSpPr>
-        <p:spPr>
-          <a:xfrm>
-            <a:off x="5623560" y="3419856"/>
-            <a:ext cx="662940" cy="292608"/>
-          </a:xfrm>
-          <a:prstGeom prst="roundRect">
-            <a:avLst>
-              <a:gd name="adj" fmla="val 10938"/>
-            </a:avLst>
-          </a:prstGeom>
-          <a:solidFill>
-            <a:srgbClr val="FFFFFF"/>
-          </a:solidFill>
-          <a:ln w="9525">
-            <a:solidFill>
-              <a:srgbClr val="CFCBC2"/>
-            </a:solidFill>
-          </a:ln>
-        </p:spPr>
-        <p:txBody>
-          <a:bodyPr wrap="square" lIns="0" tIns="0" rIns="0" bIns="0" rtlCol="0" anchor="ctr"/>
-          <a:lstStyle/>
-          <a:p>
-            <a:pPr algn="ctr" indent="0" marL="0">
-              <a:buNone/>
-            </a:pPr>
-            <a:r>
-              <a:rPr lang="en-US" sz="1050" b="1" dirty="0">
-                <a:solidFill>
-                  <a:srgbClr val="A8402F"/>
-                </a:solidFill>
-                <a:latin typeface="Courier New" pitchFamily="34" charset="0"/>
-                <a:ea typeface="Courier New" pitchFamily="34" charset="-122"/>
-                <a:cs typeface="Courier New" pitchFamily="34" charset="-120"/>
-              </a:rPr>
-              <a:t>CO-50</a:t>
-            </a:r>
-            <a:endParaRPr lang="en-US" sz="1050" dirty="0"/>
-          </a:p>
-        </p:txBody>
-      </p:sp>
-      <p:sp>
-        <p:nvSpPr>
-          <p:cNvPr id="15" name="Shape 13"/>
-          <p:cNvSpPr/>
-          <p:nvPr/>
-        </p:nvSpPr>
-        <p:spPr>
-          <a:xfrm>
-            <a:off x="640080" y="3877056"/>
-            <a:ext cx="5943600" cy="0"/>
-          </a:xfrm>
-          <a:prstGeom prst="line">
-            <a:avLst/>
-          </a:prstGeom>
-          <a:noFill/>
-          <a:ln w="9525">
-            <a:solidFill>
-              <a:srgbClr val="E3E0DA"/>
-            </a:solidFill>
-            <a:prstDash val="solid"/>
-          </a:ln>
-        </p:spPr>
-      </p:sp>
-      <p:sp>
-        <p:nvSpPr>
-          <p:cNvPr id="16" name="Text 14"/>
-          <p:cNvSpPr/>
-          <p:nvPr/>
-        </p:nvSpPr>
-        <p:spPr>
-          <a:xfrm>
-            <a:off x="640080" y="3950208"/>
-            <a:ext cx="4846320" cy="384048"/>
-          </a:xfrm>
-          <a:prstGeom prst="rect">
-            <a:avLst/>
-          </a:prstGeom>
-          <a:noFill/>
-          <a:ln/>
-        </p:spPr>
-        <p:txBody>
-          <a:bodyPr wrap="square" lIns="0" tIns="0" rIns="0" bIns="0" rtlCol="0" anchor="ctr"/>
-          <a:lstStyle/>
-          <a:p>
-            <a:pPr indent="0" marL="0">
-              <a:buNone/>
-            </a:pPr>
-            <a:r>
-              <a:rPr lang="en-US" sz="1400" dirty="0">
-                <a:solidFill>
-                  <a:srgbClr val="23272C"/>
-                </a:solidFill>
-                <a:latin typeface="Calibri" pitchFamily="34" charset="0"/>
-                <a:ea typeface="Calibri" pitchFamily="34" charset="-122"/>
-                <a:cs typeface="Calibri" pitchFamily="34" charset="-120"/>
-              </a:rPr>
-              <a:t>Prior authorization on file</a:t>
-            </a:r>
-            <a:endParaRPr lang="en-US" sz="1400" dirty="0"/>
-          </a:p>
-        </p:txBody>
-      </p:sp>
-      <p:sp>
-        <p:nvSpPr>
-          <p:cNvPr id="17" name="Text 15"/>
-          <p:cNvSpPr/>
-          <p:nvPr/>
-        </p:nvSpPr>
-        <p:spPr>
-          <a:xfrm>
-            <a:off x="5623560" y="3995928"/>
-            <a:ext cx="740664" cy="292608"/>
-          </a:xfrm>
-          <a:prstGeom prst="roundRect">
-            <a:avLst>
-              <a:gd name="adj" fmla="val 10938"/>
-            </a:avLst>
-          </a:prstGeom>
-          <a:solidFill>
-            <a:srgbClr val="FFFFFF"/>
-          </a:solidFill>
-          <a:ln w="9525">
-            <a:solidFill>
-              <a:srgbClr val="CFCBC2"/>
-            </a:solidFill>
-          </a:ln>
-        </p:spPr>
-        <p:txBody>
-          <a:bodyPr wrap="square" lIns="0" tIns="0" rIns="0" bIns="0" rtlCol="0" anchor="ctr"/>
-          <a:lstStyle/>
-          <a:p>
-            <a:pPr algn="ctr" indent="0" marL="0">
-              <a:buNone/>
-            </a:pPr>
-            <a:r>
-              <a:rPr lang="en-US" sz="1050" b="1" dirty="0">
-                <a:solidFill>
-                  <a:srgbClr val="A8402F"/>
-                </a:solidFill>
-                <a:latin typeface="Courier New" pitchFamily="34" charset="0"/>
-                <a:ea typeface="Courier New" pitchFamily="34" charset="-122"/>
-                <a:cs typeface="Courier New" pitchFamily="34" charset="-120"/>
-              </a:rPr>
-              <a:t>CO-197</a:t>
-            </a:r>
-            <a:endParaRPr lang="en-US" sz="1050" dirty="0"/>
-          </a:p>
-        </p:txBody>
-      </p:sp>
-      <p:sp>
-        <p:nvSpPr>
-          <p:cNvPr id="18" name="Shape 16"/>
-          <p:cNvSpPr/>
-          <p:nvPr/>
-        </p:nvSpPr>
-        <p:spPr>
-          <a:xfrm>
-            <a:off x="640080" y="4453128"/>
-            <a:ext cx="5943600" cy="0"/>
-          </a:xfrm>
-          <a:prstGeom prst="line">
-            <a:avLst/>
-          </a:prstGeom>
-          <a:noFill/>
-          <a:ln w="9525">
-            <a:solidFill>
-              <a:srgbClr val="E3E0DA"/>
-            </a:solidFill>
-            <a:prstDash val="solid"/>
-          </a:ln>
-        </p:spPr>
-      </p:sp>
-      <p:sp>
-        <p:nvSpPr>
-          <p:cNvPr id="19" name="Text 17"/>
-          <p:cNvSpPr/>
-          <p:nvPr/>
-        </p:nvSpPr>
-        <p:spPr>
-          <a:xfrm>
-            <a:off x="640080" y="4526280"/>
-            <a:ext cx="4846320" cy="384048"/>
-          </a:xfrm>
-          <a:prstGeom prst="rect">
-            <a:avLst/>
-          </a:prstGeom>
-          <a:noFill/>
-          <a:ln/>
-        </p:spPr>
-        <p:txBody>
-          <a:bodyPr wrap="square" lIns="0" tIns="0" rIns="0" bIns="0" rtlCol="0" anchor="ctr"/>
-          <a:lstStyle/>
-          <a:p>
-            <a:pPr indent="0" marL="0">
-              <a:buNone/>
-            </a:pPr>
-            <a:r>
-              <a:rPr lang="en-US" sz="1400" dirty="0">
-                <a:solidFill>
-                  <a:srgbClr val="23272C"/>
-                </a:solidFill>
-                <a:latin typeface="Calibri" pitchFamily="34" charset="0"/>
-                <a:ea typeface="Calibri" pitchFamily="34" charset="-122"/>
-                <a:cs typeface="Calibri" pitchFamily="34" charset="-120"/>
-              </a:rPr>
-              <a:t>Documentation supports visit level</a:t>
-            </a:r>
-            <a:endParaRPr lang="en-US" sz="1400" dirty="0"/>
-          </a:p>
-        </p:txBody>
-      </p:sp>
-      <p:sp>
-        <p:nvSpPr>
-          <p:cNvPr id="20" name="Text 18"/>
-          <p:cNvSpPr/>
-          <p:nvPr/>
-        </p:nvSpPr>
-        <p:spPr>
-          <a:xfrm>
-            <a:off x="5623560" y="4572000"/>
-            <a:ext cx="740664" cy="292608"/>
-          </a:xfrm>
-          <a:prstGeom prst="roundRect">
-            <a:avLst>
-              <a:gd name="adj" fmla="val 10938"/>
-            </a:avLst>
-          </a:prstGeom>
-          <a:solidFill>
-            <a:srgbClr val="FFFFFF"/>
-          </a:solidFill>
-          <a:ln w="9525">
-            <a:solidFill>
-              <a:srgbClr val="CFCBC2"/>
-            </a:solidFill>
-          </a:ln>
-        </p:spPr>
-        <p:txBody>
-          <a:bodyPr wrap="square" lIns="0" tIns="0" rIns="0" bIns="0" rtlCol="0" anchor="ctr"/>
-          <a:lstStyle/>
-          <a:p>
-            <a:pPr algn="ctr" indent="0" marL="0">
-              <a:buNone/>
-            </a:pPr>
-            <a:r>
-              <a:rPr lang="en-US" sz="1050" b="1" dirty="0">
-                <a:solidFill>
-                  <a:srgbClr val="A8402F"/>
-                </a:solidFill>
-                <a:latin typeface="Courier New" pitchFamily="34" charset="0"/>
-                <a:ea typeface="Courier New" pitchFamily="34" charset="-122"/>
-                <a:cs typeface="Courier New" pitchFamily="34" charset="-120"/>
-              </a:rPr>
-              <a:t>CO-150</a:t>
-            </a:r>
-            <a:endParaRPr lang="en-US" sz="1050" dirty="0"/>
-          </a:p>
-        </p:txBody>
-      </p:sp>
-      <p:sp>
-        <p:nvSpPr>
-          <p:cNvPr id="21" name="Shape 19"/>
-          <p:cNvSpPr/>
-          <p:nvPr/>
-        </p:nvSpPr>
-        <p:spPr>
-          <a:xfrm>
-            <a:off x="640080" y="5029200"/>
-            <a:ext cx="5943600" cy="0"/>
-          </a:xfrm>
-          <a:prstGeom prst="line">
-            <a:avLst/>
-          </a:prstGeom>
-          <a:noFill/>
-          <a:ln w="9525">
-            <a:solidFill>
-              <a:srgbClr val="E3E0DA"/>
-            </a:solidFill>
-            <a:prstDash val="solid"/>
-          </a:ln>
-        </p:spPr>
-      </p:sp>
-      <p:sp>
-        <p:nvSpPr>
-          <p:cNvPr id="22" name="Text 20"/>
-          <p:cNvSpPr/>
-          <p:nvPr/>
-        </p:nvSpPr>
-        <p:spPr>
-          <a:xfrm>
-            <a:off x="640080" y="5102352"/>
-            <a:ext cx="4846320" cy="384048"/>
-          </a:xfrm>
-          <a:prstGeom prst="rect">
-            <a:avLst/>
-          </a:prstGeom>
-          <a:noFill/>
-          <a:ln/>
-        </p:spPr>
-        <p:txBody>
-          <a:bodyPr wrap="square" lIns="0" tIns="0" rIns="0" bIns="0" rtlCol="0" anchor="ctr"/>
-          <a:lstStyle/>
-          <a:p>
-            <a:pPr indent="0" marL="0">
-              <a:buNone/>
-            </a:pPr>
-            <a:r>
-              <a:rPr lang="en-US" sz="1400" dirty="0">
-                <a:solidFill>
-                  <a:srgbClr val="23272C"/>
-                </a:solidFill>
-                <a:latin typeface="Calibri" pitchFamily="34" charset="0"/>
-                <a:ea typeface="Calibri" pitchFamily="34" charset="-122"/>
-                <a:cs typeface="Calibri" pitchFamily="34" charset="-120"/>
-              </a:rPr>
-              <a:t>No unchanged resubmissions</a:t>
-            </a:r>
-            <a:endParaRPr lang="en-US" sz="1400" dirty="0"/>
-          </a:p>
-        </p:txBody>
-      </p:sp>
-      <p:sp>
-        <p:nvSpPr>
-          <p:cNvPr id="23" name="Text 21"/>
-          <p:cNvSpPr/>
-          <p:nvPr/>
-        </p:nvSpPr>
-        <p:spPr>
-          <a:xfrm>
-            <a:off x="5623560" y="5148072"/>
-            <a:ext cx="662940" cy="292608"/>
-          </a:xfrm>
-          <a:prstGeom prst="roundRect">
-            <a:avLst>
-              <a:gd name="adj" fmla="val 10938"/>
-            </a:avLst>
-          </a:prstGeom>
-          <a:solidFill>
-            <a:srgbClr val="FFFFFF"/>
-          </a:solidFill>
-          <a:ln w="9525">
-            <a:solidFill>
-              <a:srgbClr val="CFCBC2"/>
-            </a:solidFill>
-          </a:ln>
-        </p:spPr>
-        <p:txBody>
-          <a:bodyPr wrap="square" lIns="0" tIns="0" rIns="0" bIns="0" rtlCol="0" anchor="ctr"/>
-          <a:lstStyle/>
-          <a:p>
-            <a:pPr algn="ctr" indent="0" marL="0">
-              <a:buNone/>
-            </a:pPr>
-            <a:r>
-              <a:rPr lang="en-US" sz="1050" b="1" dirty="0">
-                <a:solidFill>
-                  <a:srgbClr val="6A727C"/>
-                </a:solidFill>
-                <a:latin typeface="Courier New" pitchFamily="34" charset="0"/>
-                <a:ea typeface="Courier New" pitchFamily="34" charset="-122"/>
-                <a:cs typeface="Courier New" pitchFamily="34" charset="-120"/>
-              </a:rPr>
-              <a:t>CO-18</a:t>
-            </a:r>
-            <a:endParaRPr lang="en-US" sz="1050" dirty="0"/>
-          </a:p>
-        </p:txBody>
-      </p:sp>
-      <p:sp>
-        <p:nvSpPr>
-          <p:cNvPr id="24" name="Shape 22"/>
-          <p:cNvSpPr/>
-          <p:nvPr/>
-        </p:nvSpPr>
-        <p:spPr>
-          <a:xfrm>
-            <a:off x="7178040" y="1645920"/>
-            <a:ext cx="4434840" cy="3931920"/>
-          </a:xfrm>
-          <a:prstGeom prst="roundRect">
-            <a:avLst>
-              <a:gd name="adj" fmla="val 1047"/>
+              <a:gd name="adj" fmla="val 7759"/>
             </a:avLst>
           </a:prstGeom>
           <a:solidFill>
@@ -7966,38 +7816,38 @@
       </p:sp>
       <p:sp>
         <p:nvSpPr>
-          <p:cNvPr id="25" name="Text 23"/>
-          <p:cNvSpPr/>
-          <p:nvPr/>
-        </p:nvSpPr>
-        <p:spPr>
-          <a:xfrm>
-            <a:off x="7543800" y="1965960"/>
-            <a:ext cx="3657600" cy="237744"/>
-          </a:xfrm>
-          <a:prstGeom prst="rect">
-            <a:avLst/>
-          </a:prstGeom>
-          <a:noFill/>
-          <a:ln/>
-        </p:spPr>
-        <p:txBody>
-          <a:bodyPr wrap="square" lIns="0" tIns="0" rIns="0" bIns="0" rtlCol="0" anchor="ctr"/>
-          <a:lstStyle/>
-          <a:p>
-            <a:pPr indent="0" marL="0">
-              <a:buNone/>
-            </a:pPr>
-            <a:r>
-              <a:rPr lang="en-US" sz="950" b="1" spc="200" kern="0" dirty="0">
-                <a:solidFill>
-                  <a:srgbClr val="35639C"/>
+          <p:cNvPr id="5" name="Text 3"/>
+          <p:cNvSpPr/>
+          <p:nvPr/>
+        </p:nvSpPr>
+        <p:spPr>
+          <a:xfrm>
+            <a:off x="365760" y="1600200"/>
+            <a:ext cx="1298448" cy="292608"/>
+          </a:xfrm>
+          <a:prstGeom prst="rect">
+            <a:avLst/>
+          </a:prstGeom>
+          <a:noFill/>
+          <a:ln/>
+        </p:spPr>
+        <p:txBody>
+          <a:bodyPr wrap="square" lIns="0" tIns="0" rIns="0" bIns="0" rtlCol="0" anchor="ctr"/>
+          <a:lstStyle/>
+          <a:p>
+            <a:pPr algn="r" indent="0" marL="0">
+              <a:buNone/>
+            </a:pPr>
+            <a:r>
+              <a:rPr lang="en-US" sz="950" b="1" spc="140" kern="0" dirty="0">
+                <a:solidFill>
+                  <a:srgbClr val="9AA1AA"/>
                 </a:solidFill>
                 <a:latin typeface="Calibri" pitchFamily="34" charset="0"/>
                 <a:ea typeface="Calibri" pitchFamily="34" charset="-122"/>
                 <a:cs typeface="Calibri" pitchFamily="34" charset="-120"/>
               </a:rPr>
-              <a:t>WHY DETERMINISTIC</a:t>
+              <a:t>INTERFACE</a:t>
             </a:r>
             <a:endParaRPr lang="en-US" sz="950" dirty="0"/>
           </a:p>
@@ -8005,34 +7855,30 @@
       </p:sp>
       <p:sp>
         <p:nvSpPr>
-          <p:cNvPr id="26" name="Text 24"/>
-          <p:cNvSpPr/>
-          <p:nvPr/>
-        </p:nvSpPr>
-        <p:spPr>
-          <a:xfrm>
-            <a:off x="7543800" y="2331720"/>
-            <a:ext cx="3749040" cy="3017520"/>
-          </a:xfrm>
-          <a:prstGeom prst="rect">
-            <a:avLst/>
-          </a:prstGeom>
-          <a:noFill/>
-          <a:ln/>
-        </p:spPr>
-        <p:txBody>
-          <a:bodyPr wrap="square" rtlCol="0" anchor="ctr"/>
-          <a:lstStyle/>
-          <a:p>
-            <a:pPr marL="342900" indent="-342900">
-              <a:spcAft>
-                <a:spcPts val="1000"/>
-              </a:spcAft>
-              <a:buSzPct val="100000"/>
-              <a:buChar char="•"/>
-            </a:pPr>
-            <a:r>
-              <a:rPr lang="en-US" sz="1350" dirty="0">
+          <p:cNvPr id="6" name="Text 4"/>
+          <p:cNvSpPr/>
+          <p:nvPr/>
+        </p:nvSpPr>
+        <p:spPr>
+          <a:xfrm>
+            <a:off x="1984248" y="1545336"/>
+            <a:ext cx="9518904" cy="274320"/>
+          </a:xfrm>
+          <a:prstGeom prst="rect">
+            <a:avLst/>
+          </a:prstGeom>
+          <a:noFill/>
+          <a:ln/>
+        </p:spPr>
+        <p:txBody>
+          <a:bodyPr wrap="square" lIns="0" tIns="0" rIns="0" bIns="0" rtlCol="0" anchor="ctr"/>
+          <a:lstStyle/>
+          <a:p>
+            <a:pPr indent="0" marL="0">
+              <a:buNone/>
+            </a:pPr>
+            <a:r>
+              <a:rPr lang="en-US" sz="1200" b="1" dirty="0">
                 <a:solidFill>
                   <a:srgbClr val="23272C"/>
                 </a:solidFill>
@@ -8040,48 +7886,1190 @@
                 <a:ea typeface="Calibri" pitchFamily="34" charset="-122"/>
                 <a:cs typeface="Calibri" pitchFamily="34" charset="-120"/>
               </a:rPr>
-              <a:t>Recovery rates become attributable: any change in verdict is caused by the agent's revision.</a:t>
-            </a:r>
-            <a:endParaRPr lang="en-US" sz="1350" dirty="0"/>
-          </a:p>
-          <a:p>
-            <a:pPr marL="342900" indent="-342900">
-              <a:spcAft>
-                <a:spcPts val="1000"/>
-              </a:spcAft>
-              <a:buSzPct val="100000"/>
-              <a:buChar char="•"/>
-            </a:pPr>
-            <a:r>
-              <a:rPr lang="en-US" sz="1350" dirty="0">
-                <a:solidFill>
-                  <a:srgbClr val="23272C"/>
+              <a:t>React console</a:t>
+            </a:r>
+            <a:endParaRPr lang="en-US" sz="1200" dirty="0"/>
+          </a:p>
+        </p:txBody>
+      </p:sp>
+      <p:sp>
+        <p:nvSpPr>
+          <p:cNvPr id="7" name="Text 5"/>
+          <p:cNvSpPr/>
+          <p:nvPr/>
+        </p:nvSpPr>
+        <p:spPr>
+          <a:xfrm>
+            <a:off x="1984248" y="1764792"/>
+            <a:ext cx="9518904" cy="237744"/>
+          </a:xfrm>
+          <a:prstGeom prst="rect">
+            <a:avLst/>
+          </a:prstGeom>
+          <a:noFill/>
+          <a:ln/>
+        </p:spPr>
+        <p:txBody>
+          <a:bodyPr wrap="square" lIns="0" tIns="0" rIns="0" bIns="0" rtlCol="0" anchor="ctr"/>
+          <a:lstStyle/>
+          <a:p>
+            <a:pPr indent="0" marL="0">
+              <a:buNone/>
+            </a:pPr>
+            <a:r>
+              <a:rPr lang="en-US" sz="1000" dirty="0">
+                <a:solidFill>
+                  <a:srgbClr val="6A727C"/>
                 </a:solidFill>
                 <a:latin typeface="Calibri" pitchFamily="34" charset="0"/>
                 <a:ea typeface="Calibri" pitchFamily="34" charset="-122"/>
                 <a:cs typeface="Calibri" pitchFamily="34" charset="-120"/>
               </a:rPr>
-              <a:t>Appeals get a real review: the payer re-reads the full documented diagnosis list, like a human reviewer.</a:t>
-            </a:r>
-            <a:endParaRPr lang="en-US" sz="1350" dirty="0"/>
-          </a:p>
-          <a:p>
-            <a:pPr marL="342900" indent="-342900">
-              <a:buSzPct val="100000"/>
-              <a:buChar char="•"/>
-            </a:pPr>
-            <a:r>
-              <a:rPr lang="en-US" sz="1350" dirty="0">
-                <a:solidFill>
-                  <a:srgbClr val="23272C"/>
+              <a:t>transcript viewer  ·  pipeline rail  ·  activity log  ·  claim document</a:t>
+            </a:r>
+            <a:endParaRPr lang="en-US" sz="1000" dirty="0"/>
+          </a:p>
+        </p:txBody>
+      </p:sp>
+      <p:sp>
+        <p:nvSpPr>
+          <p:cNvPr id="8" name="Shape 6"/>
+          <p:cNvSpPr/>
+          <p:nvPr/>
+        </p:nvSpPr>
+        <p:spPr>
+          <a:xfrm>
+            <a:off x="1783080" y="2121408"/>
+            <a:ext cx="9921240" cy="530352"/>
+          </a:xfrm>
+          <a:prstGeom prst="roundRect">
+            <a:avLst>
+              <a:gd name="adj" fmla="val 7759"/>
+            </a:avLst>
+          </a:prstGeom>
+          <a:solidFill>
+            <a:srgbClr val="FFFFFF"/>
+          </a:solidFill>
+          <a:ln w="12700">
+            <a:solidFill>
+              <a:srgbClr val="E3E0DA"/>
+            </a:solidFill>
+            <a:prstDash val="solid"/>
+          </a:ln>
+        </p:spPr>
+      </p:sp>
+      <p:sp>
+        <p:nvSpPr>
+          <p:cNvPr id="9" name="Text 7"/>
+          <p:cNvSpPr/>
+          <p:nvPr/>
+        </p:nvSpPr>
+        <p:spPr>
+          <a:xfrm>
+            <a:off x="365760" y="2240280"/>
+            <a:ext cx="1298448" cy="292608"/>
+          </a:xfrm>
+          <a:prstGeom prst="rect">
+            <a:avLst/>
+          </a:prstGeom>
+          <a:noFill/>
+          <a:ln/>
+        </p:spPr>
+        <p:txBody>
+          <a:bodyPr wrap="square" lIns="0" tIns="0" rIns="0" bIns="0" rtlCol="0" anchor="ctr"/>
+          <a:lstStyle/>
+          <a:p>
+            <a:pPr algn="r" indent="0" marL="0">
+              <a:buNone/>
+            </a:pPr>
+            <a:r>
+              <a:rPr lang="en-US" sz="950" b="1" spc="140" kern="0" dirty="0">
+                <a:solidFill>
+                  <a:srgbClr val="9AA1AA"/>
                 </a:solidFill>
                 <a:latin typeface="Calibri" pitchFamily="34" charset="0"/>
                 <a:ea typeface="Calibri" pitchFamily="34" charset="-122"/>
                 <a:cs typeface="Calibri" pitchFamily="34" charset="-120"/>
               </a:rPr>
-              <a:t>The policy is illustrative fiction, disclosed as such. It is the test environment, not the dataset.</a:t>
-            </a:r>
-            <a:endParaRPr lang="en-US" sz="1350" dirty="0"/>
+              <a:t>SERVICE</a:t>
+            </a:r>
+            <a:endParaRPr lang="en-US" sz="950" dirty="0"/>
+          </a:p>
+        </p:txBody>
+      </p:sp>
+      <p:sp>
+        <p:nvSpPr>
+          <p:cNvPr id="10" name="Text 8"/>
+          <p:cNvSpPr/>
+          <p:nvPr/>
+        </p:nvSpPr>
+        <p:spPr>
+          <a:xfrm>
+            <a:off x="1984248" y="2185416"/>
+            <a:ext cx="9518904" cy="274320"/>
+          </a:xfrm>
+          <a:prstGeom prst="rect">
+            <a:avLst/>
+          </a:prstGeom>
+          <a:noFill/>
+          <a:ln/>
+        </p:spPr>
+        <p:txBody>
+          <a:bodyPr wrap="square" lIns="0" tIns="0" rIns="0" bIns="0" rtlCol="0" anchor="ctr"/>
+          <a:lstStyle/>
+          <a:p>
+            <a:pPr indent="0" marL="0">
+              <a:buNone/>
+            </a:pPr>
+            <a:r>
+              <a:rPr lang="en-US" sz="1200" b="1" dirty="0">
+                <a:solidFill>
+                  <a:srgbClr val="23272C"/>
+                </a:solidFill>
+                <a:latin typeface="Calibri" pitchFamily="34" charset="0"/>
+                <a:ea typeface="Calibri" pitchFamily="34" charset="-122"/>
+                <a:cs typeface="Calibri" pitchFamily="34" charset="-120"/>
+              </a:rPr>
+              <a:t>FastAPI</a:t>
+            </a:r>
+            <a:endParaRPr lang="en-US" sz="1200" dirty="0"/>
+          </a:p>
+        </p:txBody>
+      </p:sp>
+      <p:sp>
+        <p:nvSpPr>
+          <p:cNvPr id="11" name="Text 9"/>
+          <p:cNvSpPr/>
+          <p:nvPr/>
+        </p:nvSpPr>
+        <p:spPr>
+          <a:xfrm>
+            <a:off x="1984248" y="2404872"/>
+            <a:ext cx="9518904" cy="237744"/>
+          </a:xfrm>
+          <a:prstGeom prst="rect">
+            <a:avLst/>
+          </a:prstGeom>
+          <a:noFill/>
+          <a:ln/>
+        </p:spPr>
+        <p:txBody>
+          <a:bodyPr wrap="square" lIns="0" tIns="0" rIns="0" bIns="0" rtlCol="0" anchor="ctr"/>
+          <a:lstStyle/>
+          <a:p>
+            <a:pPr indent="0" marL="0">
+              <a:buNone/>
+            </a:pPr>
+            <a:r>
+              <a:rPr lang="en-US" sz="1000" dirty="0">
+                <a:solidFill>
+                  <a:srgbClr val="6A727C"/>
+                </a:solidFill>
+                <a:latin typeface="Calibri" pitchFamily="34" charset="0"/>
+                <a:ea typeface="Calibri" pitchFamily="34" charset="-122"/>
+                <a:cs typeface="Calibri" pitchFamily="34" charset="-120"/>
+              </a:rPr>
+              <a:t>REST endpoints  ·  /api/runs/{id}/events streams every event over SSE</a:t>
+            </a:r>
+            <a:endParaRPr lang="en-US" sz="1000" dirty="0"/>
+          </a:p>
+        </p:txBody>
+      </p:sp>
+      <p:sp>
+        <p:nvSpPr>
+          <p:cNvPr id="12" name="Shape 10"/>
+          <p:cNvSpPr/>
+          <p:nvPr/>
+        </p:nvSpPr>
+        <p:spPr>
+          <a:xfrm>
+            <a:off x="1783080" y="2761488"/>
+            <a:ext cx="9921240" cy="530352"/>
+          </a:xfrm>
+          <a:prstGeom prst="roundRect">
+            <a:avLst>
+              <a:gd name="adj" fmla="val 7759"/>
+            </a:avLst>
+          </a:prstGeom>
+          <a:solidFill>
+            <a:srgbClr val="FFFFFF"/>
+          </a:solidFill>
+          <a:ln w="12700">
+            <a:solidFill>
+              <a:srgbClr val="E3E0DA"/>
+            </a:solidFill>
+            <a:prstDash val="solid"/>
+          </a:ln>
+        </p:spPr>
+      </p:sp>
+      <p:sp>
+        <p:nvSpPr>
+          <p:cNvPr id="13" name="Text 11"/>
+          <p:cNvSpPr/>
+          <p:nvPr/>
+        </p:nvSpPr>
+        <p:spPr>
+          <a:xfrm>
+            <a:off x="365760" y="2880360"/>
+            <a:ext cx="1298448" cy="292608"/>
+          </a:xfrm>
+          <a:prstGeom prst="rect">
+            <a:avLst/>
+          </a:prstGeom>
+          <a:noFill/>
+          <a:ln/>
+        </p:spPr>
+        <p:txBody>
+          <a:bodyPr wrap="square" lIns="0" tIns="0" rIns="0" bIns="0" rtlCol="0" anchor="ctr"/>
+          <a:lstStyle/>
+          <a:p>
+            <a:pPr algn="r" indent="0" marL="0">
+              <a:buNone/>
+            </a:pPr>
+            <a:r>
+              <a:rPr lang="en-US" sz="950" b="1" spc="140" kern="0" dirty="0">
+                <a:solidFill>
+                  <a:srgbClr val="9AA1AA"/>
+                </a:solidFill>
+                <a:latin typeface="Calibri" pitchFamily="34" charset="0"/>
+                <a:ea typeface="Calibri" pitchFamily="34" charset="-122"/>
+                <a:cs typeface="Calibri" pitchFamily="34" charset="-120"/>
+              </a:rPr>
+              <a:t>ORCHESTRATION</a:t>
+            </a:r>
+            <a:endParaRPr lang="en-US" sz="950" dirty="0"/>
+          </a:p>
+        </p:txBody>
+      </p:sp>
+      <p:sp>
+        <p:nvSpPr>
+          <p:cNvPr id="14" name="Text 12"/>
+          <p:cNvSpPr/>
+          <p:nvPr/>
+        </p:nvSpPr>
+        <p:spPr>
+          <a:xfrm>
+            <a:off x="1984248" y="2825496"/>
+            <a:ext cx="9518904" cy="274320"/>
+          </a:xfrm>
+          <a:prstGeom prst="rect">
+            <a:avLst/>
+          </a:prstGeom>
+          <a:noFill/>
+          <a:ln/>
+        </p:spPr>
+        <p:txBody>
+          <a:bodyPr wrap="square" lIns="0" tIns="0" rIns="0" bIns="0" rtlCol="0" anchor="ctr"/>
+          <a:lstStyle/>
+          <a:p>
+            <a:pPr indent="0" marL="0">
+              <a:buNone/>
+            </a:pPr>
+            <a:r>
+              <a:rPr lang="en-US" sz="1200" b="1" dirty="0">
+                <a:solidFill>
+                  <a:srgbClr val="23272C"/>
+                </a:solidFill>
+                <a:latin typeface="Calibri" pitchFamily="34" charset="0"/>
+                <a:ea typeface="Calibri" pitchFamily="34" charset="-122"/>
+                <a:cs typeface="Calibri" pitchFamily="34" charset="-120"/>
+              </a:rPr>
+              <a:t>run_encounter()</a:t>
+            </a:r>
+            <a:endParaRPr lang="en-US" sz="1200" dirty="0"/>
+          </a:p>
+        </p:txBody>
+      </p:sp>
+      <p:sp>
+        <p:nvSpPr>
+          <p:cNvPr id="15" name="Text 13"/>
+          <p:cNvSpPr/>
+          <p:nvPr/>
+        </p:nvSpPr>
+        <p:spPr>
+          <a:xfrm>
+            <a:off x="1984248" y="3044952"/>
+            <a:ext cx="9518904" cy="237744"/>
+          </a:xfrm>
+          <a:prstGeom prst="rect">
+            <a:avLst/>
+          </a:prstGeom>
+          <a:noFill/>
+          <a:ln/>
+        </p:spPr>
+        <p:txBody>
+          <a:bodyPr wrap="square" lIns="0" tIns="0" rIns="0" bIns="0" rtlCol="0" anchor="ctr"/>
+          <a:lstStyle/>
+          <a:p>
+            <a:pPr indent="0" marL="0">
+              <a:buNone/>
+            </a:pPr>
+            <a:r>
+              <a:rPr lang="en-US" sz="1000" dirty="0">
+                <a:solidFill>
+                  <a:srgbClr val="6A727C"/>
+                </a:solidFill>
+                <a:latin typeface="Calibri" pitchFamily="34" charset="0"/>
+                <a:ea typeface="Calibri" pitchFamily="34" charset="-122"/>
+                <a:cs typeface="Calibri" pitchFamily="34" charset="-120"/>
+              </a:rPr>
+              <a:t>plain async loop, no handoffs  ·  max 3 submissions  ·  token and cost accounting</a:t>
+            </a:r>
+            <a:endParaRPr lang="en-US" sz="1000" dirty="0"/>
+          </a:p>
+        </p:txBody>
+      </p:sp>
+      <p:sp>
+        <p:nvSpPr>
+          <p:cNvPr id="16" name="Shape 14"/>
+          <p:cNvSpPr/>
+          <p:nvPr/>
+        </p:nvSpPr>
+        <p:spPr>
+          <a:xfrm>
+            <a:off x="1783080" y="3401568"/>
+            <a:ext cx="9921240" cy="1298448"/>
+          </a:xfrm>
+          <a:prstGeom prst="roundRect">
+            <a:avLst>
+              <a:gd name="adj" fmla="val 3169"/>
+            </a:avLst>
+          </a:prstGeom>
+          <a:solidFill>
+            <a:srgbClr val="F4F7FB"/>
+          </a:solidFill>
+          <a:ln w="12700">
+            <a:solidFill>
+              <a:srgbClr val="E3E0DA"/>
+            </a:solidFill>
+            <a:prstDash val="solid"/>
+          </a:ln>
+        </p:spPr>
+      </p:sp>
+      <p:sp>
+        <p:nvSpPr>
+          <p:cNvPr id="17" name="Text 15"/>
+          <p:cNvSpPr/>
+          <p:nvPr/>
+        </p:nvSpPr>
+        <p:spPr>
+          <a:xfrm>
+            <a:off x="365760" y="3904488"/>
+            <a:ext cx="1298448" cy="292608"/>
+          </a:xfrm>
+          <a:prstGeom prst="rect">
+            <a:avLst/>
+          </a:prstGeom>
+          <a:noFill/>
+          <a:ln/>
+        </p:spPr>
+        <p:txBody>
+          <a:bodyPr wrap="square" lIns="0" tIns="0" rIns="0" bIns="0" rtlCol="0" anchor="ctr"/>
+          <a:lstStyle/>
+          <a:p>
+            <a:pPr algn="r" indent="0" marL="0">
+              <a:buNone/>
+            </a:pPr>
+            <a:r>
+              <a:rPr lang="en-US" sz="950" b="1" spc="140" kern="0" dirty="0">
+                <a:solidFill>
+                  <a:srgbClr val="9AA1AA"/>
+                </a:solidFill>
+                <a:latin typeface="Calibri" pitchFamily="34" charset="0"/>
+                <a:ea typeface="Calibri" pitchFamily="34" charset="-122"/>
+                <a:cs typeface="Calibri" pitchFamily="34" charset="-120"/>
+              </a:rPr>
+              <a:t>AGENTS</a:t>
+            </a:r>
+            <a:endParaRPr lang="en-US" sz="950" dirty="0"/>
+          </a:p>
+        </p:txBody>
+      </p:sp>
+      <p:sp>
+        <p:nvSpPr>
+          <p:cNvPr id="18" name="Text 16"/>
+          <p:cNvSpPr/>
+          <p:nvPr/>
+        </p:nvSpPr>
+        <p:spPr>
+          <a:xfrm>
+            <a:off x="1984248" y="3511296"/>
+            <a:ext cx="9518904" cy="274320"/>
+          </a:xfrm>
+          <a:prstGeom prst="rect">
+            <a:avLst/>
+          </a:prstGeom>
+          <a:noFill/>
+          <a:ln/>
+        </p:spPr>
+        <p:txBody>
+          <a:bodyPr wrap="square" lIns="0" tIns="0" rIns="0" bIns="0" rtlCol="0" anchor="ctr"/>
+          <a:lstStyle/>
+          <a:p>
+            <a:pPr indent="0" marL="0">
+              <a:buNone/>
+            </a:pPr>
+            <a:r>
+              <a:rPr lang="en-US" sz="1150" b="1" dirty="0">
+                <a:solidFill>
+                  <a:srgbClr val="35639C"/>
+                </a:solidFill>
+                <a:latin typeface="Calibri" pitchFamily="34" charset="0"/>
+                <a:ea typeface="Calibri" pitchFamily="34" charset="-122"/>
+                <a:cs typeface="Calibri" pitchFamily="34" charset="-120"/>
+              </a:rPr>
+              <a:t>OpenAI Agents SDK over the Responses API</a:t>
+            </a:r>
+            <a:endParaRPr lang="en-US" sz="1150" dirty="0"/>
+          </a:p>
+        </p:txBody>
+      </p:sp>
+      <p:sp>
+        <p:nvSpPr>
+          <p:cNvPr id="19" name="Shape 17"/>
+          <p:cNvSpPr/>
+          <p:nvPr/>
+        </p:nvSpPr>
+        <p:spPr>
+          <a:xfrm>
+            <a:off x="1984248" y="3822192"/>
+            <a:ext cx="3038856" cy="822960"/>
+          </a:xfrm>
+          <a:prstGeom prst="roundRect">
+            <a:avLst>
+              <a:gd name="adj" fmla="val 5000"/>
+            </a:avLst>
+          </a:prstGeom>
+          <a:solidFill>
+            <a:srgbClr val="E9F0F8"/>
+          </a:solidFill>
+          <a:ln w="12700">
+            <a:solidFill>
+              <a:srgbClr val="C9D6E6"/>
+            </a:solidFill>
+            <a:prstDash val="solid"/>
+          </a:ln>
+        </p:spPr>
+      </p:sp>
+      <p:sp>
+        <p:nvSpPr>
+          <p:cNvPr id="20" name="Text 18"/>
+          <p:cNvSpPr/>
+          <p:nvPr/>
+        </p:nvSpPr>
+        <p:spPr>
+          <a:xfrm>
+            <a:off x="2112264" y="3877056"/>
+            <a:ext cx="2782824" cy="237744"/>
+          </a:xfrm>
+          <a:prstGeom prst="rect">
+            <a:avLst/>
+          </a:prstGeom>
+          <a:noFill/>
+          <a:ln/>
+        </p:spPr>
+        <p:txBody>
+          <a:bodyPr wrap="square" lIns="0" tIns="0" rIns="0" bIns="0" rtlCol="0" anchor="ctr"/>
+          <a:lstStyle/>
+          <a:p>
+            <a:pPr indent="0" marL="0">
+              <a:buNone/>
+            </a:pPr>
+            <a:r>
+              <a:rPr lang="en-US" sz="1150" b="1" dirty="0">
+                <a:solidFill>
+                  <a:srgbClr val="23272C"/>
+                </a:solidFill>
+                <a:latin typeface="Calibri" pitchFamily="34" charset="0"/>
+                <a:ea typeface="Calibri" pitchFamily="34" charset="-122"/>
+                <a:cs typeface="Calibri" pitchFamily="34" charset="-120"/>
+              </a:rPr>
+              <a:t>Scribe</a:t>
+            </a:r>
+            <a:endParaRPr lang="en-US" sz="1150" dirty="0"/>
+          </a:p>
+        </p:txBody>
+      </p:sp>
+      <p:sp>
+        <p:nvSpPr>
+          <p:cNvPr id="21" name="Text 19"/>
+          <p:cNvSpPr/>
+          <p:nvPr/>
+        </p:nvSpPr>
+        <p:spPr>
+          <a:xfrm>
+            <a:off x="2112264" y="4114800"/>
+            <a:ext cx="2782824" cy="219456"/>
+          </a:xfrm>
+          <a:prstGeom prst="rect">
+            <a:avLst/>
+          </a:prstGeom>
+          <a:noFill/>
+          <a:ln/>
+        </p:spPr>
+        <p:txBody>
+          <a:bodyPr wrap="square" lIns="0" tIns="0" rIns="0" bIns="0" rtlCol="0" anchor="ctr"/>
+          <a:lstStyle/>
+          <a:p>
+            <a:pPr indent="0" marL="0">
+              <a:buNone/>
+            </a:pPr>
+            <a:r>
+              <a:rPr lang="en-US" sz="900" dirty="0">
+                <a:solidFill>
+                  <a:srgbClr val="6A727C"/>
+                </a:solidFill>
+                <a:latin typeface="Courier New" pitchFamily="34" charset="0"/>
+                <a:ea typeface="Courier New" pitchFamily="34" charset="-122"/>
+                <a:cs typeface="Courier New" pitchFamily="34" charset="-120"/>
+              </a:rPr>
+              <a:t>output: EncounterNote</a:t>
+            </a:r>
+            <a:endParaRPr lang="en-US" sz="900" dirty="0"/>
+          </a:p>
+        </p:txBody>
+      </p:sp>
+      <p:sp>
+        <p:nvSpPr>
+          <p:cNvPr id="22" name="Text 20"/>
+          <p:cNvSpPr/>
+          <p:nvPr/>
+        </p:nvSpPr>
+        <p:spPr>
+          <a:xfrm>
+            <a:off x="2112264" y="4306824"/>
+            <a:ext cx="2782824" cy="292608"/>
+          </a:xfrm>
+          <a:prstGeom prst="rect">
+            <a:avLst/>
+          </a:prstGeom>
+          <a:noFill/>
+          <a:ln/>
+        </p:spPr>
+        <p:txBody>
+          <a:bodyPr wrap="square" lIns="0" tIns="0" rIns="0" bIns="0" rtlCol="0" anchor="ctr"/>
+          <a:lstStyle/>
+          <a:p>
+            <a:pPr indent="0" marL="0">
+              <a:lnSpc>
+                <a:spcPts val="1100"/>
+              </a:lnSpc>
+              <a:buNone/>
+            </a:pPr>
+            <a:r>
+              <a:rPr lang="en-US" sz="900" dirty="0">
+                <a:solidFill>
+                  <a:srgbClr val="35639C"/>
+                </a:solidFill>
+                <a:latin typeface="Courier New" pitchFamily="34" charset="0"/>
+                <a:ea typeface="Courier New" pitchFamily="34" charset="-122"/>
+                <a:cs typeface="Courier New" pitchFamily="34" charset="-120"/>
+              </a:rPr>
+              <a:t>no tools</a:t>
+            </a:r>
+            <a:endParaRPr lang="en-US" sz="900" dirty="0"/>
+          </a:p>
+        </p:txBody>
+      </p:sp>
+      <p:sp>
+        <p:nvSpPr>
+          <p:cNvPr id="23" name="Shape 21"/>
+          <p:cNvSpPr/>
+          <p:nvPr/>
+        </p:nvSpPr>
+        <p:spPr>
+          <a:xfrm>
+            <a:off x="5224272" y="3822192"/>
+            <a:ext cx="3038856" cy="822960"/>
+          </a:xfrm>
+          <a:prstGeom prst="roundRect">
+            <a:avLst>
+              <a:gd name="adj" fmla="val 5000"/>
+            </a:avLst>
+          </a:prstGeom>
+          <a:solidFill>
+            <a:srgbClr val="E9F0F8"/>
+          </a:solidFill>
+          <a:ln w="12700">
+            <a:solidFill>
+              <a:srgbClr val="C9D6E6"/>
+            </a:solidFill>
+            <a:prstDash val="solid"/>
+          </a:ln>
+        </p:spPr>
+      </p:sp>
+      <p:sp>
+        <p:nvSpPr>
+          <p:cNvPr id="24" name="Text 22"/>
+          <p:cNvSpPr/>
+          <p:nvPr/>
+        </p:nvSpPr>
+        <p:spPr>
+          <a:xfrm>
+            <a:off x="5352288" y="3877056"/>
+            <a:ext cx="2782824" cy="237744"/>
+          </a:xfrm>
+          <a:prstGeom prst="rect">
+            <a:avLst/>
+          </a:prstGeom>
+          <a:noFill/>
+          <a:ln/>
+        </p:spPr>
+        <p:txBody>
+          <a:bodyPr wrap="square" lIns="0" tIns="0" rIns="0" bIns="0" rtlCol="0" anchor="ctr"/>
+          <a:lstStyle/>
+          <a:p>
+            <a:pPr indent="0" marL="0">
+              <a:buNone/>
+            </a:pPr>
+            <a:r>
+              <a:rPr lang="en-US" sz="1150" b="1" dirty="0">
+                <a:solidFill>
+                  <a:srgbClr val="23272C"/>
+                </a:solidFill>
+                <a:latin typeface="Calibri" pitchFamily="34" charset="0"/>
+                <a:ea typeface="Calibri" pitchFamily="34" charset="-122"/>
+                <a:cs typeface="Calibri" pitchFamily="34" charset="-120"/>
+              </a:rPr>
+              <a:t>Coder</a:t>
+            </a:r>
+            <a:endParaRPr lang="en-US" sz="1150" dirty="0"/>
+          </a:p>
+        </p:txBody>
+      </p:sp>
+      <p:sp>
+        <p:nvSpPr>
+          <p:cNvPr id="25" name="Text 23"/>
+          <p:cNvSpPr/>
+          <p:nvPr/>
+        </p:nvSpPr>
+        <p:spPr>
+          <a:xfrm>
+            <a:off x="5352288" y="4114800"/>
+            <a:ext cx="2782824" cy="219456"/>
+          </a:xfrm>
+          <a:prstGeom prst="rect">
+            <a:avLst/>
+          </a:prstGeom>
+          <a:noFill/>
+          <a:ln/>
+        </p:spPr>
+        <p:txBody>
+          <a:bodyPr wrap="square" lIns="0" tIns="0" rIns="0" bIns="0" rtlCol="0" anchor="ctr"/>
+          <a:lstStyle/>
+          <a:p>
+            <a:pPr indent="0" marL="0">
+              <a:buNone/>
+            </a:pPr>
+            <a:r>
+              <a:rPr lang="en-US" sz="900" dirty="0">
+                <a:solidFill>
+                  <a:srgbClr val="6A727C"/>
+                </a:solidFill>
+                <a:latin typeface="Courier New" pitchFamily="34" charset="0"/>
+                <a:ea typeface="Courier New" pitchFamily="34" charset="-122"/>
+                <a:cs typeface="Courier New" pitchFamily="34" charset="-120"/>
+              </a:rPr>
+              <a:t>output: CodingResult</a:t>
+            </a:r>
+            <a:endParaRPr lang="en-US" sz="900" dirty="0"/>
+          </a:p>
+        </p:txBody>
+      </p:sp>
+      <p:sp>
+        <p:nvSpPr>
+          <p:cNvPr id="26" name="Text 24"/>
+          <p:cNvSpPr/>
+          <p:nvPr/>
+        </p:nvSpPr>
+        <p:spPr>
+          <a:xfrm>
+            <a:off x="5352288" y="4306824"/>
+            <a:ext cx="2782824" cy="292608"/>
+          </a:xfrm>
+          <a:prstGeom prst="rect">
+            <a:avLst/>
+          </a:prstGeom>
+          <a:noFill/>
+          <a:ln/>
+        </p:spPr>
+        <p:txBody>
+          <a:bodyPr wrap="square" lIns="0" tIns="0" rIns="0" bIns="0" rtlCol="0" anchor="ctr"/>
+          <a:lstStyle/>
+          <a:p>
+            <a:pPr indent="0" marL="0">
+              <a:lnSpc>
+                <a:spcPts val="1100"/>
+              </a:lnSpc>
+              <a:buNone/>
+            </a:pPr>
+            <a:r>
+              <a:rPr lang="en-US" sz="900" dirty="0">
+                <a:solidFill>
+                  <a:srgbClr val="35639C"/>
+                </a:solidFill>
+                <a:latin typeface="Courier New" pitchFamily="34" charset="0"/>
+                <a:ea typeface="Courier New" pitchFamily="34" charset="-122"/>
+                <a:cs typeface="Courier New" pitchFamily="34" charset="-120"/>
+              </a:rPr>
+              <a:t>tool: search_icd10</a:t>
+            </a:r>
+            <a:endParaRPr lang="en-US" sz="900" dirty="0"/>
+          </a:p>
+        </p:txBody>
+      </p:sp>
+      <p:sp>
+        <p:nvSpPr>
+          <p:cNvPr id="27" name="Shape 25"/>
+          <p:cNvSpPr/>
+          <p:nvPr/>
+        </p:nvSpPr>
+        <p:spPr>
+          <a:xfrm>
+            <a:off x="8464296" y="3822192"/>
+            <a:ext cx="3038856" cy="822960"/>
+          </a:xfrm>
+          <a:prstGeom prst="roundRect">
+            <a:avLst>
+              <a:gd name="adj" fmla="val 5000"/>
+            </a:avLst>
+          </a:prstGeom>
+          <a:solidFill>
+            <a:srgbClr val="E9F0F8"/>
+          </a:solidFill>
+          <a:ln w="12700">
+            <a:solidFill>
+              <a:srgbClr val="C9D6E6"/>
+            </a:solidFill>
+            <a:prstDash val="solid"/>
+          </a:ln>
+        </p:spPr>
+      </p:sp>
+      <p:sp>
+        <p:nvSpPr>
+          <p:cNvPr id="28" name="Text 26"/>
+          <p:cNvSpPr/>
+          <p:nvPr/>
+        </p:nvSpPr>
+        <p:spPr>
+          <a:xfrm>
+            <a:off x="8592312" y="3877056"/>
+            <a:ext cx="2782824" cy="237744"/>
+          </a:xfrm>
+          <a:prstGeom prst="rect">
+            <a:avLst/>
+          </a:prstGeom>
+          <a:noFill/>
+          <a:ln/>
+        </p:spPr>
+        <p:txBody>
+          <a:bodyPr wrap="square" lIns="0" tIns="0" rIns="0" bIns="0" rtlCol="0" anchor="ctr"/>
+          <a:lstStyle/>
+          <a:p>
+            <a:pPr indent="0" marL="0">
+              <a:buNone/>
+            </a:pPr>
+            <a:r>
+              <a:rPr lang="en-US" sz="1150" b="1" dirty="0">
+                <a:solidFill>
+                  <a:srgbClr val="23272C"/>
+                </a:solidFill>
+                <a:latin typeface="Calibri" pitchFamily="34" charset="0"/>
+                <a:ea typeface="Calibri" pitchFamily="34" charset="-122"/>
+                <a:cs typeface="Calibri" pitchFamily="34" charset="-120"/>
+              </a:rPr>
+              <a:t>DenialResolver</a:t>
+            </a:r>
+            <a:endParaRPr lang="en-US" sz="1150" dirty="0"/>
+          </a:p>
+        </p:txBody>
+      </p:sp>
+      <p:sp>
+        <p:nvSpPr>
+          <p:cNvPr id="29" name="Text 27"/>
+          <p:cNvSpPr/>
+          <p:nvPr/>
+        </p:nvSpPr>
+        <p:spPr>
+          <a:xfrm>
+            <a:off x="8592312" y="4114800"/>
+            <a:ext cx="2782824" cy="219456"/>
+          </a:xfrm>
+          <a:prstGeom prst="rect">
+            <a:avLst/>
+          </a:prstGeom>
+          <a:noFill/>
+          <a:ln/>
+        </p:spPr>
+        <p:txBody>
+          <a:bodyPr wrap="square" lIns="0" tIns="0" rIns="0" bIns="0" rtlCol="0" anchor="ctr"/>
+          <a:lstStyle/>
+          <a:p>
+            <a:pPr indent="0" marL="0">
+              <a:buNone/>
+            </a:pPr>
+            <a:r>
+              <a:rPr lang="en-US" sz="900" dirty="0">
+                <a:solidFill>
+                  <a:srgbClr val="6A727C"/>
+                </a:solidFill>
+                <a:latin typeface="Courier New" pitchFamily="34" charset="0"/>
+                <a:ea typeface="Courier New" pitchFamily="34" charset="-122"/>
+                <a:cs typeface="Courier New" pitchFamily="34" charset="-120"/>
+              </a:rPr>
+              <a:t>output: ResolutionDecision</a:t>
+            </a:r>
+            <a:endParaRPr lang="en-US" sz="900" dirty="0"/>
+          </a:p>
+        </p:txBody>
+      </p:sp>
+      <p:sp>
+        <p:nvSpPr>
+          <p:cNvPr id="30" name="Text 28"/>
+          <p:cNvSpPr/>
+          <p:nvPr/>
+        </p:nvSpPr>
+        <p:spPr>
+          <a:xfrm>
+            <a:off x="8592312" y="4306824"/>
+            <a:ext cx="2782824" cy="292608"/>
+          </a:xfrm>
+          <a:prstGeom prst="rect">
+            <a:avLst/>
+          </a:prstGeom>
+          <a:noFill/>
+          <a:ln/>
+        </p:spPr>
+        <p:txBody>
+          <a:bodyPr wrap="square" lIns="0" tIns="0" rIns="0" bIns="0" rtlCol="0" anchor="ctr"/>
+          <a:lstStyle/>
+          <a:p>
+            <a:pPr indent="0" marL="0">
+              <a:lnSpc>
+                <a:spcPts val="1100"/>
+              </a:lnSpc>
+              <a:buNone/>
+            </a:pPr>
+            <a:r>
+              <a:rPr lang="en-US" sz="900" dirty="0">
+                <a:solidFill>
+                  <a:srgbClr val="35639C"/>
+                </a:solidFill>
+                <a:latin typeface="Courier New" pitchFamily="34" charset="0"/>
+                <a:ea typeface="Courier New" pitchFamily="34" charset="-122"/>
+                <a:cs typeface="Courier New" pitchFamily="34" charset="-120"/>
+              </a:rPr>
+              <a:t>tools: search_icd10,</a:t>
+            </a:r>
+            <a:endParaRPr lang="en-US" sz="900" dirty="0"/>
+          </a:p>
+          <a:p>
+            <a:pPr indent="0" marL="0">
+              <a:lnSpc>
+                <a:spcPts val="1100"/>
+              </a:lnSpc>
+              <a:buNone/>
+            </a:pPr>
+            <a:r>
+              <a:rPr lang="en-US" sz="900" dirty="0">
+                <a:solidFill>
+                  <a:srgbClr val="35639C"/>
+                </a:solidFill>
+                <a:latin typeface="Courier New" pitchFamily="34" charset="0"/>
+                <a:ea typeface="Courier New" pitchFamily="34" charset="-122"/>
+                <a:cs typeface="Courier New" pitchFamily="34" charset="-120"/>
+              </a:rPr>
+              <a:t>request_prior_auth</a:t>
+            </a:r>
+            <a:endParaRPr lang="en-US" sz="900" dirty="0"/>
+          </a:p>
+        </p:txBody>
+      </p:sp>
+      <p:sp>
+        <p:nvSpPr>
+          <p:cNvPr id="31" name="Shape 29"/>
+          <p:cNvSpPr/>
+          <p:nvPr/>
+        </p:nvSpPr>
+        <p:spPr>
+          <a:xfrm>
+            <a:off x="1783080" y="4809744"/>
+            <a:ext cx="9921240" cy="530352"/>
+          </a:xfrm>
+          <a:prstGeom prst="roundRect">
+            <a:avLst>
+              <a:gd name="adj" fmla="val 7759"/>
+            </a:avLst>
+          </a:prstGeom>
+          <a:solidFill>
+            <a:srgbClr val="FFFFFF"/>
+          </a:solidFill>
+          <a:ln w="12700">
+            <a:solidFill>
+              <a:srgbClr val="E3E0DA"/>
+            </a:solidFill>
+            <a:prstDash val="solid"/>
+          </a:ln>
+        </p:spPr>
+      </p:sp>
+      <p:sp>
+        <p:nvSpPr>
+          <p:cNvPr id="32" name="Text 30"/>
+          <p:cNvSpPr/>
+          <p:nvPr/>
+        </p:nvSpPr>
+        <p:spPr>
+          <a:xfrm>
+            <a:off x="365760" y="4928616"/>
+            <a:ext cx="1298448" cy="292608"/>
+          </a:xfrm>
+          <a:prstGeom prst="rect">
+            <a:avLst/>
+          </a:prstGeom>
+          <a:noFill/>
+          <a:ln/>
+        </p:spPr>
+        <p:txBody>
+          <a:bodyPr wrap="square" lIns="0" tIns="0" rIns="0" bIns="0" rtlCol="0" anchor="ctr"/>
+          <a:lstStyle/>
+          <a:p>
+            <a:pPr algn="r" indent="0" marL="0">
+              <a:buNone/>
+            </a:pPr>
+            <a:r>
+              <a:rPr lang="en-US" sz="950" b="1" spc="140" kern="0" dirty="0">
+                <a:solidFill>
+                  <a:srgbClr val="9AA1AA"/>
+                </a:solidFill>
+                <a:latin typeface="Calibri" pitchFamily="34" charset="0"/>
+                <a:ea typeface="Calibri" pitchFamily="34" charset="-122"/>
+                <a:cs typeface="Calibri" pitchFamily="34" charset="-120"/>
+              </a:rPr>
+              <a:t>DETERMINISTIC</a:t>
+            </a:r>
+            <a:endParaRPr lang="en-US" sz="950" dirty="0"/>
+          </a:p>
+        </p:txBody>
+      </p:sp>
+      <p:sp>
+        <p:nvSpPr>
+          <p:cNvPr id="33" name="Text 31"/>
+          <p:cNvSpPr/>
+          <p:nvPr/>
+        </p:nvSpPr>
+        <p:spPr>
+          <a:xfrm>
+            <a:off x="1984248" y="4873752"/>
+            <a:ext cx="9518904" cy="274320"/>
+          </a:xfrm>
+          <a:prstGeom prst="rect">
+            <a:avLst/>
+          </a:prstGeom>
+          <a:noFill/>
+          <a:ln/>
+        </p:spPr>
+        <p:txBody>
+          <a:bodyPr wrap="square" lIns="0" tIns="0" rIns="0" bIns="0" rtlCol="0" anchor="ctr"/>
+          <a:lstStyle/>
+          <a:p>
+            <a:pPr indent="0" marL="0">
+              <a:buNone/>
+            </a:pPr>
+            <a:r>
+              <a:rPr lang="en-US" sz="1200" b="1" dirty="0">
+                <a:solidFill>
+                  <a:srgbClr val="23272C"/>
+                </a:solidFill>
+                <a:latin typeface="Calibri" pitchFamily="34" charset="0"/>
+                <a:ea typeface="Calibri" pitchFamily="34" charset="-122"/>
+                <a:cs typeface="Calibri" pitchFamily="34" charset="-120"/>
+              </a:rPr>
+              <a:t>claim builder  +  payer rules engine</a:t>
+            </a:r>
+            <a:endParaRPr lang="en-US" sz="1200" dirty="0"/>
+          </a:p>
+        </p:txBody>
+      </p:sp>
+      <p:sp>
+        <p:nvSpPr>
+          <p:cNvPr id="34" name="Text 32"/>
+          <p:cNvSpPr/>
+          <p:nvPr/>
+        </p:nvSpPr>
+        <p:spPr>
+          <a:xfrm>
+            <a:off x="1984248" y="5093208"/>
+            <a:ext cx="9518904" cy="237744"/>
+          </a:xfrm>
+          <a:prstGeom prst="rect">
+            <a:avLst/>
+          </a:prstGeom>
+          <a:noFill/>
+          <a:ln/>
+        </p:spPr>
+        <p:txBody>
+          <a:bodyPr wrap="square" lIns="0" tIns="0" rIns="0" bIns="0" rtlCol="0" anchor="ctr"/>
+          <a:lstStyle/>
+          <a:p>
+            <a:pPr indent="0" marL="0">
+              <a:buNone/>
+            </a:pPr>
+            <a:r>
+              <a:rPr lang="en-US" sz="1000" dirty="0">
+                <a:solidFill>
+                  <a:srgbClr val="6A727C"/>
+                </a:solidFill>
+                <a:latin typeface="Calibri" pitchFamily="34" charset="0"/>
+                <a:ea typeface="Calibri" pitchFamily="34" charset="-122"/>
+                <a:cs typeface="Calibri" pitchFamily="34" charset="-120"/>
+              </a:rPr>
+              <a:t>no model in this path: same claim in, same verdict out</a:t>
+            </a:r>
+            <a:endParaRPr lang="en-US" sz="1000" dirty="0"/>
+          </a:p>
+        </p:txBody>
+      </p:sp>
+      <p:sp>
+        <p:nvSpPr>
+          <p:cNvPr id="35" name="Shape 33"/>
+          <p:cNvSpPr/>
+          <p:nvPr/>
+        </p:nvSpPr>
+        <p:spPr>
+          <a:xfrm>
+            <a:off x="1783080" y="5449824"/>
+            <a:ext cx="9921240" cy="530352"/>
+          </a:xfrm>
+          <a:prstGeom prst="roundRect">
+            <a:avLst>
+              <a:gd name="adj" fmla="val 7759"/>
+            </a:avLst>
+          </a:prstGeom>
+          <a:solidFill>
+            <a:srgbClr val="FFFFFF"/>
+          </a:solidFill>
+          <a:ln w="12700">
+            <a:solidFill>
+              <a:srgbClr val="E3E0DA"/>
+            </a:solidFill>
+            <a:prstDash val="solid"/>
+          </a:ln>
+        </p:spPr>
+      </p:sp>
+      <p:sp>
+        <p:nvSpPr>
+          <p:cNvPr id="36" name="Text 34"/>
+          <p:cNvSpPr/>
+          <p:nvPr/>
+        </p:nvSpPr>
+        <p:spPr>
+          <a:xfrm>
+            <a:off x="365760" y="5568696"/>
+            <a:ext cx="1298448" cy="292608"/>
+          </a:xfrm>
+          <a:prstGeom prst="rect">
+            <a:avLst/>
+          </a:prstGeom>
+          <a:noFill/>
+          <a:ln/>
+        </p:spPr>
+        <p:txBody>
+          <a:bodyPr wrap="square" lIns="0" tIns="0" rIns="0" bIns="0" rtlCol="0" anchor="ctr"/>
+          <a:lstStyle/>
+          <a:p>
+            <a:pPr algn="r" indent="0" marL="0">
+              <a:buNone/>
+            </a:pPr>
+            <a:r>
+              <a:rPr lang="en-US" sz="950" b="1" spc="140" kern="0" dirty="0">
+                <a:solidFill>
+                  <a:srgbClr val="9AA1AA"/>
+                </a:solidFill>
+                <a:latin typeface="Calibri" pitchFamily="34" charset="0"/>
+                <a:ea typeface="Calibri" pitchFamily="34" charset="-122"/>
+                <a:cs typeface="Calibri" pitchFamily="34" charset="-120"/>
+              </a:rPr>
+              <a:t>EXTERNAL</a:t>
+            </a:r>
+            <a:endParaRPr lang="en-US" sz="950" dirty="0"/>
+          </a:p>
+        </p:txBody>
+      </p:sp>
+      <p:sp>
+        <p:nvSpPr>
+          <p:cNvPr id="37" name="Text 35"/>
+          <p:cNvSpPr/>
+          <p:nvPr/>
+        </p:nvSpPr>
+        <p:spPr>
+          <a:xfrm>
+            <a:off x="1984248" y="5577840"/>
+            <a:ext cx="9518904" cy="274320"/>
+          </a:xfrm>
+          <a:prstGeom prst="rect">
+            <a:avLst/>
+          </a:prstGeom>
+          <a:noFill/>
+          <a:ln/>
+        </p:spPr>
+        <p:txBody>
+          <a:bodyPr wrap="square" lIns="0" tIns="0" rIns="0" bIns="0" rtlCol="0" anchor="ctr"/>
+          <a:lstStyle/>
+          <a:p>
+            <a:pPr indent="0" marL="0">
+              <a:buNone/>
+            </a:pPr>
+            <a:r>
+              <a:rPr lang="en-US" sz="1200" b="1" dirty="0">
+                <a:solidFill>
+                  <a:srgbClr val="23272C"/>
+                </a:solidFill>
+                <a:latin typeface="Calibri" pitchFamily="34" charset="0"/>
+                <a:ea typeface="Calibri" pitchFamily="34" charset="-122"/>
+                <a:cs typeface="Calibri" pitchFamily="34" charset="-120"/>
+              </a:rPr>
+              <a:t>NLM ICD-10-CM API  ·  ACI-Bench corpus  ·  CPT subset</a:t>
+            </a:r>
+            <a:endParaRPr lang="en-US" sz="1200" dirty="0"/>
+          </a:p>
+        </p:txBody>
+      </p:sp>
+      <p:sp>
+        <p:nvSpPr>
+          <p:cNvPr id="38" name="Text 36"/>
+          <p:cNvSpPr/>
+          <p:nvPr/>
+        </p:nvSpPr>
+        <p:spPr>
+          <a:xfrm>
+            <a:off x="1783080" y="6053328"/>
+            <a:ext cx="9921240" cy="365760"/>
+          </a:xfrm>
+          <a:prstGeom prst="rect">
+            <a:avLst/>
+          </a:prstGeom>
+          <a:noFill/>
+          <a:ln/>
+        </p:spPr>
+        <p:txBody>
+          <a:bodyPr wrap="square" lIns="0" tIns="0" rIns="0" bIns="0" rtlCol="0" anchor="ctr"/>
+          <a:lstStyle/>
+          <a:p>
+            <a:pPr algn="ctr" indent="0" marL="0">
+              <a:buNone/>
+            </a:pPr>
+            <a:r>
+              <a:rPr lang="en-US" sz="1200" i="1" dirty="0">
+                <a:solidFill>
+                  <a:srgbClr val="23272C"/>
+                </a:solidFill>
+                <a:latin typeface="Calibri" pitchFamily="34" charset="0"/>
+                <a:ea typeface="Calibri" pitchFamily="34" charset="-122"/>
+                <a:cs typeface="Calibri" pitchFamily="34" charset="-120"/>
+              </a:rPr>
+              <a:t>Structured output types and per-agent tool grants are the enforcement mechanism, not the prompt.</a:t>
+            </a:r>
+            <a:endParaRPr lang="en-US" sz="1200" dirty="0"/>
           </a:p>
         </p:txBody>
       </p:sp>
@@ -8150,7 +9138,7 @@
                 <a:ea typeface="Calibri" pitchFamily="34" charset="-122"/>
                 <a:cs typeface="Calibri" pitchFamily="34" charset="-120"/>
               </a:rPr>
-              <a:t>INTERFACE</a:t>
+              <a:t>THE ADVERSARY</a:t>
             </a:r>
             <a:endParaRPr lang="en-US" sz="1050" dirty="0"/>
           </a:p>
@@ -8189,7 +9177,7 @@
                 <a:ea typeface="Cambria" pitchFamily="34" charset="-122"/>
                 <a:cs typeface="Cambria" pitchFamily="34" charset="-120"/>
               </a:rPr>
-              <a:t>The whole journey on one screen</a:t>
+              <a:t>A payer you can argue with</a:t>
             </a:r>
             <a:endParaRPr lang="en-US" sz="2900" dirty="0"/>
           </a:p>
@@ -8197,18 +9185,758 @@
       </p:sp>
       <p:sp>
         <p:nvSpPr>
-          <p:cNvPr id="4" name="Shape 2"/>
-          <p:cNvSpPr/>
-          <p:nvPr/>
-        </p:nvSpPr>
-        <p:spPr>
-          <a:xfrm>
-            <a:off x="548640" y="1554480"/>
-            <a:ext cx="6720840" cy="4434840"/>
+          <p:cNvPr id="4" name="Text 2"/>
+          <p:cNvSpPr/>
+          <p:nvPr/>
+        </p:nvSpPr>
+        <p:spPr>
+          <a:xfrm>
+            <a:off x="640080" y="1645920"/>
+            <a:ext cx="4846320" cy="384048"/>
+          </a:xfrm>
+          <a:prstGeom prst="rect">
+            <a:avLst/>
+          </a:prstGeom>
+          <a:noFill/>
+          <a:ln/>
+        </p:spPr>
+        <p:txBody>
+          <a:bodyPr wrap="square" lIns="0" tIns="0" rIns="0" bIns="0" rtlCol="0" anchor="ctr"/>
+          <a:lstStyle/>
+          <a:p>
+            <a:pPr indent="0" marL="0">
+              <a:buNone/>
+            </a:pPr>
+            <a:r>
+              <a:rPr lang="en-US" sz="1400" dirty="0">
+                <a:solidFill>
+                  <a:srgbClr val="23272C"/>
+                </a:solidFill>
+                <a:latin typeface="Calibri" pitchFamily="34" charset="0"/>
+                <a:ea typeface="Calibri" pitchFamily="34" charset="-122"/>
+                <a:cs typeface="Calibri" pitchFamily="34" charset="-120"/>
+              </a:rPr>
+              <a:t>Required fields present</a:t>
+            </a:r>
+            <a:endParaRPr lang="en-US" sz="1400" dirty="0"/>
+          </a:p>
+        </p:txBody>
+      </p:sp>
+      <p:sp>
+        <p:nvSpPr>
+          <p:cNvPr id="5" name="Text 3"/>
+          <p:cNvSpPr/>
+          <p:nvPr/>
+        </p:nvSpPr>
+        <p:spPr>
+          <a:xfrm>
+            <a:off x="5623560" y="1691640"/>
+            <a:ext cx="662940" cy="292608"/>
           </a:xfrm>
           <a:prstGeom prst="roundRect">
             <a:avLst>
-              <a:gd name="adj" fmla="val 928"/>
+              <a:gd name="adj" fmla="val 10938"/>
+            </a:avLst>
+          </a:prstGeom>
+          <a:solidFill>
+            <a:srgbClr val="FFFFFF"/>
+          </a:solidFill>
+          <a:ln w="9525">
+            <a:solidFill>
+              <a:srgbClr val="CFCBC2"/>
+            </a:solidFill>
+          </a:ln>
+        </p:spPr>
+        <p:txBody>
+          <a:bodyPr wrap="square" lIns="0" tIns="0" rIns="0" bIns="0" rtlCol="0" anchor="ctr"/>
+          <a:lstStyle/>
+          <a:p>
+            <a:pPr algn="ctr" indent="0" marL="0">
+              <a:buNone/>
+            </a:pPr>
+            <a:r>
+              <a:rPr lang="en-US" sz="1050" b="1" dirty="0">
+                <a:solidFill>
+                  <a:srgbClr val="8A6116"/>
+                </a:solidFill>
+                <a:latin typeface="Courier New" pitchFamily="34" charset="0"/>
+                <a:ea typeface="Courier New" pitchFamily="34" charset="-122"/>
+                <a:cs typeface="Courier New" pitchFamily="34" charset="-120"/>
+              </a:rPr>
+              <a:t>CO-16</a:t>
+            </a:r>
+            <a:endParaRPr lang="en-US" sz="1050" dirty="0"/>
+          </a:p>
+        </p:txBody>
+      </p:sp>
+      <p:sp>
+        <p:nvSpPr>
+          <p:cNvPr id="6" name="Shape 4"/>
+          <p:cNvSpPr/>
+          <p:nvPr/>
+        </p:nvSpPr>
+        <p:spPr>
+          <a:xfrm>
+            <a:off x="640080" y="2148840"/>
+            <a:ext cx="5943600" cy="0"/>
+          </a:xfrm>
+          <a:prstGeom prst="line">
+            <a:avLst/>
+          </a:prstGeom>
+          <a:noFill/>
+          <a:ln w="9525">
+            <a:solidFill>
+              <a:srgbClr val="E3E0DA"/>
+            </a:solidFill>
+            <a:prstDash val="solid"/>
+          </a:ln>
+        </p:spPr>
+      </p:sp>
+      <p:sp>
+        <p:nvSpPr>
+          <p:cNvPr id="7" name="Text 5"/>
+          <p:cNvSpPr/>
+          <p:nvPr/>
+        </p:nvSpPr>
+        <p:spPr>
+          <a:xfrm>
+            <a:off x="640080" y="2221992"/>
+            <a:ext cx="4846320" cy="384048"/>
+          </a:xfrm>
+          <a:prstGeom prst="rect">
+            <a:avLst/>
+          </a:prstGeom>
+          <a:noFill/>
+          <a:ln/>
+        </p:spPr>
+        <p:txBody>
+          <a:bodyPr wrap="square" lIns="0" tIns="0" rIns="0" bIns="0" rtlCol="0" anchor="ctr"/>
+          <a:lstStyle/>
+          <a:p>
+            <a:pPr indent="0" marL="0">
+              <a:buNone/>
+            </a:pPr>
+            <a:r>
+              <a:rPr lang="en-US" sz="1400" dirty="0">
+                <a:solidFill>
+                  <a:srgbClr val="23272C"/>
+                </a:solidFill>
+                <a:latin typeface="Calibri" pitchFamily="34" charset="0"/>
+                <a:ea typeface="Calibri" pitchFamily="34" charset="-122"/>
+                <a:cs typeface="Calibri" pitchFamily="34" charset="-120"/>
+              </a:rPr>
+              <a:t>Diagnosis codes exist (live NLM check)</a:t>
+            </a:r>
+            <a:endParaRPr lang="en-US" sz="1400" dirty="0"/>
+          </a:p>
+        </p:txBody>
+      </p:sp>
+      <p:sp>
+        <p:nvSpPr>
+          <p:cNvPr id="8" name="Text 6"/>
+          <p:cNvSpPr/>
+          <p:nvPr/>
+        </p:nvSpPr>
+        <p:spPr>
+          <a:xfrm>
+            <a:off x="5623560" y="2267712"/>
+            <a:ext cx="740664" cy="292608"/>
+          </a:xfrm>
+          <a:prstGeom prst="roundRect">
+            <a:avLst>
+              <a:gd name="adj" fmla="val 10938"/>
+            </a:avLst>
+          </a:prstGeom>
+          <a:solidFill>
+            <a:srgbClr val="FFFFFF"/>
+          </a:solidFill>
+          <a:ln w="9525">
+            <a:solidFill>
+              <a:srgbClr val="CFCBC2"/>
+            </a:solidFill>
+          </a:ln>
+        </p:spPr>
+        <p:txBody>
+          <a:bodyPr wrap="square" lIns="0" tIns="0" rIns="0" bIns="0" rtlCol="0" anchor="ctr"/>
+          <a:lstStyle/>
+          <a:p>
+            <a:pPr algn="ctr" indent="0" marL="0">
+              <a:buNone/>
+            </a:pPr>
+            <a:r>
+              <a:rPr lang="en-US" sz="1050" b="1" dirty="0">
+                <a:solidFill>
+                  <a:srgbClr val="8A6116"/>
+                </a:solidFill>
+                <a:latin typeface="Courier New" pitchFamily="34" charset="0"/>
+                <a:ea typeface="Courier New" pitchFamily="34" charset="-122"/>
+                <a:cs typeface="Courier New" pitchFamily="34" charset="-120"/>
+              </a:rPr>
+              <a:t>CO-146</a:t>
+            </a:r>
+            <a:endParaRPr lang="en-US" sz="1050" dirty="0"/>
+          </a:p>
+        </p:txBody>
+      </p:sp>
+      <p:sp>
+        <p:nvSpPr>
+          <p:cNvPr id="9" name="Shape 7"/>
+          <p:cNvSpPr/>
+          <p:nvPr/>
+        </p:nvSpPr>
+        <p:spPr>
+          <a:xfrm>
+            <a:off x="640080" y="2724912"/>
+            <a:ext cx="5943600" cy="0"/>
+          </a:xfrm>
+          <a:prstGeom prst="line">
+            <a:avLst/>
+          </a:prstGeom>
+          <a:noFill/>
+          <a:ln w="9525">
+            <a:solidFill>
+              <a:srgbClr val="E3E0DA"/>
+            </a:solidFill>
+            <a:prstDash val="solid"/>
+          </a:ln>
+        </p:spPr>
+      </p:sp>
+      <p:sp>
+        <p:nvSpPr>
+          <p:cNvPr id="10" name="Text 8"/>
+          <p:cNvSpPr/>
+          <p:nvPr/>
+        </p:nvSpPr>
+        <p:spPr>
+          <a:xfrm>
+            <a:off x="640080" y="2798064"/>
+            <a:ext cx="4846320" cy="384048"/>
+          </a:xfrm>
+          <a:prstGeom prst="rect">
+            <a:avLst/>
+          </a:prstGeom>
+          <a:noFill/>
+          <a:ln/>
+        </p:spPr>
+        <p:txBody>
+          <a:bodyPr wrap="square" lIns="0" tIns="0" rIns="0" bIns="0" rtlCol="0" anchor="ctr"/>
+          <a:lstStyle/>
+          <a:p>
+            <a:pPr indent="0" marL="0">
+              <a:buNone/>
+            </a:pPr>
+            <a:r>
+              <a:rPr lang="en-US" sz="1400" dirty="0">
+                <a:solidFill>
+                  <a:srgbClr val="23272C"/>
+                </a:solidFill>
+                <a:latin typeface="Calibri" pitchFamily="34" charset="0"/>
+                <a:ea typeface="Calibri" pitchFamily="34" charset="-122"/>
+                <a:cs typeface="Calibri" pitchFamily="34" charset="-120"/>
+              </a:rPr>
+              <a:t>Procedure on the fee schedule</a:t>
+            </a:r>
+            <a:endParaRPr lang="en-US" sz="1400" dirty="0"/>
+          </a:p>
+        </p:txBody>
+      </p:sp>
+      <p:sp>
+        <p:nvSpPr>
+          <p:cNvPr id="11" name="Text 9"/>
+          <p:cNvSpPr/>
+          <p:nvPr/>
+        </p:nvSpPr>
+        <p:spPr>
+          <a:xfrm>
+            <a:off x="5623560" y="2843784"/>
+            <a:ext cx="740664" cy="292608"/>
+          </a:xfrm>
+          <a:prstGeom prst="roundRect">
+            <a:avLst>
+              <a:gd name="adj" fmla="val 10938"/>
+            </a:avLst>
+          </a:prstGeom>
+          <a:solidFill>
+            <a:srgbClr val="FFFFFF"/>
+          </a:solidFill>
+          <a:ln w="9525">
+            <a:solidFill>
+              <a:srgbClr val="CFCBC2"/>
+            </a:solidFill>
+          </a:ln>
+        </p:spPr>
+        <p:txBody>
+          <a:bodyPr wrap="square" lIns="0" tIns="0" rIns="0" bIns="0" rtlCol="0" anchor="ctr"/>
+          <a:lstStyle/>
+          <a:p>
+            <a:pPr algn="ctr" indent="0" marL="0">
+              <a:buNone/>
+            </a:pPr>
+            <a:r>
+              <a:rPr lang="en-US" sz="1050" b="1" dirty="0">
+                <a:solidFill>
+                  <a:srgbClr val="8A6116"/>
+                </a:solidFill>
+                <a:latin typeface="Courier New" pitchFamily="34" charset="0"/>
+                <a:ea typeface="Courier New" pitchFamily="34" charset="-122"/>
+                <a:cs typeface="Courier New" pitchFamily="34" charset="-120"/>
+              </a:rPr>
+              <a:t>CO-181</a:t>
+            </a:r>
+            <a:endParaRPr lang="en-US" sz="1050" dirty="0"/>
+          </a:p>
+        </p:txBody>
+      </p:sp>
+      <p:sp>
+        <p:nvSpPr>
+          <p:cNvPr id="12" name="Shape 10"/>
+          <p:cNvSpPr/>
+          <p:nvPr/>
+        </p:nvSpPr>
+        <p:spPr>
+          <a:xfrm>
+            <a:off x="640080" y="3300984"/>
+            <a:ext cx="5943600" cy="0"/>
+          </a:xfrm>
+          <a:prstGeom prst="line">
+            <a:avLst/>
+          </a:prstGeom>
+          <a:noFill/>
+          <a:ln w="9525">
+            <a:solidFill>
+              <a:srgbClr val="E3E0DA"/>
+            </a:solidFill>
+            <a:prstDash val="solid"/>
+          </a:ln>
+        </p:spPr>
+      </p:sp>
+      <p:sp>
+        <p:nvSpPr>
+          <p:cNvPr id="13" name="Text 11"/>
+          <p:cNvSpPr/>
+          <p:nvPr/>
+        </p:nvSpPr>
+        <p:spPr>
+          <a:xfrm>
+            <a:off x="640080" y="3374136"/>
+            <a:ext cx="4846320" cy="384048"/>
+          </a:xfrm>
+          <a:prstGeom prst="rect">
+            <a:avLst/>
+          </a:prstGeom>
+          <a:noFill/>
+          <a:ln/>
+        </p:spPr>
+        <p:txBody>
+          <a:bodyPr wrap="square" lIns="0" tIns="0" rIns="0" bIns="0" rtlCol="0" anchor="ctr"/>
+          <a:lstStyle/>
+          <a:p>
+            <a:pPr indent="0" marL="0">
+              <a:buNone/>
+            </a:pPr>
+            <a:r>
+              <a:rPr lang="en-US" sz="1400" dirty="0">
+                <a:solidFill>
+                  <a:srgbClr val="23272C"/>
+                </a:solidFill>
+                <a:latin typeface="Calibri" pitchFamily="34" charset="0"/>
+                <a:ea typeface="Calibri" pitchFamily="34" charset="-122"/>
+                <a:cs typeface="Calibri" pitchFamily="34" charset="-120"/>
+              </a:rPr>
+              <a:t>Diagnosis supports the procedure</a:t>
+            </a:r>
+            <a:endParaRPr lang="en-US" sz="1400" dirty="0"/>
+          </a:p>
+        </p:txBody>
+      </p:sp>
+      <p:sp>
+        <p:nvSpPr>
+          <p:cNvPr id="14" name="Text 12"/>
+          <p:cNvSpPr/>
+          <p:nvPr/>
+        </p:nvSpPr>
+        <p:spPr>
+          <a:xfrm>
+            <a:off x="5623560" y="3419856"/>
+            <a:ext cx="662940" cy="292608"/>
+          </a:xfrm>
+          <a:prstGeom prst="roundRect">
+            <a:avLst>
+              <a:gd name="adj" fmla="val 10938"/>
+            </a:avLst>
+          </a:prstGeom>
+          <a:solidFill>
+            <a:srgbClr val="FFFFFF"/>
+          </a:solidFill>
+          <a:ln w="9525">
+            <a:solidFill>
+              <a:srgbClr val="CFCBC2"/>
+            </a:solidFill>
+          </a:ln>
+        </p:spPr>
+        <p:txBody>
+          <a:bodyPr wrap="square" lIns="0" tIns="0" rIns="0" bIns="0" rtlCol="0" anchor="ctr"/>
+          <a:lstStyle/>
+          <a:p>
+            <a:pPr algn="ctr" indent="0" marL="0">
+              <a:buNone/>
+            </a:pPr>
+            <a:r>
+              <a:rPr lang="en-US" sz="1050" b="1" dirty="0">
+                <a:solidFill>
+                  <a:srgbClr val="A8402F"/>
+                </a:solidFill>
+                <a:latin typeface="Courier New" pitchFamily="34" charset="0"/>
+                <a:ea typeface="Courier New" pitchFamily="34" charset="-122"/>
+                <a:cs typeface="Courier New" pitchFamily="34" charset="-120"/>
+              </a:rPr>
+              <a:t>CO-50</a:t>
+            </a:r>
+            <a:endParaRPr lang="en-US" sz="1050" dirty="0"/>
+          </a:p>
+        </p:txBody>
+      </p:sp>
+      <p:sp>
+        <p:nvSpPr>
+          <p:cNvPr id="15" name="Shape 13"/>
+          <p:cNvSpPr/>
+          <p:nvPr/>
+        </p:nvSpPr>
+        <p:spPr>
+          <a:xfrm>
+            <a:off x="640080" y="3877056"/>
+            <a:ext cx="5943600" cy="0"/>
+          </a:xfrm>
+          <a:prstGeom prst="line">
+            <a:avLst/>
+          </a:prstGeom>
+          <a:noFill/>
+          <a:ln w="9525">
+            <a:solidFill>
+              <a:srgbClr val="E3E0DA"/>
+            </a:solidFill>
+            <a:prstDash val="solid"/>
+          </a:ln>
+        </p:spPr>
+      </p:sp>
+      <p:sp>
+        <p:nvSpPr>
+          <p:cNvPr id="16" name="Text 14"/>
+          <p:cNvSpPr/>
+          <p:nvPr/>
+        </p:nvSpPr>
+        <p:spPr>
+          <a:xfrm>
+            <a:off x="640080" y="3950208"/>
+            <a:ext cx="4846320" cy="384048"/>
+          </a:xfrm>
+          <a:prstGeom prst="rect">
+            <a:avLst/>
+          </a:prstGeom>
+          <a:noFill/>
+          <a:ln/>
+        </p:spPr>
+        <p:txBody>
+          <a:bodyPr wrap="square" lIns="0" tIns="0" rIns="0" bIns="0" rtlCol="0" anchor="ctr"/>
+          <a:lstStyle/>
+          <a:p>
+            <a:pPr indent="0" marL="0">
+              <a:buNone/>
+            </a:pPr>
+            <a:r>
+              <a:rPr lang="en-US" sz="1400" dirty="0">
+                <a:solidFill>
+                  <a:srgbClr val="23272C"/>
+                </a:solidFill>
+                <a:latin typeface="Calibri" pitchFamily="34" charset="0"/>
+                <a:ea typeface="Calibri" pitchFamily="34" charset="-122"/>
+                <a:cs typeface="Calibri" pitchFamily="34" charset="-120"/>
+              </a:rPr>
+              <a:t>Prior authorization on file</a:t>
+            </a:r>
+            <a:endParaRPr lang="en-US" sz="1400" dirty="0"/>
+          </a:p>
+        </p:txBody>
+      </p:sp>
+      <p:sp>
+        <p:nvSpPr>
+          <p:cNvPr id="17" name="Text 15"/>
+          <p:cNvSpPr/>
+          <p:nvPr/>
+        </p:nvSpPr>
+        <p:spPr>
+          <a:xfrm>
+            <a:off x="5623560" y="3995928"/>
+            <a:ext cx="740664" cy="292608"/>
+          </a:xfrm>
+          <a:prstGeom prst="roundRect">
+            <a:avLst>
+              <a:gd name="adj" fmla="val 10938"/>
+            </a:avLst>
+          </a:prstGeom>
+          <a:solidFill>
+            <a:srgbClr val="FFFFFF"/>
+          </a:solidFill>
+          <a:ln w="9525">
+            <a:solidFill>
+              <a:srgbClr val="CFCBC2"/>
+            </a:solidFill>
+          </a:ln>
+        </p:spPr>
+        <p:txBody>
+          <a:bodyPr wrap="square" lIns="0" tIns="0" rIns="0" bIns="0" rtlCol="0" anchor="ctr"/>
+          <a:lstStyle/>
+          <a:p>
+            <a:pPr algn="ctr" indent="0" marL="0">
+              <a:buNone/>
+            </a:pPr>
+            <a:r>
+              <a:rPr lang="en-US" sz="1050" b="1" dirty="0">
+                <a:solidFill>
+                  <a:srgbClr val="A8402F"/>
+                </a:solidFill>
+                <a:latin typeface="Courier New" pitchFamily="34" charset="0"/>
+                <a:ea typeface="Courier New" pitchFamily="34" charset="-122"/>
+                <a:cs typeface="Courier New" pitchFamily="34" charset="-120"/>
+              </a:rPr>
+              <a:t>CO-197</a:t>
+            </a:r>
+            <a:endParaRPr lang="en-US" sz="1050" dirty="0"/>
+          </a:p>
+        </p:txBody>
+      </p:sp>
+      <p:sp>
+        <p:nvSpPr>
+          <p:cNvPr id="18" name="Shape 16"/>
+          <p:cNvSpPr/>
+          <p:nvPr/>
+        </p:nvSpPr>
+        <p:spPr>
+          <a:xfrm>
+            <a:off x="640080" y="4453128"/>
+            <a:ext cx="5943600" cy="0"/>
+          </a:xfrm>
+          <a:prstGeom prst="line">
+            <a:avLst/>
+          </a:prstGeom>
+          <a:noFill/>
+          <a:ln w="9525">
+            <a:solidFill>
+              <a:srgbClr val="E3E0DA"/>
+            </a:solidFill>
+            <a:prstDash val="solid"/>
+          </a:ln>
+        </p:spPr>
+      </p:sp>
+      <p:sp>
+        <p:nvSpPr>
+          <p:cNvPr id="19" name="Text 17"/>
+          <p:cNvSpPr/>
+          <p:nvPr/>
+        </p:nvSpPr>
+        <p:spPr>
+          <a:xfrm>
+            <a:off x="640080" y="4526280"/>
+            <a:ext cx="4846320" cy="384048"/>
+          </a:xfrm>
+          <a:prstGeom prst="rect">
+            <a:avLst/>
+          </a:prstGeom>
+          <a:noFill/>
+          <a:ln/>
+        </p:spPr>
+        <p:txBody>
+          <a:bodyPr wrap="square" lIns="0" tIns="0" rIns="0" bIns="0" rtlCol="0" anchor="ctr"/>
+          <a:lstStyle/>
+          <a:p>
+            <a:pPr indent="0" marL="0">
+              <a:buNone/>
+            </a:pPr>
+            <a:r>
+              <a:rPr lang="en-US" sz="1400" dirty="0">
+                <a:solidFill>
+                  <a:srgbClr val="23272C"/>
+                </a:solidFill>
+                <a:latin typeface="Calibri" pitchFamily="34" charset="0"/>
+                <a:ea typeface="Calibri" pitchFamily="34" charset="-122"/>
+                <a:cs typeface="Calibri" pitchFamily="34" charset="-120"/>
+              </a:rPr>
+              <a:t>Documentation supports visit level</a:t>
+            </a:r>
+            <a:endParaRPr lang="en-US" sz="1400" dirty="0"/>
+          </a:p>
+        </p:txBody>
+      </p:sp>
+      <p:sp>
+        <p:nvSpPr>
+          <p:cNvPr id="20" name="Text 18"/>
+          <p:cNvSpPr/>
+          <p:nvPr/>
+        </p:nvSpPr>
+        <p:spPr>
+          <a:xfrm>
+            <a:off x="5623560" y="4572000"/>
+            <a:ext cx="740664" cy="292608"/>
+          </a:xfrm>
+          <a:prstGeom prst="roundRect">
+            <a:avLst>
+              <a:gd name="adj" fmla="val 10938"/>
+            </a:avLst>
+          </a:prstGeom>
+          <a:solidFill>
+            <a:srgbClr val="FFFFFF"/>
+          </a:solidFill>
+          <a:ln w="9525">
+            <a:solidFill>
+              <a:srgbClr val="CFCBC2"/>
+            </a:solidFill>
+          </a:ln>
+        </p:spPr>
+        <p:txBody>
+          <a:bodyPr wrap="square" lIns="0" tIns="0" rIns="0" bIns="0" rtlCol="0" anchor="ctr"/>
+          <a:lstStyle/>
+          <a:p>
+            <a:pPr algn="ctr" indent="0" marL="0">
+              <a:buNone/>
+            </a:pPr>
+            <a:r>
+              <a:rPr lang="en-US" sz="1050" b="1" dirty="0">
+                <a:solidFill>
+                  <a:srgbClr val="A8402F"/>
+                </a:solidFill>
+                <a:latin typeface="Courier New" pitchFamily="34" charset="0"/>
+                <a:ea typeface="Courier New" pitchFamily="34" charset="-122"/>
+                <a:cs typeface="Courier New" pitchFamily="34" charset="-120"/>
+              </a:rPr>
+              <a:t>CO-150</a:t>
+            </a:r>
+            <a:endParaRPr lang="en-US" sz="1050" dirty="0"/>
+          </a:p>
+        </p:txBody>
+      </p:sp>
+      <p:sp>
+        <p:nvSpPr>
+          <p:cNvPr id="21" name="Shape 19"/>
+          <p:cNvSpPr/>
+          <p:nvPr/>
+        </p:nvSpPr>
+        <p:spPr>
+          <a:xfrm>
+            <a:off x="640080" y="5029200"/>
+            <a:ext cx="5943600" cy="0"/>
+          </a:xfrm>
+          <a:prstGeom prst="line">
+            <a:avLst/>
+          </a:prstGeom>
+          <a:noFill/>
+          <a:ln w="9525">
+            <a:solidFill>
+              <a:srgbClr val="E3E0DA"/>
+            </a:solidFill>
+            <a:prstDash val="solid"/>
+          </a:ln>
+        </p:spPr>
+      </p:sp>
+      <p:sp>
+        <p:nvSpPr>
+          <p:cNvPr id="22" name="Text 20"/>
+          <p:cNvSpPr/>
+          <p:nvPr/>
+        </p:nvSpPr>
+        <p:spPr>
+          <a:xfrm>
+            <a:off x="640080" y="5102352"/>
+            <a:ext cx="4846320" cy="384048"/>
+          </a:xfrm>
+          <a:prstGeom prst="rect">
+            <a:avLst/>
+          </a:prstGeom>
+          <a:noFill/>
+          <a:ln/>
+        </p:spPr>
+        <p:txBody>
+          <a:bodyPr wrap="square" lIns="0" tIns="0" rIns="0" bIns="0" rtlCol="0" anchor="ctr"/>
+          <a:lstStyle/>
+          <a:p>
+            <a:pPr indent="0" marL="0">
+              <a:buNone/>
+            </a:pPr>
+            <a:r>
+              <a:rPr lang="en-US" sz="1400" dirty="0">
+                <a:solidFill>
+                  <a:srgbClr val="23272C"/>
+                </a:solidFill>
+                <a:latin typeface="Calibri" pitchFamily="34" charset="0"/>
+                <a:ea typeface="Calibri" pitchFamily="34" charset="-122"/>
+                <a:cs typeface="Calibri" pitchFamily="34" charset="-120"/>
+              </a:rPr>
+              <a:t>No unchanged resubmissions</a:t>
+            </a:r>
+            <a:endParaRPr lang="en-US" sz="1400" dirty="0"/>
+          </a:p>
+        </p:txBody>
+      </p:sp>
+      <p:sp>
+        <p:nvSpPr>
+          <p:cNvPr id="23" name="Text 21"/>
+          <p:cNvSpPr/>
+          <p:nvPr/>
+        </p:nvSpPr>
+        <p:spPr>
+          <a:xfrm>
+            <a:off x="5623560" y="5148072"/>
+            <a:ext cx="662940" cy="292608"/>
+          </a:xfrm>
+          <a:prstGeom prst="roundRect">
+            <a:avLst>
+              <a:gd name="adj" fmla="val 10938"/>
+            </a:avLst>
+          </a:prstGeom>
+          <a:solidFill>
+            <a:srgbClr val="FFFFFF"/>
+          </a:solidFill>
+          <a:ln w="9525">
+            <a:solidFill>
+              <a:srgbClr val="CFCBC2"/>
+            </a:solidFill>
+          </a:ln>
+        </p:spPr>
+        <p:txBody>
+          <a:bodyPr wrap="square" lIns="0" tIns="0" rIns="0" bIns="0" rtlCol="0" anchor="ctr"/>
+          <a:lstStyle/>
+          <a:p>
+            <a:pPr algn="ctr" indent="0" marL="0">
+              <a:buNone/>
+            </a:pPr>
+            <a:r>
+              <a:rPr lang="en-US" sz="1050" b="1" dirty="0">
+                <a:solidFill>
+                  <a:srgbClr val="6A727C"/>
+                </a:solidFill>
+                <a:latin typeface="Courier New" pitchFamily="34" charset="0"/>
+                <a:ea typeface="Courier New" pitchFamily="34" charset="-122"/>
+                <a:cs typeface="Courier New" pitchFamily="34" charset="-120"/>
+              </a:rPr>
+              <a:t>CO-18</a:t>
+            </a:r>
+            <a:endParaRPr lang="en-US" sz="1050" dirty="0"/>
+          </a:p>
+        </p:txBody>
+      </p:sp>
+      <p:sp>
+        <p:nvSpPr>
+          <p:cNvPr id="24" name="Shape 22"/>
+          <p:cNvSpPr/>
+          <p:nvPr/>
+        </p:nvSpPr>
+        <p:spPr>
+          <a:xfrm>
+            <a:off x="7178040" y="1645920"/>
+            <a:ext cx="4434840" cy="3931920"/>
+          </a:xfrm>
+          <a:prstGeom prst="roundRect">
+            <a:avLst>
+              <a:gd name="adj" fmla="val 1047"/>
             </a:avLst>
           </a:prstGeom>
           <a:solidFill>
@@ -8224,119 +9952,73 @@
       </p:sp>
       <p:sp>
         <p:nvSpPr>
-          <p:cNvPr id="5" name="Shape 3"/>
-          <p:cNvSpPr/>
-          <p:nvPr/>
-        </p:nvSpPr>
-        <p:spPr>
-          <a:xfrm>
-            <a:off x="914400" y="1947672"/>
-            <a:ext cx="146304" cy="146304"/>
-          </a:xfrm>
-          <a:prstGeom prst="ellipse">
-            <a:avLst/>
-          </a:prstGeom>
-          <a:solidFill>
-            <a:srgbClr val="FFFFFF"/>
-          </a:solidFill>
-          <a:ln w="22225">
-            <a:solidFill>
-              <a:srgbClr val="2E7D4F"/>
-            </a:solidFill>
-            <a:prstDash val="solid"/>
-          </a:ln>
-        </p:spPr>
-      </p:sp>
-      <p:sp>
-        <p:nvSpPr>
-          <p:cNvPr id="6" name="Text 4"/>
-          <p:cNvSpPr/>
-          <p:nvPr/>
-        </p:nvSpPr>
-        <p:spPr>
-          <a:xfrm>
-            <a:off x="1188720" y="1837944"/>
-            <a:ext cx="1691640" cy="365760"/>
-          </a:xfrm>
-          <a:prstGeom prst="rect">
-            <a:avLst/>
-          </a:prstGeom>
-          <a:noFill/>
-          <a:ln/>
-        </p:spPr>
-        <p:txBody>
-          <a:bodyPr wrap="square" lIns="0" tIns="0" rIns="0" bIns="0" rtlCol="0" anchor="ctr"/>
-          <a:lstStyle/>
-          <a:p>
-            <a:pPr indent="0" marL="0">
-              <a:buNone/>
-            </a:pPr>
-            <a:r>
-              <a:rPr lang="en-US" sz="1250" dirty="0">
-                <a:solidFill>
-                  <a:srgbClr val="23272C"/>
+          <p:cNvPr id="25" name="Text 23"/>
+          <p:cNvSpPr/>
+          <p:nvPr/>
+        </p:nvSpPr>
+        <p:spPr>
+          <a:xfrm>
+            <a:off x="7543800" y="1965960"/>
+            <a:ext cx="3657600" cy="237744"/>
+          </a:xfrm>
+          <a:prstGeom prst="rect">
+            <a:avLst/>
+          </a:prstGeom>
+          <a:noFill/>
+          <a:ln/>
+        </p:spPr>
+        <p:txBody>
+          <a:bodyPr wrap="square" lIns="0" tIns="0" rIns="0" bIns="0" rtlCol="0" anchor="ctr"/>
+          <a:lstStyle/>
+          <a:p>
+            <a:pPr indent="0" marL="0">
+              <a:buNone/>
+            </a:pPr>
+            <a:r>
+              <a:rPr lang="en-US" sz="950" b="1" spc="200" kern="0" dirty="0">
+                <a:solidFill>
+                  <a:srgbClr val="35639C"/>
                 </a:solidFill>
                 <a:latin typeface="Calibri" pitchFamily="34" charset="0"/>
                 <a:ea typeface="Calibri" pitchFamily="34" charset="-122"/>
                 <a:cs typeface="Calibri" pitchFamily="34" charset="-120"/>
               </a:rPr>
-              <a:t>Scribe</a:t>
-            </a:r>
-            <a:endParaRPr lang="en-US" sz="1250" dirty="0"/>
-          </a:p>
-        </p:txBody>
-      </p:sp>
-      <p:sp>
-        <p:nvSpPr>
-          <p:cNvPr id="7" name="Shape 5"/>
-          <p:cNvSpPr/>
-          <p:nvPr/>
-        </p:nvSpPr>
-        <p:spPr>
-          <a:xfrm>
-            <a:off x="914400" y="2660904"/>
-            <a:ext cx="146304" cy="146304"/>
-          </a:xfrm>
-          <a:prstGeom prst="ellipse">
-            <a:avLst/>
-          </a:prstGeom>
-          <a:solidFill>
-            <a:srgbClr val="FFFFFF"/>
-          </a:solidFill>
-          <a:ln w="22225">
-            <a:solidFill>
-              <a:srgbClr val="2E7D4F"/>
-            </a:solidFill>
-            <a:prstDash val="solid"/>
-          </a:ln>
-        </p:spPr>
-      </p:sp>
-      <p:sp>
-        <p:nvSpPr>
-          <p:cNvPr id="8" name="Text 6"/>
-          <p:cNvSpPr/>
-          <p:nvPr/>
-        </p:nvSpPr>
-        <p:spPr>
-          <a:xfrm>
-            <a:off x="1188720" y="2551176"/>
-            <a:ext cx="1691640" cy="365760"/>
-          </a:xfrm>
-          <a:prstGeom prst="rect">
-            <a:avLst/>
-          </a:prstGeom>
-          <a:noFill/>
-          <a:ln/>
-        </p:spPr>
-        <p:txBody>
-          <a:bodyPr wrap="square" lIns="0" tIns="0" rIns="0" bIns="0" rtlCol="0" anchor="ctr"/>
-          <a:lstStyle/>
-          <a:p>
-            <a:pPr indent="0" marL="0">
-              <a:buNone/>
-            </a:pPr>
-            <a:r>
-              <a:rPr lang="en-US" sz="1250" dirty="0">
+              <a:t>WHY DETERMINISTIC</a:t>
+            </a:r>
+            <a:endParaRPr lang="en-US" sz="950" dirty="0"/>
+          </a:p>
+        </p:txBody>
+      </p:sp>
+      <p:sp>
+        <p:nvSpPr>
+          <p:cNvPr id="26" name="Text 24"/>
+          <p:cNvSpPr/>
+          <p:nvPr/>
+        </p:nvSpPr>
+        <p:spPr>
+          <a:xfrm>
+            <a:off x="7543800" y="2331720"/>
+            <a:ext cx="3749040" cy="3017520"/>
+          </a:xfrm>
+          <a:prstGeom prst="rect">
+            <a:avLst/>
+          </a:prstGeom>
+          <a:noFill/>
+          <a:ln/>
+        </p:spPr>
+        <p:txBody>
+          <a:bodyPr wrap="square" rtlCol="0" anchor="ctr"/>
+          <a:lstStyle/>
+          <a:p>
+            <a:pPr marL="342900" indent="-342900">
+              <a:spcAft>
+                <a:spcPts val="1000"/>
+              </a:spcAft>
+              <a:buSzPct val="100000"/>
+              <a:buChar char="•"/>
+            </a:pPr>
+            <a:r>
+              <a:rPr lang="en-US" sz="1350" dirty="0">
                 <a:solidFill>
                   <a:srgbClr val="23272C"/>
                 </a:solidFill>
@@ -8344,63 +10026,20 @@
                 <a:ea typeface="Calibri" pitchFamily="34" charset="-122"/>
                 <a:cs typeface="Calibri" pitchFamily="34" charset="-120"/>
               </a:rPr>
-              <a:t>Coder</a:t>
-            </a:r>
-            <a:endParaRPr lang="en-US" sz="1250" dirty="0"/>
-          </a:p>
-        </p:txBody>
-      </p:sp>
-      <p:sp>
-        <p:nvSpPr>
-          <p:cNvPr id="9" name="Shape 7"/>
-          <p:cNvSpPr/>
-          <p:nvPr/>
-        </p:nvSpPr>
-        <p:spPr>
-          <a:xfrm>
-            <a:off x="914400" y="3374136"/>
-            <a:ext cx="146304" cy="146304"/>
-          </a:xfrm>
-          <a:prstGeom prst="ellipse">
-            <a:avLst/>
-          </a:prstGeom>
-          <a:solidFill>
-            <a:srgbClr val="FFFFFF"/>
-          </a:solidFill>
-          <a:ln w="22225">
-            <a:solidFill>
-              <a:srgbClr val="2E7D4F"/>
-            </a:solidFill>
-            <a:prstDash val="solid"/>
-          </a:ln>
-        </p:spPr>
-      </p:sp>
-      <p:sp>
-        <p:nvSpPr>
-          <p:cNvPr id="10" name="Text 8"/>
-          <p:cNvSpPr/>
-          <p:nvPr/>
-        </p:nvSpPr>
-        <p:spPr>
-          <a:xfrm>
-            <a:off x="1188720" y="3264408"/>
-            <a:ext cx="1691640" cy="365760"/>
-          </a:xfrm>
-          <a:prstGeom prst="rect">
-            <a:avLst/>
-          </a:prstGeom>
-          <a:noFill/>
-          <a:ln/>
-        </p:spPr>
-        <p:txBody>
-          <a:bodyPr wrap="square" lIns="0" tIns="0" rIns="0" bIns="0" rtlCol="0" anchor="ctr"/>
-          <a:lstStyle/>
-          <a:p>
-            <a:pPr indent="0" marL="0">
-              <a:buNone/>
-            </a:pPr>
-            <a:r>
-              <a:rPr lang="en-US" sz="1250" dirty="0">
+              <a:t>Recovery rates become attributable: any change in verdict is caused by the agent's revision.</a:t>
+            </a:r>
+            <a:endParaRPr lang="en-US" sz="1350" dirty="0"/>
+          </a:p>
+          <a:p>
+            <a:pPr marL="342900" indent="-342900">
+              <a:spcAft>
+                <a:spcPts val="1000"/>
+              </a:spcAft>
+              <a:buSzPct val="100000"/>
+              <a:buChar char="•"/>
+            </a:pPr>
+            <a:r>
+              <a:rPr lang="en-US" sz="1350" dirty="0">
                 <a:solidFill>
                   <a:srgbClr val="23272C"/>
                 </a:solidFill>
@@ -8408,63 +10047,17 @@
                 <a:ea typeface="Calibri" pitchFamily="34" charset="-122"/>
                 <a:cs typeface="Calibri" pitchFamily="34" charset="-120"/>
               </a:rPr>
-              <a:t>Claim builder</a:t>
-            </a:r>
-            <a:endParaRPr lang="en-US" sz="1250" dirty="0"/>
-          </a:p>
-        </p:txBody>
-      </p:sp>
-      <p:sp>
-        <p:nvSpPr>
-          <p:cNvPr id="11" name="Shape 9"/>
-          <p:cNvSpPr/>
-          <p:nvPr/>
-        </p:nvSpPr>
-        <p:spPr>
-          <a:xfrm>
-            <a:off x="914400" y="4087368"/>
-            <a:ext cx="146304" cy="146304"/>
-          </a:xfrm>
-          <a:prstGeom prst="ellipse">
-            <a:avLst/>
-          </a:prstGeom>
-          <a:solidFill>
-            <a:srgbClr val="FFFFFF"/>
-          </a:solidFill>
-          <a:ln w="22225">
-            <a:solidFill>
-              <a:srgbClr val="A8402F"/>
-            </a:solidFill>
-            <a:prstDash val="solid"/>
-          </a:ln>
-        </p:spPr>
-      </p:sp>
-      <p:sp>
-        <p:nvSpPr>
-          <p:cNvPr id="12" name="Text 10"/>
-          <p:cNvSpPr/>
-          <p:nvPr/>
-        </p:nvSpPr>
-        <p:spPr>
-          <a:xfrm>
-            <a:off x="1188720" y="3977640"/>
-            <a:ext cx="1691640" cy="365760"/>
-          </a:xfrm>
-          <a:prstGeom prst="rect">
-            <a:avLst/>
-          </a:prstGeom>
-          <a:noFill/>
-          <a:ln/>
-        </p:spPr>
-        <p:txBody>
-          <a:bodyPr wrap="square" lIns="0" tIns="0" rIns="0" bIns="0" rtlCol="0" anchor="ctr"/>
-          <a:lstStyle/>
-          <a:p>
-            <a:pPr indent="0" marL="0">
-              <a:buNone/>
-            </a:pPr>
-            <a:r>
-              <a:rPr lang="en-US" sz="1250" dirty="0">
+              <a:t>Appeals get a real review: the payer re-reads the full documented diagnosis list, like a human reviewer.</a:t>
+            </a:r>
+            <a:endParaRPr lang="en-US" sz="1350" dirty="0"/>
+          </a:p>
+          <a:p>
+            <a:pPr marL="342900" indent="-342900">
+              <a:buSzPct val="100000"/>
+              <a:buChar char="•"/>
+            </a:pPr>
+            <a:r>
+              <a:rPr lang="en-US" sz="1350" dirty="0">
                 <a:solidFill>
                   <a:srgbClr val="23272C"/>
                 </a:solidFill>
@@ -8472,889 +10065,9 @@
                 <a:ea typeface="Calibri" pitchFamily="34" charset="-122"/>
                 <a:cs typeface="Calibri" pitchFamily="34" charset="-120"/>
               </a:rPr>
-              <a:t>Payer</a:t>
-            </a:r>
-            <a:endParaRPr lang="en-US" sz="1250" dirty="0"/>
-          </a:p>
-        </p:txBody>
-      </p:sp>
-      <p:sp>
-        <p:nvSpPr>
-          <p:cNvPr id="13" name="Shape 11"/>
-          <p:cNvSpPr/>
-          <p:nvPr/>
-        </p:nvSpPr>
-        <p:spPr>
-          <a:xfrm>
-            <a:off x="914400" y="4800600"/>
-            <a:ext cx="146304" cy="146304"/>
-          </a:xfrm>
-          <a:prstGeom prst="ellipse">
-            <a:avLst/>
-          </a:prstGeom>
-          <a:solidFill>
-            <a:srgbClr val="FFFFFF"/>
-          </a:solidFill>
-          <a:ln w="22225">
-            <a:solidFill>
-              <a:srgbClr val="35639C"/>
-            </a:solidFill>
-            <a:prstDash val="solid"/>
-          </a:ln>
-        </p:spPr>
-      </p:sp>
-      <p:sp>
-        <p:nvSpPr>
-          <p:cNvPr id="14" name="Text 12"/>
-          <p:cNvSpPr/>
-          <p:nvPr/>
-        </p:nvSpPr>
-        <p:spPr>
-          <a:xfrm>
-            <a:off x="1188720" y="4690872"/>
-            <a:ext cx="1691640" cy="365760"/>
-          </a:xfrm>
-          <a:prstGeom prst="rect">
-            <a:avLst/>
-          </a:prstGeom>
-          <a:noFill/>
-          <a:ln/>
-        </p:spPr>
-        <p:txBody>
-          <a:bodyPr wrap="square" lIns="0" tIns="0" rIns="0" bIns="0" rtlCol="0" anchor="ctr"/>
-          <a:lstStyle/>
-          <a:p>
-            <a:pPr indent="0" marL="0">
-              <a:buNone/>
-            </a:pPr>
-            <a:r>
-              <a:rPr lang="en-US" sz="1250" dirty="0">
-                <a:solidFill>
-                  <a:srgbClr val="23272C"/>
-                </a:solidFill>
-                <a:latin typeface="Calibri" pitchFamily="34" charset="0"/>
-                <a:ea typeface="Calibri" pitchFamily="34" charset="-122"/>
-                <a:cs typeface="Calibri" pitchFamily="34" charset="-120"/>
-              </a:rPr>
-              <a:t>Denial resolver</a:t>
-            </a:r>
-            <a:endParaRPr lang="en-US" sz="1250" dirty="0"/>
-          </a:p>
-        </p:txBody>
-      </p:sp>
-      <p:sp>
-        <p:nvSpPr>
-          <p:cNvPr id="15" name="Shape 13"/>
-          <p:cNvSpPr/>
-          <p:nvPr/>
-        </p:nvSpPr>
-        <p:spPr>
-          <a:xfrm>
-            <a:off x="3017520" y="1828800"/>
-            <a:ext cx="0" cy="3840480"/>
-          </a:xfrm>
-          <a:prstGeom prst="line">
-            <a:avLst/>
-          </a:prstGeom>
-          <a:noFill/>
-          <a:ln w="9525">
-            <a:solidFill>
-              <a:srgbClr val="E3E0DA"/>
-            </a:solidFill>
-            <a:prstDash val="solid"/>
-          </a:ln>
-        </p:spPr>
-      </p:sp>
-      <p:sp>
-        <p:nvSpPr>
-          <p:cNvPr id="16" name="Shape 14"/>
-          <p:cNvSpPr/>
-          <p:nvPr/>
-        </p:nvSpPr>
-        <p:spPr>
-          <a:xfrm>
-            <a:off x="3246120" y="1828800"/>
-            <a:ext cx="3749040" cy="2834640"/>
-          </a:xfrm>
-          <a:prstGeom prst="roundRect">
-            <a:avLst>
-              <a:gd name="adj" fmla="val 1290"/>
-            </a:avLst>
-          </a:prstGeom>
-          <a:solidFill>
-            <a:srgbClr val="F4F2ED"/>
-          </a:solidFill>
-          <a:ln w="9525">
-            <a:solidFill>
-              <a:srgbClr val="E3E0DA"/>
-            </a:solidFill>
-            <a:prstDash val="solid"/>
-          </a:ln>
-        </p:spPr>
-      </p:sp>
-      <p:sp>
-        <p:nvSpPr>
-          <p:cNvPr id="17" name="Text 15"/>
-          <p:cNvSpPr/>
-          <p:nvPr/>
-        </p:nvSpPr>
-        <p:spPr>
-          <a:xfrm>
-            <a:off x="3429000" y="1965960"/>
-            <a:ext cx="3474720" cy="274320"/>
-          </a:xfrm>
-          <a:prstGeom prst="rect">
-            <a:avLst/>
-          </a:prstGeom>
-          <a:noFill/>
-          <a:ln/>
-        </p:spPr>
-        <p:txBody>
-          <a:bodyPr wrap="square" lIns="0" tIns="0" rIns="0" bIns="0" rtlCol="0" anchor="ctr"/>
-          <a:lstStyle/>
-          <a:p>
-            <a:pPr indent="0" marL="0">
-              <a:buNone/>
-            </a:pPr>
-            <a:r>
-              <a:rPr lang="en-US" sz="950" dirty="0">
-                <a:solidFill>
-                  <a:srgbClr val="6A727C"/>
-                </a:solidFill>
-                <a:latin typeface="Courier New" pitchFamily="34" charset="0"/>
-                <a:ea typeface="Courier New" pitchFamily="34" charset="-122"/>
-                <a:cs typeface="Courier New" pitchFamily="34" charset="-120"/>
-              </a:rPr>
-              <a:t>Coder agent is assigning ICD-10-CM + CPT</a:t>
-            </a:r>
-            <a:endParaRPr lang="en-US" sz="950" dirty="0"/>
-          </a:p>
-        </p:txBody>
-      </p:sp>
-      <p:sp>
-        <p:nvSpPr>
-          <p:cNvPr id="18" name="Text 16"/>
-          <p:cNvSpPr/>
-          <p:nvPr/>
-        </p:nvSpPr>
-        <p:spPr>
-          <a:xfrm>
-            <a:off x="3429000" y="2249424"/>
-            <a:ext cx="3474720" cy="274320"/>
-          </a:xfrm>
-          <a:prstGeom prst="rect">
-            <a:avLst/>
-          </a:prstGeom>
-          <a:noFill/>
-          <a:ln/>
-        </p:spPr>
-        <p:txBody>
-          <a:bodyPr wrap="square" lIns="0" tIns="0" rIns="0" bIns="0" rtlCol="0" anchor="ctr"/>
-          <a:lstStyle/>
-          <a:p>
-            <a:pPr indent="0" marL="0">
-              <a:buNone/>
-            </a:pPr>
-            <a:r>
-              <a:rPr lang="en-US" sz="950" dirty="0">
-                <a:solidFill>
-                  <a:srgbClr val="8A6116"/>
-                </a:solidFill>
-                <a:latin typeface="Courier New" pitchFamily="34" charset="0"/>
-                <a:ea typeface="Courier New" pitchFamily="34" charset="-122"/>
-                <a:cs typeface="Courier New" pitchFamily="34" charset="-120"/>
-              </a:rPr>
-              <a:t>tool&gt; search_icd10({"query":</a:t>
-            </a:r>
-            <a:endParaRPr lang="en-US" sz="950" dirty="0"/>
-          </a:p>
-        </p:txBody>
-      </p:sp>
-      <p:sp>
-        <p:nvSpPr>
-          <p:cNvPr id="19" name="Text 17"/>
-          <p:cNvSpPr/>
-          <p:nvPr/>
-        </p:nvSpPr>
-        <p:spPr>
-          <a:xfrm>
-            <a:off x="3429000" y="2532888"/>
-            <a:ext cx="3474720" cy="274320"/>
-          </a:xfrm>
-          <a:prstGeom prst="rect">
-            <a:avLst/>
-          </a:prstGeom>
-          <a:noFill/>
-          <a:ln/>
-        </p:spPr>
-        <p:txBody>
-          <a:bodyPr wrap="square" lIns="0" tIns="0" rIns="0" bIns="0" rtlCol="0" anchor="ctr"/>
-          <a:lstStyle/>
-          <a:p>
-            <a:pPr indent="0" marL="0">
-              <a:buNone/>
-            </a:pPr>
-            <a:r>
-              <a:rPr lang="en-US" sz="950" dirty="0">
-                <a:solidFill>
-                  <a:srgbClr val="8A6116"/>
-                </a:solidFill>
-                <a:latin typeface="Courier New" pitchFamily="34" charset="0"/>
-                <a:ea typeface="Courier New" pitchFamily="34" charset="-122"/>
-                <a:cs typeface="Courier New" pitchFamily="34" charset="-120"/>
-              </a:rPr>
-              <a:t>      "right knee pain"})</a:t>
-            </a:r>
-            <a:endParaRPr lang="en-US" sz="950" dirty="0"/>
-          </a:p>
-        </p:txBody>
-      </p:sp>
-      <p:sp>
-        <p:nvSpPr>
-          <p:cNvPr id="20" name="Text 18"/>
-          <p:cNvSpPr/>
-          <p:nvPr/>
-        </p:nvSpPr>
-        <p:spPr>
-          <a:xfrm>
-            <a:off x="3429000" y="2816352"/>
-            <a:ext cx="3474720" cy="274320"/>
-          </a:xfrm>
-          <a:prstGeom prst="rect">
-            <a:avLst/>
-          </a:prstGeom>
-          <a:noFill/>
-          <a:ln/>
-        </p:spPr>
-        <p:txBody>
-          <a:bodyPr wrap="square" lIns="0" tIns="0" rIns="0" bIns="0" rtlCol="0" anchor="ctr"/>
-          <a:lstStyle/>
-          <a:p>
-            <a:pPr indent="0" marL="0">
-              <a:buNone/>
-            </a:pPr>
-            <a:r>
-              <a:rPr lang="en-US" sz="950" dirty="0">
-                <a:solidFill>
-                  <a:srgbClr val="2E7D4F"/>
-                </a:solidFill>
-                <a:latin typeface="Courier New" pitchFamily="34" charset="0"/>
-                <a:ea typeface="Courier New" pitchFamily="34" charset="-122"/>
-                <a:cs typeface="Courier New" pitchFamily="34" charset="-120"/>
-              </a:rPr>
-              <a:t>  -&gt; [{"code": "M25.561",</a:t>
-            </a:r>
-            <a:endParaRPr lang="en-US" sz="950" dirty="0"/>
-          </a:p>
-        </p:txBody>
-      </p:sp>
-      <p:sp>
-        <p:nvSpPr>
-          <p:cNvPr id="21" name="Text 19"/>
-          <p:cNvSpPr/>
-          <p:nvPr/>
-        </p:nvSpPr>
-        <p:spPr>
-          <a:xfrm>
-            <a:off x="3429000" y="3099816"/>
-            <a:ext cx="3474720" cy="274320"/>
-          </a:xfrm>
-          <a:prstGeom prst="rect">
-            <a:avLst/>
-          </a:prstGeom>
-          <a:noFill/>
-          <a:ln/>
-        </p:spPr>
-        <p:txBody>
-          <a:bodyPr wrap="square" lIns="0" tIns="0" rIns="0" bIns="0" rtlCol="0" anchor="ctr"/>
-          <a:lstStyle/>
-          <a:p>
-            <a:pPr indent="0" marL="0">
-              <a:buNone/>
-            </a:pPr>
-            <a:r>
-              <a:rPr lang="en-US" sz="950" dirty="0">
-                <a:solidFill>
-                  <a:srgbClr val="2E7D4F"/>
-                </a:solidFill>
-                <a:latin typeface="Courier New" pitchFamily="34" charset="0"/>
-                <a:ea typeface="Courier New" pitchFamily="34" charset="-122"/>
-                <a:cs typeface="Courier New" pitchFamily="34" charset="-120"/>
-              </a:rPr>
-              <a:t>      "name": "Pain in right knee"}]</a:t>
-            </a:r>
-            <a:endParaRPr lang="en-US" sz="950" dirty="0"/>
-          </a:p>
-        </p:txBody>
-      </p:sp>
-      <p:sp>
-        <p:nvSpPr>
-          <p:cNvPr id="22" name="Text 20"/>
-          <p:cNvSpPr/>
-          <p:nvPr/>
-        </p:nvSpPr>
-        <p:spPr>
-          <a:xfrm>
-            <a:off x="3429000" y="3383280"/>
-            <a:ext cx="3474720" cy="274320"/>
-          </a:xfrm>
-          <a:prstGeom prst="rect">
-            <a:avLst/>
-          </a:prstGeom>
-          <a:noFill/>
-          <a:ln/>
-        </p:spPr>
-        <p:txBody>
-          <a:bodyPr wrap="square" lIns="0" tIns="0" rIns="0" bIns="0" rtlCol="0" anchor="ctr"/>
-          <a:lstStyle/>
-          <a:p>
-            <a:pPr indent="0" marL="0">
-              <a:buNone/>
-            </a:pPr>
-            <a:r>
-              <a:rPr lang="en-US" sz="950" dirty="0">
-                <a:solidFill>
-                  <a:srgbClr val="6A727C"/>
-                </a:solidFill>
-                <a:latin typeface="Courier New" pitchFamily="34" charset="0"/>
-                <a:ea typeface="Courier New" pitchFamily="34" charset="-122"/>
-                <a:cs typeface="Courier New" pitchFamily="34" charset="-120"/>
-              </a:rPr>
-              <a:t>{ "diagnoses": [ { "icd10_code":</a:t>
-            </a:r>
-            <a:endParaRPr lang="en-US" sz="950" dirty="0"/>
-          </a:p>
-        </p:txBody>
-      </p:sp>
-      <p:sp>
-        <p:nvSpPr>
-          <p:cNvPr id="23" name="Text 21"/>
-          <p:cNvSpPr/>
-          <p:nvPr/>
-        </p:nvSpPr>
-        <p:spPr>
-          <a:xfrm>
-            <a:off x="3429000" y="3666744"/>
-            <a:ext cx="3474720" cy="274320"/>
-          </a:xfrm>
-          <a:prstGeom prst="rect">
-            <a:avLst/>
-          </a:prstGeom>
-          <a:noFill/>
-          <a:ln/>
-        </p:spPr>
-        <p:txBody>
-          <a:bodyPr wrap="square" lIns="0" tIns="0" rIns="0" bIns="0" rtlCol="0" anchor="ctr"/>
-          <a:lstStyle/>
-          <a:p>
-            <a:pPr indent="0" marL="0">
-              <a:buNone/>
-            </a:pPr>
-            <a:r>
-              <a:rPr lang="en-US" sz="950" dirty="0">
-                <a:solidFill>
-                  <a:srgbClr val="6A727C"/>
-                </a:solidFill>
-                <a:latin typeface="Courier New" pitchFamily="34" charset="0"/>
-                <a:ea typeface="Courier New" pitchFamily="34" charset="-122"/>
-                <a:cs typeface="Courier New" pitchFamily="34" charset="-120"/>
-              </a:rPr>
-              <a:t>    "M25.561", ...</a:t>
-            </a:r>
-            <a:endParaRPr lang="en-US" sz="950" dirty="0"/>
-          </a:p>
-        </p:txBody>
-      </p:sp>
-      <p:sp>
-        <p:nvSpPr>
-          <p:cNvPr id="24" name="Text 22"/>
-          <p:cNvSpPr/>
-          <p:nvPr/>
-        </p:nvSpPr>
-        <p:spPr>
-          <a:xfrm>
-            <a:off x="3429000" y="3950208"/>
-            <a:ext cx="3474720" cy="274320"/>
-          </a:xfrm>
-          <a:prstGeom prst="rect">
-            <a:avLst/>
-          </a:prstGeom>
-          <a:noFill/>
-          <a:ln/>
-        </p:spPr>
-        <p:txBody>
-          <a:bodyPr wrap="square" lIns="0" tIns="0" rIns="0" bIns="0" rtlCol="0" anchor="ctr"/>
-          <a:lstStyle/>
-          <a:p>
-            <a:pPr indent="0" marL="0">
-              <a:buNone/>
-            </a:pPr>
-            <a:r>
-              <a:rPr lang="en-US" sz="950" dirty="0">
-                <a:solidFill>
-                  <a:srgbClr val="8A6116"/>
-                </a:solidFill>
-                <a:latin typeface="Courier New" pitchFamily="34" charset="0"/>
-                <a:ea typeface="Courier New" pitchFamily="34" charset="-122"/>
-                <a:cs typeface="Courier New" pitchFamily="34" charset="-120"/>
-              </a:rPr>
-              <a:t>tool&gt; request_prior_auth(</a:t>
-            </a:r>
-            <a:endParaRPr lang="en-US" sz="950" dirty="0"/>
-          </a:p>
-        </p:txBody>
-      </p:sp>
-      <p:sp>
-        <p:nvSpPr>
-          <p:cNvPr id="25" name="Text 23"/>
-          <p:cNvSpPr/>
-          <p:nvPr/>
-        </p:nvSpPr>
-        <p:spPr>
-          <a:xfrm>
-            <a:off x="3429000" y="4233672"/>
-            <a:ext cx="3474720" cy="274320"/>
-          </a:xfrm>
-          <a:prstGeom prst="rect">
-            <a:avLst/>
-          </a:prstGeom>
-          <a:noFill/>
-          <a:ln/>
-        </p:spPr>
-        <p:txBody>
-          <a:bodyPr wrap="square" lIns="0" tIns="0" rIns="0" bIns="0" rtlCol="0" anchor="ctr"/>
-          <a:lstStyle/>
-          <a:p>
-            <a:pPr indent="0" marL="0">
-              <a:buNone/>
-            </a:pPr>
-            <a:r>
-              <a:rPr lang="en-US" sz="950" dirty="0">
-                <a:solidFill>
-                  <a:srgbClr val="2E7D4F"/>
-                </a:solidFill>
-                <a:latin typeface="Courier New" pitchFamily="34" charset="0"/>
-                <a:ea typeface="Courier New" pitchFamily="34" charset="-122"/>
-                <a:cs typeface="Courier New" pitchFamily="34" charset="-120"/>
-              </a:rPr>
-              <a:t>  -&gt; {"status": "approved"}</a:t>
-            </a:r>
-            <a:endParaRPr lang="en-US" sz="950" dirty="0"/>
-          </a:p>
-        </p:txBody>
-      </p:sp>
-      <p:sp>
-        <p:nvSpPr>
-          <p:cNvPr id="26" name="Text 24"/>
-          <p:cNvSpPr/>
-          <p:nvPr/>
-        </p:nvSpPr>
-        <p:spPr>
-          <a:xfrm>
-            <a:off x="3246120" y="4937760"/>
-            <a:ext cx="3840480" cy="548640"/>
-          </a:xfrm>
-          <a:prstGeom prst="rect">
-            <a:avLst/>
-          </a:prstGeom>
-          <a:noFill/>
-          <a:ln/>
-        </p:spPr>
-        <p:txBody>
-          <a:bodyPr wrap="square" lIns="0" tIns="0" rIns="0" bIns="0" rtlCol="0" anchor="ctr"/>
-          <a:lstStyle/>
-          <a:p>
-            <a:pPr indent="0" marL="0">
-              <a:buNone/>
-            </a:pPr>
-            <a:r>
-              <a:rPr lang="en-US" sz="1050" dirty="0">
-                <a:solidFill>
-                  <a:srgbClr val="6A727C"/>
-                </a:solidFill>
-                <a:latin typeface="Courier New" pitchFamily="34" charset="0"/>
-                <a:ea typeface="Courier New" pitchFamily="34" charset="-122"/>
-                <a:cs typeface="Courier New" pitchFamily="34" charset="-120"/>
-              </a:rPr>
-              <a:t>submission 1: </a:t>
-            </a:r>
-            <a:pPr indent="0" marL="0">
-              <a:buNone/>
-            </a:pPr>
-            <a:r>
-              <a:rPr lang="en-US" sz="1050" b="1" dirty="0">
-                <a:solidFill>
-                  <a:srgbClr val="A8402F"/>
-                </a:solidFill>
-                <a:latin typeface="Courier New" pitchFamily="34" charset="0"/>
-                <a:ea typeface="Courier New" pitchFamily="34" charset="-122"/>
-                <a:cs typeface="Courier New" pitchFamily="34" charset="-120"/>
-              </a:rPr>
-              <a:t>denied CO-197</a:t>
-            </a:r>
-            <a:pPr indent="0" marL="0">
-              <a:buNone/>
-            </a:pPr>
-            <a:r>
-              <a:rPr lang="en-US" sz="1050" dirty="0">
-                <a:solidFill>
-                  <a:srgbClr val="6A727C"/>
-                </a:solidFill>
-                <a:latin typeface="Courier New" pitchFamily="34" charset="0"/>
-                <a:ea typeface="Courier New" pitchFamily="34" charset="-122"/>
-                <a:cs typeface="Courier New" pitchFamily="34" charset="-120"/>
-              </a:rPr>
-              <a:t>   submission 2: </a:t>
-            </a:r>
-            <a:pPr indent="0" marL="0">
-              <a:buNone/>
-            </a:pPr>
-            <a:r>
-              <a:rPr lang="en-US" sz="1050" b="1" dirty="0">
-                <a:solidFill>
-                  <a:srgbClr val="2E7D4F"/>
-                </a:solidFill>
-                <a:latin typeface="Courier New" pitchFamily="34" charset="0"/>
-                <a:ea typeface="Courier New" pitchFamily="34" charset="-122"/>
-                <a:cs typeface="Courier New" pitchFamily="34" charset="-120"/>
-              </a:rPr>
-              <a:t>accepted, paid</a:t>
-            </a:r>
-            <a:endParaRPr lang="en-US" sz="1050" dirty="0"/>
-          </a:p>
-        </p:txBody>
-      </p:sp>
-      <p:sp>
-        <p:nvSpPr>
-          <p:cNvPr id="27" name="Shape 25"/>
-          <p:cNvSpPr/>
-          <p:nvPr/>
-        </p:nvSpPr>
-        <p:spPr>
-          <a:xfrm>
-            <a:off x="7543800" y="1709928"/>
-            <a:ext cx="82296" cy="82296"/>
-          </a:xfrm>
-          <a:prstGeom prst="rect">
-            <a:avLst/>
-          </a:prstGeom>
-          <a:solidFill>
-            <a:srgbClr val="35639C"/>
-          </a:solidFill>
-          <a:ln/>
-        </p:spPr>
-      </p:sp>
-      <p:sp>
-        <p:nvSpPr>
-          <p:cNvPr id="28" name="Text 26"/>
-          <p:cNvSpPr/>
-          <p:nvPr/>
-        </p:nvSpPr>
-        <p:spPr>
-          <a:xfrm>
-            <a:off x="7754112" y="1572768"/>
-            <a:ext cx="3886200" cy="777240"/>
-          </a:xfrm>
-          <a:prstGeom prst="rect">
-            <a:avLst/>
-          </a:prstGeom>
-          <a:noFill/>
-          <a:ln/>
-        </p:spPr>
-        <p:txBody>
-          <a:bodyPr wrap="square" lIns="0" tIns="0" rIns="0" bIns="0" rtlCol="0" anchor="ctr"/>
-          <a:lstStyle/>
-          <a:p>
-            <a:pPr indent="0" marL="0">
-              <a:buNone/>
-            </a:pPr>
-            <a:r>
-              <a:rPr lang="en-US" sz="1250" dirty="0">
-                <a:solidFill>
-                  <a:srgbClr val="23272C"/>
-                </a:solidFill>
-                <a:latin typeface="Calibri" pitchFamily="34" charset="0"/>
-                <a:ea typeface="Calibri" pitchFamily="34" charset="-122"/>
-                <a:cs typeface="Calibri" pitchFamily="34" charset="-120"/>
-              </a:rPr>
-              <a:t>The encounter transcript is first-class: read the visit before the agents touch it</a:t>
-            </a:r>
-            <a:endParaRPr lang="en-US" sz="1250" dirty="0"/>
-          </a:p>
-        </p:txBody>
-      </p:sp>
-      <p:sp>
-        <p:nvSpPr>
-          <p:cNvPr id="29" name="Shape 27"/>
-          <p:cNvSpPr/>
-          <p:nvPr/>
-        </p:nvSpPr>
-        <p:spPr>
-          <a:xfrm>
-            <a:off x="7543800" y="2551176"/>
-            <a:ext cx="82296" cy="82296"/>
-          </a:xfrm>
-          <a:prstGeom prst="rect">
-            <a:avLst/>
-          </a:prstGeom>
-          <a:solidFill>
-            <a:srgbClr val="35639C"/>
-          </a:solidFill>
-          <a:ln/>
-        </p:spPr>
-      </p:sp>
-      <p:sp>
-        <p:nvSpPr>
-          <p:cNvPr id="30" name="Text 28"/>
-          <p:cNvSpPr/>
-          <p:nvPr/>
-        </p:nvSpPr>
-        <p:spPr>
-          <a:xfrm>
-            <a:off x="7754112" y="2414016"/>
-            <a:ext cx="3886200" cy="777240"/>
-          </a:xfrm>
-          <a:prstGeom prst="rect">
-            <a:avLst/>
-          </a:prstGeom>
-          <a:noFill/>
-          <a:ln/>
-        </p:spPr>
-        <p:txBody>
-          <a:bodyPr wrap="square" lIns="0" tIns="0" rIns="0" bIns="0" rtlCol="0" anchor="ctr"/>
-          <a:lstStyle/>
-          <a:p>
-            <a:pPr indent="0" marL="0">
-              <a:buNone/>
-            </a:pPr>
-            <a:r>
-              <a:rPr lang="en-US" sz="1250" dirty="0">
-                <a:solidFill>
-                  <a:srgbClr val="23272C"/>
-                </a:solidFill>
-                <a:latin typeface="Calibri" pitchFamily="34" charset="0"/>
-                <a:ea typeface="Calibri" pitchFamily="34" charset="-122"/>
-                <a:cs typeface="Calibri" pitchFamily="34" charset="-120"/>
-              </a:rPr>
-              <a:t>A live activity log: model output streaming, tool calls, retries, per stage</a:t>
-            </a:r>
-            <a:endParaRPr lang="en-US" sz="1250" dirty="0"/>
-          </a:p>
-        </p:txBody>
-      </p:sp>
-      <p:sp>
-        <p:nvSpPr>
-          <p:cNvPr id="31" name="Shape 29"/>
-          <p:cNvSpPr/>
-          <p:nvPr/>
-        </p:nvSpPr>
-        <p:spPr>
-          <a:xfrm>
-            <a:off x="7543800" y="3392424"/>
-            <a:ext cx="82296" cy="82296"/>
-          </a:xfrm>
-          <a:prstGeom prst="rect">
-            <a:avLst/>
-          </a:prstGeom>
-          <a:solidFill>
-            <a:srgbClr val="35639C"/>
-          </a:solidFill>
-          <a:ln/>
-        </p:spPr>
-      </p:sp>
-      <p:sp>
-        <p:nvSpPr>
-          <p:cNvPr id="32" name="Text 30"/>
-          <p:cNvSpPr/>
-          <p:nvPr/>
-        </p:nvSpPr>
-        <p:spPr>
-          <a:xfrm>
-            <a:off x="7754112" y="3255264"/>
-            <a:ext cx="3886200" cy="777240"/>
-          </a:xfrm>
-          <a:prstGeom prst="rect">
-            <a:avLst/>
-          </a:prstGeom>
-          <a:noFill/>
-          <a:ln/>
-        </p:spPr>
-        <p:txBody>
-          <a:bodyPr wrap="square" lIns="0" tIns="0" rIns="0" bIns="0" rtlCol="0" anchor="ctr"/>
-          <a:lstStyle/>
-          <a:p>
-            <a:pPr indent="0" marL="0">
-              <a:buNone/>
-            </a:pPr>
-            <a:r>
-              <a:rPr lang="en-US" sz="1250" dirty="0">
-                <a:solidFill>
-                  <a:srgbClr val="23272C"/>
-                </a:solidFill>
-                <a:latin typeface="Calibri" pitchFamily="34" charset="0"/>
-                <a:ea typeface="Calibri" pitchFamily="34" charset="-122"/>
-                <a:cs typeface="Calibri" pitchFamily="34" charset="-120"/>
-              </a:rPr>
-              <a:t>The claim renders as a claim document (patient, provider, diagnoses, service lines), not raw JSON</a:t>
-            </a:r>
-            <a:endParaRPr lang="en-US" sz="1250" dirty="0"/>
-          </a:p>
-        </p:txBody>
-      </p:sp>
-      <p:sp>
-        <p:nvSpPr>
-          <p:cNvPr id="33" name="Shape 31"/>
-          <p:cNvSpPr/>
-          <p:nvPr/>
-        </p:nvSpPr>
-        <p:spPr>
-          <a:xfrm>
-            <a:off x="7543800" y="4233672"/>
-            <a:ext cx="82296" cy="82296"/>
-          </a:xfrm>
-          <a:prstGeom prst="rect">
-            <a:avLst/>
-          </a:prstGeom>
-          <a:solidFill>
-            <a:srgbClr val="35639C"/>
-          </a:solidFill>
-          <a:ln/>
-        </p:spPr>
-      </p:sp>
-      <p:sp>
-        <p:nvSpPr>
-          <p:cNvPr id="34" name="Text 32"/>
-          <p:cNvSpPr/>
-          <p:nvPr/>
-        </p:nvSpPr>
-        <p:spPr>
-          <a:xfrm>
-            <a:off x="7754112" y="4096512"/>
-            <a:ext cx="3886200" cy="777240"/>
-          </a:xfrm>
-          <a:prstGeom prst="rect">
-            <a:avLst/>
-          </a:prstGeom>
-          <a:noFill/>
-          <a:ln/>
-        </p:spPr>
-        <p:txBody>
-          <a:bodyPr wrap="square" lIns="0" tIns="0" rIns="0" bIns="0" rtlCol="0" anchor="ctr"/>
-          <a:lstStyle/>
-          <a:p>
-            <a:pPr indent="0" marL="0">
-              <a:buNone/>
-            </a:pPr>
-            <a:r>
-              <a:rPr lang="en-US" sz="1250" dirty="0">
-                <a:solidFill>
-                  <a:srgbClr val="23272C"/>
-                </a:solidFill>
-                <a:latin typeface="Calibri" pitchFamily="34" charset="0"/>
-                <a:ea typeface="Calibri" pitchFamily="34" charset="-122"/>
-                <a:cs typeface="Calibri" pitchFamily="34" charset="-120"/>
-              </a:rPr>
-              <a:t>Verdicts carry the payer's reason codes; resolutions and appeal letters are shown in full</a:t>
-            </a:r>
-            <a:endParaRPr lang="en-US" sz="1250" dirty="0"/>
-          </a:p>
-        </p:txBody>
-      </p:sp>
-      <p:sp>
-        <p:nvSpPr>
-          <p:cNvPr id="35" name="Shape 33"/>
-          <p:cNvSpPr/>
-          <p:nvPr/>
-        </p:nvSpPr>
-        <p:spPr>
-          <a:xfrm>
-            <a:off x="7543800" y="5074920"/>
-            <a:ext cx="82296" cy="82296"/>
-          </a:xfrm>
-          <a:prstGeom prst="rect">
-            <a:avLst/>
-          </a:prstGeom>
-          <a:solidFill>
-            <a:srgbClr val="35639C"/>
-          </a:solidFill>
-          <a:ln/>
-        </p:spPr>
-      </p:sp>
-      <p:sp>
-        <p:nvSpPr>
-          <p:cNvPr id="36" name="Text 34"/>
-          <p:cNvSpPr/>
-          <p:nvPr/>
-        </p:nvSpPr>
-        <p:spPr>
-          <a:xfrm>
-            <a:off x="7754112" y="4937760"/>
-            <a:ext cx="3886200" cy="777240"/>
-          </a:xfrm>
-          <a:prstGeom prst="rect">
-            <a:avLst/>
-          </a:prstGeom>
-          <a:noFill/>
-          <a:ln/>
-        </p:spPr>
-        <p:txBody>
-          <a:bodyPr wrap="square" lIns="0" tIns="0" rIns="0" bIns="0" rtlCol="0" anchor="ctr"/>
-          <a:lstStyle/>
-          <a:p>
-            <a:pPr indent="0" marL="0">
-              <a:buNone/>
-            </a:pPr>
-            <a:r>
-              <a:rPr lang="en-US" sz="1250" dirty="0">
-                <a:solidFill>
-                  <a:srgbClr val="23272C"/>
-                </a:solidFill>
-                <a:latin typeface="Calibri" pitchFamily="34" charset="0"/>
-                <a:ea typeface="Calibri" pitchFamily="34" charset="-122"/>
-                <a:cs typeface="Calibri" pitchFamily="34" charset="-120"/>
-              </a:rPr>
-              <a:t>A mock playback mode demos the interface without spending tokens</a:t>
-            </a:r>
-            <a:endParaRPr lang="en-US" sz="1250" dirty="0"/>
-          </a:p>
-        </p:txBody>
-      </p:sp>
-      <p:sp>
-        <p:nvSpPr>
-          <p:cNvPr id="37" name="Text 35"/>
-          <p:cNvSpPr/>
-          <p:nvPr/>
-        </p:nvSpPr>
-        <p:spPr>
-          <a:xfrm>
-            <a:off x="7754112" y="5806440"/>
-            <a:ext cx="3657600" cy="320040"/>
-          </a:xfrm>
-          <a:prstGeom prst="rect">
-            <a:avLst/>
-          </a:prstGeom>
-          <a:noFill/>
-          <a:ln/>
-        </p:spPr>
-        <p:txBody>
-          <a:bodyPr wrap="square" lIns="0" tIns="0" rIns="0" bIns="0" rtlCol="0" anchor="ctr"/>
-          <a:lstStyle/>
-          <a:p>
-            <a:pPr indent="0" marL="0">
-              <a:buNone/>
-            </a:pPr>
-            <a:r>
-              <a:rPr lang="en-US" sz="1150" i="1" dirty="0">
-                <a:solidFill>
-                  <a:srgbClr val="9AA1AA"/>
-                </a:solidFill>
-                <a:latin typeface="Calibri" pitchFamily="34" charset="0"/>
-                <a:ea typeface="Calibri" pitchFamily="34" charset="-122"/>
-                <a:cs typeface="Calibri" pitchFamily="34" charset="-120"/>
-              </a:rPr>
-              <a:t>(live demo in the video)</a:t>
-            </a:r>
-            <a:endParaRPr lang="en-US" sz="1150" dirty="0"/>
+              <a:t>The policy is illustrative fiction, disclosed as such. It is the test environment, not the dataset.</a:t>
+            </a:r>
+            <a:endParaRPr lang="en-US" sz="1350" dirty="0"/>
           </a:p>
         </p:txBody>
       </p:sp>
@@ -9423,7 +10136,7 @@
                 <a:ea typeface="Calibri" pitchFamily="34" charset="-122"/>
                 <a:cs typeface="Calibri" pitchFamily="34" charset="-120"/>
               </a:rPr>
-              <a:t>RESULTS</a:t>
+              <a:t>INTERFACE</a:t>
             </a:r>
             <a:endParaRPr lang="en-US" sz="1050" dirty="0"/>
           </a:p>
@@ -9462,77 +10175,74 @@
                 <a:ea typeface="Cambria" pitchFamily="34" charset="-122"/>
                 <a:cs typeface="Cambria" pitchFamily="34" charset="-120"/>
               </a:rPr>
-              <a:t>Sixty encounters, end to end</a:t>
+              <a:t>The whole journey on one screen</a:t>
             </a:r>
             <a:endParaRPr lang="en-US" sz="2900" dirty="0"/>
           </a:p>
         </p:txBody>
       </p:sp>
-      <p:graphicFrame>
-        <p:nvGraphicFramePr>
-          <p:cNvPr id="4" name="Chart 0" descr=""/>
-          <p:cNvGraphicFramePr/>
-          <p:nvPr/>
-        </p:nvGraphicFramePr>
-        <p:xfrm>
-          <a:off x="594360" y="1691640"/>
-          <a:ext cx="6766560" cy="3840480"/>
-        </p:xfrm>
-        <a:graphic xmlns:a="http://schemas.openxmlformats.org/drawingml/2006/main">
-          <a:graphicData uri="http://schemas.openxmlformats.org/drawingml/2006/chart">
-            <c:chart xmlns:c="http://schemas.openxmlformats.org/drawingml/2006/chart" r:id="rId1"/>
-          </a:graphicData>
-        </a:graphic>
-      </p:graphicFrame>
-      <p:sp>
-        <p:nvSpPr>
-          <p:cNvPr id="5" name="Text 2"/>
-          <p:cNvSpPr/>
-          <p:nvPr/>
-        </p:nvSpPr>
-        <p:spPr>
-          <a:xfrm>
-            <a:off x="7863840" y="1691640"/>
-            <a:ext cx="3657600" cy="822960"/>
-          </a:xfrm>
-          <a:prstGeom prst="rect">
-            <a:avLst/>
-          </a:prstGeom>
-          <a:noFill/>
-          <a:ln/>
-        </p:spPr>
-        <p:txBody>
-          <a:bodyPr wrap="square" lIns="0" tIns="0" rIns="0" bIns="0" rtlCol="0" anchor="ctr"/>
-          <a:lstStyle/>
-          <a:p>
-            <a:pPr indent="0" marL="0">
-              <a:buNone/>
-            </a:pPr>
-            <a:r>
-              <a:rPr lang="en-US" sz="4600" b="1" dirty="0">
-                <a:solidFill>
-                  <a:srgbClr val="2E7D4F"/>
-                </a:solidFill>
-                <a:latin typeface="Cambria" pitchFamily="34" charset="0"/>
-                <a:ea typeface="Cambria" pitchFamily="34" charset="-122"/>
-                <a:cs typeface="Cambria" pitchFamily="34" charset="-120"/>
-              </a:rPr>
-              <a:t>83.3%</a:t>
-            </a:r>
-            <a:endParaRPr lang="en-US" sz="4600" dirty="0"/>
-          </a:p>
-        </p:txBody>
-      </p:sp>
-      <p:sp>
-        <p:nvSpPr>
-          <p:cNvPr id="6" name="Text 3"/>
-          <p:cNvSpPr/>
-          <p:nvPr/>
-        </p:nvSpPr>
-        <p:spPr>
-          <a:xfrm>
-            <a:off x="7863840" y="2532888"/>
-            <a:ext cx="3657600" cy="822960"/>
+      <p:sp>
+        <p:nvSpPr>
+          <p:cNvPr id="4" name="Shape 2"/>
+          <p:cNvSpPr/>
+          <p:nvPr/>
+        </p:nvSpPr>
+        <p:spPr>
+          <a:xfrm>
+            <a:off x="548640" y="1554480"/>
+            <a:ext cx="6720840" cy="4434840"/>
+          </a:xfrm>
+          <a:prstGeom prst="roundRect">
+            <a:avLst>
+              <a:gd name="adj" fmla="val 928"/>
+            </a:avLst>
+          </a:prstGeom>
+          <a:solidFill>
+            <a:srgbClr val="FFFFFF"/>
+          </a:solidFill>
+          <a:ln w="12700">
+            <a:solidFill>
+              <a:srgbClr val="E3E0DA"/>
+            </a:solidFill>
+            <a:prstDash val="solid"/>
+          </a:ln>
+        </p:spPr>
+      </p:sp>
+      <p:sp>
+        <p:nvSpPr>
+          <p:cNvPr id="5" name="Shape 3"/>
+          <p:cNvSpPr/>
+          <p:nvPr/>
+        </p:nvSpPr>
+        <p:spPr>
+          <a:xfrm>
+            <a:off x="914400" y="1947672"/>
+            <a:ext cx="146304" cy="146304"/>
+          </a:xfrm>
+          <a:prstGeom prst="ellipse">
+            <a:avLst/>
+          </a:prstGeom>
+          <a:solidFill>
+            <a:srgbClr val="FFFFFF"/>
+          </a:solidFill>
+          <a:ln w="22225">
+            <a:solidFill>
+              <a:srgbClr val="2E7D4F"/>
+            </a:solidFill>
+            <a:prstDash val="solid"/>
+          </a:ln>
+        </p:spPr>
+      </p:sp>
+      <p:sp>
+        <p:nvSpPr>
+          <p:cNvPr id="6" name="Text 4"/>
+          <p:cNvSpPr/>
+          <p:nvPr/>
+        </p:nvSpPr>
+        <p:spPr>
+          <a:xfrm>
+            <a:off x="1188720" y="1837944"/>
+            <a:ext cx="1691640" cy="365760"/>
           </a:xfrm>
           <a:prstGeom prst="rect">
             <a:avLst/>
@@ -9550,13 +10260,13 @@
             <a:r>
               <a:rPr lang="en-US" sz="1250" dirty="0">
                 <a:solidFill>
-                  <a:srgbClr val="6A727C"/>
+                  <a:srgbClr val="23272C"/>
                 </a:solidFill>
                 <a:latin typeface="Calibri" pitchFamily="34" charset="0"/>
                 <a:ea typeface="Calibri" pitchFamily="34" charset="-122"/>
                 <a:cs typeface="Calibri" pitchFamily="34" charset="-120"/>
               </a:rPr>
-              <a:t>of claims accepted on the first submission</a:t>
+              <a:t>Scribe</a:t>
             </a:r>
             <a:endParaRPr lang="en-US" sz="1250" dirty="0"/>
           </a:p>
@@ -9564,53 +10274,39 @@
       </p:sp>
       <p:sp>
         <p:nvSpPr>
-          <p:cNvPr id="7" name="Text 4"/>
-          <p:cNvSpPr/>
-          <p:nvPr/>
-        </p:nvSpPr>
-        <p:spPr>
-          <a:xfrm>
-            <a:off x="7863840" y="3383280"/>
-            <a:ext cx="3657600" cy="822960"/>
-          </a:xfrm>
-          <a:prstGeom prst="rect">
-            <a:avLst/>
-          </a:prstGeom>
-          <a:noFill/>
-          <a:ln/>
-        </p:spPr>
-        <p:txBody>
-          <a:bodyPr wrap="square" lIns="0" tIns="0" rIns="0" bIns="0" rtlCol="0" anchor="ctr"/>
-          <a:lstStyle/>
-          <a:p>
-            <a:pPr indent="0" marL="0">
-              <a:buNone/>
-            </a:pPr>
-            <a:r>
-              <a:rPr lang="en-US" sz="4600" b="1" dirty="0">
-                <a:solidFill>
-                  <a:srgbClr val="35639C"/>
-                </a:solidFill>
-                <a:latin typeface="Cambria" pitchFamily="34" charset="0"/>
-                <a:ea typeface="Cambria" pitchFamily="34" charset="-122"/>
-                <a:cs typeface="Cambria" pitchFamily="34" charset="-120"/>
-              </a:rPr>
-              <a:t>96.7%</a:t>
-            </a:r>
-            <a:endParaRPr lang="en-US" sz="4600" dirty="0"/>
-          </a:p>
-        </p:txBody>
-      </p:sp>
-      <p:sp>
-        <p:nvSpPr>
-          <p:cNvPr id="8" name="Text 5"/>
-          <p:cNvSpPr/>
-          <p:nvPr/>
-        </p:nvSpPr>
-        <p:spPr>
-          <a:xfrm>
-            <a:off x="7863840" y="4224528"/>
-            <a:ext cx="3657600" cy="822960"/>
+          <p:cNvPr id="7" name="Shape 5"/>
+          <p:cNvSpPr/>
+          <p:nvPr/>
+        </p:nvSpPr>
+        <p:spPr>
+          <a:xfrm>
+            <a:off x="914400" y="2660904"/>
+            <a:ext cx="146304" cy="146304"/>
+          </a:xfrm>
+          <a:prstGeom prst="ellipse">
+            <a:avLst/>
+          </a:prstGeom>
+          <a:solidFill>
+            <a:srgbClr val="FFFFFF"/>
+          </a:solidFill>
+          <a:ln w="22225">
+            <a:solidFill>
+              <a:srgbClr val="2E7D4F"/>
+            </a:solidFill>
+            <a:prstDash val="solid"/>
+          </a:ln>
+        </p:spPr>
+      </p:sp>
+      <p:sp>
+        <p:nvSpPr>
+          <p:cNvPr id="8" name="Text 6"/>
+          <p:cNvSpPr/>
+          <p:nvPr/>
+        </p:nvSpPr>
+        <p:spPr>
+          <a:xfrm>
+            <a:off x="1188720" y="2551176"/>
+            <a:ext cx="1691640" cy="365760"/>
           </a:xfrm>
           <a:prstGeom prst="rect">
             <a:avLst/>
@@ -9628,13 +10324,13 @@
             <a:r>
               <a:rPr lang="en-US" sz="1250" dirty="0">
                 <a:solidFill>
-                  <a:srgbClr val="6A727C"/>
+                  <a:srgbClr val="23272C"/>
                 </a:solidFill>
                 <a:latin typeface="Calibri" pitchFamily="34" charset="0"/>
                 <a:ea typeface="Calibri" pitchFamily="34" charset="-122"/>
                 <a:cs typeface="Calibri" pitchFamily="34" charset="-120"/>
               </a:rPr>
-              <a:t>final acceptance after the denial loop, 58 of 60 paid</a:t>
+              <a:t>Coder</a:t>
             </a:r>
             <a:endParaRPr lang="en-US" sz="1250" dirty="0"/>
           </a:p>
@@ -9642,38 +10338,1007 @@
       </p:sp>
       <p:sp>
         <p:nvSpPr>
-          <p:cNvPr id="9" name="Text 6"/>
-          <p:cNvSpPr/>
-          <p:nvPr/>
-        </p:nvSpPr>
-        <p:spPr>
-          <a:xfrm>
-            <a:off x="7863840" y="5349240"/>
-            <a:ext cx="3657600" cy="457200"/>
-          </a:xfrm>
-          <a:prstGeom prst="rect">
-            <a:avLst/>
-          </a:prstGeom>
-          <a:noFill/>
-          <a:ln/>
-        </p:spPr>
-        <p:txBody>
-          <a:bodyPr wrap="square" lIns="0" tIns="0" rIns="0" bIns="0" rtlCol="0" anchor="ctr"/>
-          <a:lstStyle/>
-          <a:p>
-            <a:pPr indent="0" marL="0">
-              <a:buNone/>
-            </a:pPr>
-            <a:r>
-              <a:rPr lang="en-US" sz="1150" dirty="0">
-                <a:solidFill>
-                  <a:srgbClr val="9AA1AA"/>
+          <p:cNvPr id="9" name="Shape 7"/>
+          <p:cNvSpPr/>
+          <p:nvPr/>
+        </p:nvSpPr>
+        <p:spPr>
+          <a:xfrm>
+            <a:off x="914400" y="3374136"/>
+            <a:ext cx="146304" cy="146304"/>
+          </a:xfrm>
+          <a:prstGeom prst="ellipse">
+            <a:avLst/>
+          </a:prstGeom>
+          <a:solidFill>
+            <a:srgbClr val="FFFFFF"/>
+          </a:solidFill>
+          <a:ln w="22225">
+            <a:solidFill>
+              <a:srgbClr val="2E7D4F"/>
+            </a:solidFill>
+            <a:prstDash val="solid"/>
+          </a:ln>
+        </p:spPr>
+      </p:sp>
+      <p:sp>
+        <p:nvSpPr>
+          <p:cNvPr id="10" name="Text 8"/>
+          <p:cNvSpPr/>
+          <p:nvPr/>
+        </p:nvSpPr>
+        <p:spPr>
+          <a:xfrm>
+            <a:off x="1188720" y="3264408"/>
+            <a:ext cx="1691640" cy="365760"/>
+          </a:xfrm>
+          <a:prstGeom prst="rect">
+            <a:avLst/>
+          </a:prstGeom>
+          <a:noFill/>
+          <a:ln/>
+        </p:spPr>
+        <p:txBody>
+          <a:bodyPr wrap="square" lIns="0" tIns="0" rIns="0" bIns="0" rtlCol="0" anchor="ctr"/>
+          <a:lstStyle/>
+          <a:p>
+            <a:pPr indent="0" marL="0">
+              <a:buNone/>
+            </a:pPr>
+            <a:r>
+              <a:rPr lang="en-US" sz="1250" dirty="0">
+                <a:solidFill>
+                  <a:srgbClr val="23272C"/>
+                </a:solidFill>
+                <a:latin typeface="Calibri" pitchFamily="34" charset="0"/>
+                <a:ea typeface="Calibri" pitchFamily="34" charset="-122"/>
+                <a:cs typeface="Calibri" pitchFamily="34" charset="-120"/>
+              </a:rPr>
+              <a:t>Claim builder</a:t>
+            </a:r>
+            <a:endParaRPr lang="en-US" sz="1250" dirty="0"/>
+          </a:p>
+        </p:txBody>
+      </p:sp>
+      <p:sp>
+        <p:nvSpPr>
+          <p:cNvPr id="11" name="Shape 9"/>
+          <p:cNvSpPr/>
+          <p:nvPr/>
+        </p:nvSpPr>
+        <p:spPr>
+          <a:xfrm>
+            <a:off x="914400" y="4087368"/>
+            <a:ext cx="146304" cy="146304"/>
+          </a:xfrm>
+          <a:prstGeom prst="ellipse">
+            <a:avLst/>
+          </a:prstGeom>
+          <a:solidFill>
+            <a:srgbClr val="FFFFFF"/>
+          </a:solidFill>
+          <a:ln w="22225">
+            <a:solidFill>
+              <a:srgbClr val="A8402F"/>
+            </a:solidFill>
+            <a:prstDash val="solid"/>
+          </a:ln>
+        </p:spPr>
+      </p:sp>
+      <p:sp>
+        <p:nvSpPr>
+          <p:cNvPr id="12" name="Text 10"/>
+          <p:cNvSpPr/>
+          <p:nvPr/>
+        </p:nvSpPr>
+        <p:spPr>
+          <a:xfrm>
+            <a:off x="1188720" y="3977640"/>
+            <a:ext cx="1691640" cy="365760"/>
+          </a:xfrm>
+          <a:prstGeom prst="rect">
+            <a:avLst/>
+          </a:prstGeom>
+          <a:noFill/>
+          <a:ln/>
+        </p:spPr>
+        <p:txBody>
+          <a:bodyPr wrap="square" lIns="0" tIns="0" rIns="0" bIns="0" rtlCol="0" anchor="ctr"/>
+          <a:lstStyle/>
+          <a:p>
+            <a:pPr indent="0" marL="0">
+              <a:buNone/>
+            </a:pPr>
+            <a:r>
+              <a:rPr lang="en-US" sz="1250" dirty="0">
+                <a:solidFill>
+                  <a:srgbClr val="23272C"/>
+                </a:solidFill>
+                <a:latin typeface="Calibri" pitchFamily="34" charset="0"/>
+                <a:ea typeface="Calibri" pitchFamily="34" charset="-122"/>
+                <a:cs typeface="Calibri" pitchFamily="34" charset="-120"/>
+              </a:rPr>
+              <a:t>Payer</a:t>
+            </a:r>
+            <a:endParaRPr lang="en-US" sz="1250" dirty="0"/>
+          </a:p>
+        </p:txBody>
+      </p:sp>
+      <p:sp>
+        <p:nvSpPr>
+          <p:cNvPr id="13" name="Shape 11"/>
+          <p:cNvSpPr/>
+          <p:nvPr/>
+        </p:nvSpPr>
+        <p:spPr>
+          <a:xfrm>
+            <a:off x="914400" y="4800600"/>
+            <a:ext cx="146304" cy="146304"/>
+          </a:xfrm>
+          <a:prstGeom prst="ellipse">
+            <a:avLst/>
+          </a:prstGeom>
+          <a:solidFill>
+            <a:srgbClr val="FFFFFF"/>
+          </a:solidFill>
+          <a:ln w="22225">
+            <a:solidFill>
+              <a:srgbClr val="35639C"/>
+            </a:solidFill>
+            <a:prstDash val="solid"/>
+          </a:ln>
+        </p:spPr>
+      </p:sp>
+      <p:sp>
+        <p:nvSpPr>
+          <p:cNvPr id="14" name="Text 12"/>
+          <p:cNvSpPr/>
+          <p:nvPr/>
+        </p:nvSpPr>
+        <p:spPr>
+          <a:xfrm>
+            <a:off x="1188720" y="4690872"/>
+            <a:ext cx="1691640" cy="365760"/>
+          </a:xfrm>
+          <a:prstGeom prst="rect">
+            <a:avLst/>
+          </a:prstGeom>
+          <a:noFill/>
+          <a:ln/>
+        </p:spPr>
+        <p:txBody>
+          <a:bodyPr wrap="square" lIns="0" tIns="0" rIns="0" bIns="0" rtlCol="0" anchor="ctr"/>
+          <a:lstStyle/>
+          <a:p>
+            <a:pPr indent="0" marL="0">
+              <a:buNone/>
+            </a:pPr>
+            <a:r>
+              <a:rPr lang="en-US" sz="1250" dirty="0">
+                <a:solidFill>
+                  <a:srgbClr val="23272C"/>
+                </a:solidFill>
+                <a:latin typeface="Calibri" pitchFamily="34" charset="0"/>
+                <a:ea typeface="Calibri" pitchFamily="34" charset="-122"/>
+                <a:cs typeface="Calibri" pitchFamily="34" charset="-120"/>
+              </a:rPr>
+              <a:t>Denial resolver</a:t>
+            </a:r>
+            <a:endParaRPr lang="en-US" sz="1250" dirty="0"/>
+          </a:p>
+        </p:txBody>
+      </p:sp>
+      <p:sp>
+        <p:nvSpPr>
+          <p:cNvPr id="15" name="Shape 13"/>
+          <p:cNvSpPr/>
+          <p:nvPr/>
+        </p:nvSpPr>
+        <p:spPr>
+          <a:xfrm>
+            <a:off x="3017520" y="1828800"/>
+            <a:ext cx="0" cy="3840480"/>
+          </a:xfrm>
+          <a:prstGeom prst="line">
+            <a:avLst/>
+          </a:prstGeom>
+          <a:noFill/>
+          <a:ln w="9525">
+            <a:solidFill>
+              <a:srgbClr val="E3E0DA"/>
+            </a:solidFill>
+            <a:prstDash val="solid"/>
+          </a:ln>
+        </p:spPr>
+      </p:sp>
+      <p:sp>
+        <p:nvSpPr>
+          <p:cNvPr id="16" name="Shape 14"/>
+          <p:cNvSpPr/>
+          <p:nvPr/>
+        </p:nvSpPr>
+        <p:spPr>
+          <a:xfrm>
+            <a:off x="3246120" y="1828800"/>
+            <a:ext cx="3749040" cy="2834640"/>
+          </a:xfrm>
+          <a:prstGeom prst="roundRect">
+            <a:avLst>
+              <a:gd name="adj" fmla="val 1290"/>
+            </a:avLst>
+          </a:prstGeom>
+          <a:solidFill>
+            <a:srgbClr val="F4F2ED"/>
+          </a:solidFill>
+          <a:ln w="9525">
+            <a:solidFill>
+              <a:srgbClr val="E3E0DA"/>
+            </a:solidFill>
+            <a:prstDash val="solid"/>
+          </a:ln>
+        </p:spPr>
+      </p:sp>
+      <p:sp>
+        <p:nvSpPr>
+          <p:cNvPr id="17" name="Text 15"/>
+          <p:cNvSpPr/>
+          <p:nvPr/>
+        </p:nvSpPr>
+        <p:spPr>
+          <a:xfrm>
+            <a:off x="3429000" y="1965960"/>
+            <a:ext cx="3474720" cy="274320"/>
+          </a:xfrm>
+          <a:prstGeom prst="rect">
+            <a:avLst/>
+          </a:prstGeom>
+          <a:noFill/>
+          <a:ln/>
+        </p:spPr>
+        <p:txBody>
+          <a:bodyPr wrap="square" lIns="0" tIns="0" rIns="0" bIns="0" rtlCol="0" anchor="ctr"/>
+          <a:lstStyle/>
+          <a:p>
+            <a:pPr indent="0" marL="0">
+              <a:buNone/>
+            </a:pPr>
+            <a:r>
+              <a:rPr lang="en-US" sz="950" dirty="0">
+                <a:solidFill>
+                  <a:srgbClr val="6A727C"/>
                 </a:solidFill>
                 <a:latin typeface="Courier New" pitchFamily="34" charset="0"/>
                 <a:ea typeface="Courier New" pitchFamily="34" charset="-122"/>
                 <a:cs typeface="Courier New" pitchFamily="34" charset="-120"/>
               </a:rPr>
-              <a:t>mean 1.17 submissions · 33 seconds per encounter</a:t>
+              <a:t>Coder agent is assigning ICD-10-CM + CPT</a:t>
+            </a:r>
+            <a:endParaRPr lang="en-US" sz="950" dirty="0"/>
+          </a:p>
+        </p:txBody>
+      </p:sp>
+      <p:sp>
+        <p:nvSpPr>
+          <p:cNvPr id="18" name="Text 16"/>
+          <p:cNvSpPr/>
+          <p:nvPr/>
+        </p:nvSpPr>
+        <p:spPr>
+          <a:xfrm>
+            <a:off x="3429000" y="2249424"/>
+            <a:ext cx="3474720" cy="274320"/>
+          </a:xfrm>
+          <a:prstGeom prst="rect">
+            <a:avLst/>
+          </a:prstGeom>
+          <a:noFill/>
+          <a:ln/>
+        </p:spPr>
+        <p:txBody>
+          <a:bodyPr wrap="square" lIns="0" tIns="0" rIns="0" bIns="0" rtlCol="0" anchor="ctr"/>
+          <a:lstStyle/>
+          <a:p>
+            <a:pPr indent="0" marL="0">
+              <a:buNone/>
+            </a:pPr>
+            <a:r>
+              <a:rPr lang="en-US" sz="950" dirty="0">
+                <a:solidFill>
+                  <a:srgbClr val="8A6116"/>
+                </a:solidFill>
+                <a:latin typeface="Courier New" pitchFamily="34" charset="0"/>
+                <a:ea typeface="Courier New" pitchFamily="34" charset="-122"/>
+                <a:cs typeface="Courier New" pitchFamily="34" charset="-120"/>
+              </a:rPr>
+              <a:t>tool&gt; search_icd10({"query":</a:t>
+            </a:r>
+            <a:endParaRPr lang="en-US" sz="950" dirty="0"/>
+          </a:p>
+        </p:txBody>
+      </p:sp>
+      <p:sp>
+        <p:nvSpPr>
+          <p:cNvPr id="19" name="Text 17"/>
+          <p:cNvSpPr/>
+          <p:nvPr/>
+        </p:nvSpPr>
+        <p:spPr>
+          <a:xfrm>
+            <a:off x="3429000" y="2532888"/>
+            <a:ext cx="3474720" cy="274320"/>
+          </a:xfrm>
+          <a:prstGeom prst="rect">
+            <a:avLst/>
+          </a:prstGeom>
+          <a:noFill/>
+          <a:ln/>
+        </p:spPr>
+        <p:txBody>
+          <a:bodyPr wrap="square" lIns="0" tIns="0" rIns="0" bIns="0" rtlCol="0" anchor="ctr"/>
+          <a:lstStyle/>
+          <a:p>
+            <a:pPr indent="0" marL="0">
+              <a:buNone/>
+            </a:pPr>
+            <a:r>
+              <a:rPr lang="en-US" sz="950" dirty="0">
+                <a:solidFill>
+                  <a:srgbClr val="8A6116"/>
+                </a:solidFill>
+                <a:latin typeface="Courier New" pitchFamily="34" charset="0"/>
+                <a:ea typeface="Courier New" pitchFamily="34" charset="-122"/>
+                <a:cs typeface="Courier New" pitchFamily="34" charset="-120"/>
+              </a:rPr>
+              <a:t>      "right knee pain"})</a:t>
+            </a:r>
+            <a:endParaRPr lang="en-US" sz="950" dirty="0"/>
+          </a:p>
+        </p:txBody>
+      </p:sp>
+      <p:sp>
+        <p:nvSpPr>
+          <p:cNvPr id="20" name="Text 18"/>
+          <p:cNvSpPr/>
+          <p:nvPr/>
+        </p:nvSpPr>
+        <p:spPr>
+          <a:xfrm>
+            <a:off x="3429000" y="2816352"/>
+            <a:ext cx="3474720" cy="274320"/>
+          </a:xfrm>
+          <a:prstGeom prst="rect">
+            <a:avLst/>
+          </a:prstGeom>
+          <a:noFill/>
+          <a:ln/>
+        </p:spPr>
+        <p:txBody>
+          <a:bodyPr wrap="square" lIns="0" tIns="0" rIns="0" bIns="0" rtlCol="0" anchor="ctr"/>
+          <a:lstStyle/>
+          <a:p>
+            <a:pPr indent="0" marL="0">
+              <a:buNone/>
+            </a:pPr>
+            <a:r>
+              <a:rPr lang="en-US" sz="950" dirty="0">
+                <a:solidFill>
+                  <a:srgbClr val="2E7D4F"/>
+                </a:solidFill>
+                <a:latin typeface="Courier New" pitchFamily="34" charset="0"/>
+                <a:ea typeface="Courier New" pitchFamily="34" charset="-122"/>
+                <a:cs typeface="Courier New" pitchFamily="34" charset="-120"/>
+              </a:rPr>
+              <a:t>  -&gt; [{"code": "M25.561",</a:t>
+            </a:r>
+            <a:endParaRPr lang="en-US" sz="950" dirty="0"/>
+          </a:p>
+        </p:txBody>
+      </p:sp>
+      <p:sp>
+        <p:nvSpPr>
+          <p:cNvPr id="21" name="Text 19"/>
+          <p:cNvSpPr/>
+          <p:nvPr/>
+        </p:nvSpPr>
+        <p:spPr>
+          <a:xfrm>
+            <a:off x="3429000" y="3099816"/>
+            <a:ext cx="3474720" cy="274320"/>
+          </a:xfrm>
+          <a:prstGeom prst="rect">
+            <a:avLst/>
+          </a:prstGeom>
+          <a:noFill/>
+          <a:ln/>
+        </p:spPr>
+        <p:txBody>
+          <a:bodyPr wrap="square" lIns="0" tIns="0" rIns="0" bIns="0" rtlCol="0" anchor="ctr"/>
+          <a:lstStyle/>
+          <a:p>
+            <a:pPr indent="0" marL="0">
+              <a:buNone/>
+            </a:pPr>
+            <a:r>
+              <a:rPr lang="en-US" sz="950" dirty="0">
+                <a:solidFill>
+                  <a:srgbClr val="2E7D4F"/>
+                </a:solidFill>
+                <a:latin typeface="Courier New" pitchFamily="34" charset="0"/>
+                <a:ea typeface="Courier New" pitchFamily="34" charset="-122"/>
+                <a:cs typeface="Courier New" pitchFamily="34" charset="-120"/>
+              </a:rPr>
+              <a:t>      "name": "Pain in right knee"}]</a:t>
+            </a:r>
+            <a:endParaRPr lang="en-US" sz="950" dirty="0"/>
+          </a:p>
+        </p:txBody>
+      </p:sp>
+      <p:sp>
+        <p:nvSpPr>
+          <p:cNvPr id="22" name="Text 20"/>
+          <p:cNvSpPr/>
+          <p:nvPr/>
+        </p:nvSpPr>
+        <p:spPr>
+          <a:xfrm>
+            <a:off x="3429000" y="3383280"/>
+            <a:ext cx="3474720" cy="274320"/>
+          </a:xfrm>
+          <a:prstGeom prst="rect">
+            <a:avLst/>
+          </a:prstGeom>
+          <a:noFill/>
+          <a:ln/>
+        </p:spPr>
+        <p:txBody>
+          <a:bodyPr wrap="square" lIns="0" tIns="0" rIns="0" bIns="0" rtlCol="0" anchor="ctr"/>
+          <a:lstStyle/>
+          <a:p>
+            <a:pPr indent="0" marL="0">
+              <a:buNone/>
+            </a:pPr>
+            <a:r>
+              <a:rPr lang="en-US" sz="950" dirty="0">
+                <a:solidFill>
+                  <a:srgbClr val="6A727C"/>
+                </a:solidFill>
+                <a:latin typeface="Courier New" pitchFamily="34" charset="0"/>
+                <a:ea typeface="Courier New" pitchFamily="34" charset="-122"/>
+                <a:cs typeface="Courier New" pitchFamily="34" charset="-120"/>
+              </a:rPr>
+              <a:t>{ "diagnoses": [ { "icd10_code":</a:t>
+            </a:r>
+            <a:endParaRPr lang="en-US" sz="950" dirty="0"/>
+          </a:p>
+        </p:txBody>
+      </p:sp>
+      <p:sp>
+        <p:nvSpPr>
+          <p:cNvPr id="23" name="Text 21"/>
+          <p:cNvSpPr/>
+          <p:nvPr/>
+        </p:nvSpPr>
+        <p:spPr>
+          <a:xfrm>
+            <a:off x="3429000" y="3666744"/>
+            <a:ext cx="3474720" cy="274320"/>
+          </a:xfrm>
+          <a:prstGeom prst="rect">
+            <a:avLst/>
+          </a:prstGeom>
+          <a:noFill/>
+          <a:ln/>
+        </p:spPr>
+        <p:txBody>
+          <a:bodyPr wrap="square" lIns="0" tIns="0" rIns="0" bIns="0" rtlCol="0" anchor="ctr"/>
+          <a:lstStyle/>
+          <a:p>
+            <a:pPr indent="0" marL="0">
+              <a:buNone/>
+            </a:pPr>
+            <a:r>
+              <a:rPr lang="en-US" sz="950" dirty="0">
+                <a:solidFill>
+                  <a:srgbClr val="6A727C"/>
+                </a:solidFill>
+                <a:latin typeface="Courier New" pitchFamily="34" charset="0"/>
+                <a:ea typeface="Courier New" pitchFamily="34" charset="-122"/>
+                <a:cs typeface="Courier New" pitchFamily="34" charset="-120"/>
+              </a:rPr>
+              <a:t>    "M25.561", ...</a:t>
+            </a:r>
+            <a:endParaRPr lang="en-US" sz="950" dirty="0"/>
+          </a:p>
+        </p:txBody>
+      </p:sp>
+      <p:sp>
+        <p:nvSpPr>
+          <p:cNvPr id="24" name="Text 22"/>
+          <p:cNvSpPr/>
+          <p:nvPr/>
+        </p:nvSpPr>
+        <p:spPr>
+          <a:xfrm>
+            <a:off x="3429000" y="3950208"/>
+            <a:ext cx="3474720" cy="274320"/>
+          </a:xfrm>
+          <a:prstGeom prst="rect">
+            <a:avLst/>
+          </a:prstGeom>
+          <a:noFill/>
+          <a:ln/>
+        </p:spPr>
+        <p:txBody>
+          <a:bodyPr wrap="square" lIns="0" tIns="0" rIns="0" bIns="0" rtlCol="0" anchor="ctr"/>
+          <a:lstStyle/>
+          <a:p>
+            <a:pPr indent="0" marL="0">
+              <a:buNone/>
+            </a:pPr>
+            <a:r>
+              <a:rPr lang="en-US" sz="950" dirty="0">
+                <a:solidFill>
+                  <a:srgbClr val="8A6116"/>
+                </a:solidFill>
+                <a:latin typeface="Courier New" pitchFamily="34" charset="0"/>
+                <a:ea typeface="Courier New" pitchFamily="34" charset="-122"/>
+                <a:cs typeface="Courier New" pitchFamily="34" charset="-120"/>
+              </a:rPr>
+              <a:t>tool&gt; request_prior_auth(</a:t>
+            </a:r>
+            <a:endParaRPr lang="en-US" sz="950" dirty="0"/>
+          </a:p>
+        </p:txBody>
+      </p:sp>
+      <p:sp>
+        <p:nvSpPr>
+          <p:cNvPr id="25" name="Text 23"/>
+          <p:cNvSpPr/>
+          <p:nvPr/>
+        </p:nvSpPr>
+        <p:spPr>
+          <a:xfrm>
+            <a:off x="3429000" y="4233672"/>
+            <a:ext cx="3474720" cy="274320"/>
+          </a:xfrm>
+          <a:prstGeom prst="rect">
+            <a:avLst/>
+          </a:prstGeom>
+          <a:noFill/>
+          <a:ln/>
+        </p:spPr>
+        <p:txBody>
+          <a:bodyPr wrap="square" lIns="0" tIns="0" rIns="0" bIns="0" rtlCol="0" anchor="ctr"/>
+          <a:lstStyle/>
+          <a:p>
+            <a:pPr indent="0" marL="0">
+              <a:buNone/>
+            </a:pPr>
+            <a:r>
+              <a:rPr lang="en-US" sz="950" dirty="0">
+                <a:solidFill>
+                  <a:srgbClr val="2E7D4F"/>
+                </a:solidFill>
+                <a:latin typeface="Courier New" pitchFamily="34" charset="0"/>
+                <a:ea typeface="Courier New" pitchFamily="34" charset="-122"/>
+                <a:cs typeface="Courier New" pitchFamily="34" charset="-120"/>
+              </a:rPr>
+              <a:t>  -&gt; {"status": "approved"}</a:t>
+            </a:r>
+            <a:endParaRPr lang="en-US" sz="950" dirty="0"/>
+          </a:p>
+        </p:txBody>
+      </p:sp>
+      <p:sp>
+        <p:nvSpPr>
+          <p:cNvPr id="26" name="Text 24"/>
+          <p:cNvSpPr/>
+          <p:nvPr/>
+        </p:nvSpPr>
+        <p:spPr>
+          <a:xfrm>
+            <a:off x="3246120" y="4937760"/>
+            <a:ext cx="3840480" cy="548640"/>
+          </a:xfrm>
+          <a:prstGeom prst="rect">
+            <a:avLst/>
+          </a:prstGeom>
+          <a:noFill/>
+          <a:ln/>
+        </p:spPr>
+        <p:txBody>
+          <a:bodyPr wrap="square" lIns="0" tIns="0" rIns="0" bIns="0" rtlCol="0" anchor="ctr"/>
+          <a:lstStyle/>
+          <a:p>
+            <a:pPr indent="0" marL="0">
+              <a:buNone/>
+            </a:pPr>
+            <a:r>
+              <a:rPr lang="en-US" sz="1050" dirty="0">
+                <a:solidFill>
+                  <a:srgbClr val="6A727C"/>
+                </a:solidFill>
+                <a:latin typeface="Courier New" pitchFamily="34" charset="0"/>
+                <a:ea typeface="Courier New" pitchFamily="34" charset="-122"/>
+                <a:cs typeface="Courier New" pitchFamily="34" charset="-120"/>
+              </a:rPr>
+              <a:t>submission 1: </a:t>
+            </a:r>
+            <a:pPr indent="0" marL="0">
+              <a:buNone/>
+            </a:pPr>
+            <a:r>
+              <a:rPr lang="en-US" sz="1050" b="1" dirty="0">
+                <a:solidFill>
+                  <a:srgbClr val="A8402F"/>
+                </a:solidFill>
+                <a:latin typeface="Courier New" pitchFamily="34" charset="0"/>
+                <a:ea typeface="Courier New" pitchFamily="34" charset="-122"/>
+                <a:cs typeface="Courier New" pitchFamily="34" charset="-120"/>
+              </a:rPr>
+              <a:t>denied CO-197</a:t>
+            </a:r>
+            <a:pPr indent="0" marL="0">
+              <a:buNone/>
+            </a:pPr>
+            <a:r>
+              <a:rPr lang="en-US" sz="1050" dirty="0">
+                <a:solidFill>
+                  <a:srgbClr val="6A727C"/>
+                </a:solidFill>
+                <a:latin typeface="Courier New" pitchFamily="34" charset="0"/>
+                <a:ea typeface="Courier New" pitchFamily="34" charset="-122"/>
+                <a:cs typeface="Courier New" pitchFamily="34" charset="-120"/>
+              </a:rPr>
+              <a:t>   submission 2: </a:t>
+            </a:r>
+            <a:pPr indent="0" marL="0">
+              <a:buNone/>
+            </a:pPr>
+            <a:r>
+              <a:rPr lang="en-US" sz="1050" b="1" dirty="0">
+                <a:solidFill>
+                  <a:srgbClr val="2E7D4F"/>
+                </a:solidFill>
+                <a:latin typeface="Courier New" pitchFamily="34" charset="0"/>
+                <a:ea typeface="Courier New" pitchFamily="34" charset="-122"/>
+                <a:cs typeface="Courier New" pitchFamily="34" charset="-120"/>
+              </a:rPr>
+              <a:t>accepted, paid</a:t>
+            </a:r>
+            <a:endParaRPr lang="en-US" sz="1050" dirty="0"/>
+          </a:p>
+        </p:txBody>
+      </p:sp>
+      <p:sp>
+        <p:nvSpPr>
+          <p:cNvPr id="27" name="Shape 25"/>
+          <p:cNvSpPr/>
+          <p:nvPr/>
+        </p:nvSpPr>
+        <p:spPr>
+          <a:xfrm>
+            <a:off x="7543800" y="1709928"/>
+            <a:ext cx="82296" cy="82296"/>
+          </a:xfrm>
+          <a:prstGeom prst="rect">
+            <a:avLst/>
+          </a:prstGeom>
+          <a:solidFill>
+            <a:srgbClr val="35639C"/>
+          </a:solidFill>
+          <a:ln/>
+        </p:spPr>
+      </p:sp>
+      <p:sp>
+        <p:nvSpPr>
+          <p:cNvPr id="28" name="Text 26"/>
+          <p:cNvSpPr/>
+          <p:nvPr/>
+        </p:nvSpPr>
+        <p:spPr>
+          <a:xfrm>
+            <a:off x="7754112" y="1572768"/>
+            <a:ext cx="3886200" cy="777240"/>
+          </a:xfrm>
+          <a:prstGeom prst="rect">
+            <a:avLst/>
+          </a:prstGeom>
+          <a:noFill/>
+          <a:ln/>
+        </p:spPr>
+        <p:txBody>
+          <a:bodyPr wrap="square" lIns="0" tIns="0" rIns="0" bIns="0" rtlCol="0" anchor="ctr"/>
+          <a:lstStyle/>
+          <a:p>
+            <a:pPr indent="0" marL="0">
+              <a:buNone/>
+            </a:pPr>
+            <a:r>
+              <a:rPr lang="en-US" sz="1250" dirty="0">
+                <a:solidFill>
+                  <a:srgbClr val="23272C"/>
+                </a:solidFill>
+                <a:latin typeface="Calibri" pitchFamily="34" charset="0"/>
+                <a:ea typeface="Calibri" pitchFamily="34" charset="-122"/>
+                <a:cs typeface="Calibri" pitchFamily="34" charset="-120"/>
+              </a:rPr>
+              <a:t>The encounter transcript is first-class: read the visit before the agents touch it</a:t>
+            </a:r>
+            <a:endParaRPr lang="en-US" sz="1250" dirty="0"/>
+          </a:p>
+        </p:txBody>
+      </p:sp>
+      <p:sp>
+        <p:nvSpPr>
+          <p:cNvPr id="29" name="Shape 27"/>
+          <p:cNvSpPr/>
+          <p:nvPr/>
+        </p:nvSpPr>
+        <p:spPr>
+          <a:xfrm>
+            <a:off x="7543800" y="2551176"/>
+            <a:ext cx="82296" cy="82296"/>
+          </a:xfrm>
+          <a:prstGeom prst="rect">
+            <a:avLst/>
+          </a:prstGeom>
+          <a:solidFill>
+            <a:srgbClr val="35639C"/>
+          </a:solidFill>
+          <a:ln/>
+        </p:spPr>
+      </p:sp>
+      <p:sp>
+        <p:nvSpPr>
+          <p:cNvPr id="30" name="Text 28"/>
+          <p:cNvSpPr/>
+          <p:nvPr/>
+        </p:nvSpPr>
+        <p:spPr>
+          <a:xfrm>
+            <a:off x="7754112" y="2414016"/>
+            <a:ext cx="3886200" cy="777240"/>
+          </a:xfrm>
+          <a:prstGeom prst="rect">
+            <a:avLst/>
+          </a:prstGeom>
+          <a:noFill/>
+          <a:ln/>
+        </p:spPr>
+        <p:txBody>
+          <a:bodyPr wrap="square" lIns="0" tIns="0" rIns="0" bIns="0" rtlCol="0" anchor="ctr"/>
+          <a:lstStyle/>
+          <a:p>
+            <a:pPr indent="0" marL="0">
+              <a:buNone/>
+            </a:pPr>
+            <a:r>
+              <a:rPr lang="en-US" sz="1250" dirty="0">
+                <a:solidFill>
+                  <a:srgbClr val="23272C"/>
+                </a:solidFill>
+                <a:latin typeface="Calibri" pitchFamily="34" charset="0"/>
+                <a:ea typeface="Calibri" pitchFamily="34" charset="-122"/>
+                <a:cs typeface="Calibri" pitchFamily="34" charset="-120"/>
+              </a:rPr>
+              <a:t>A live activity log: model output streaming, tool calls, retries, per stage</a:t>
+            </a:r>
+            <a:endParaRPr lang="en-US" sz="1250" dirty="0"/>
+          </a:p>
+        </p:txBody>
+      </p:sp>
+      <p:sp>
+        <p:nvSpPr>
+          <p:cNvPr id="31" name="Shape 29"/>
+          <p:cNvSpPr/>
+          <p:nvPr/>
+        </p:nvSpPr>
+        <p:spPr>
+          <a:xfrm>
+            <a:off x="7543800" y="3392424"/>
+            <a:ext cx="82296" cy="82296"/>
+          </a:xfrm>
+          <a:prstGeom prst="rect">
+            <a:avLst/>
+          </a:prstGeom>
+          <a:solidFill>
+            <a:srgbClr val="35639C"/>
+          </a:solidFill>
+          <a:ln/>
+        </p:spPr>
+      </p:sp>
+      <p:sp>
+        <p:nvSpPr>
+          <p:cNvPr id="32" name="Text 30"/>
+          <p:cNvSpPr/>
+          <p:nvPr/>
+        </p:nvSpPr>
+        <p:spPr>
+          <a:xfrm>
+            <a:off x="7754112" y="3255264"/>
+            <a:ext cx="3886200" cy="777240"/>
+          </a:xfrm>
+          <a:prstGeom prst="rect">
+            <a:avLst/>
+          </a:prstGeom>
+          <a:noFill/>
+          <a:ln/>
+        </p:spPr>
+        <p:txBody>
+          <a:bodyPr wrap="square" lIns="0" tIns="0" rIns="0" bIns="0" rtlCol="0" anchor="ctr"/>
+          <a:lstStyle/>
+          <a:p>
+            <a:pPr indent="0" marL="0">
+              <a:buNone/>
+            </a:pPr>
+            <a:r>
+              <a:rPr lang="en-US" sz="1250" dirty="0">
+                <a:solidFill>
+                  <a:srgbClr val="23272C"/>
+                </a:solidFill>
+                <a:latin typeface="Calibri" pitchFamily="34" charset="0"/>
+                <a:ea typeface="Calibri" pitchFamily="34" charset="-122"/>
+                <a:cs typeface="Calibri" pitchFamily="34" charset="-120"/>
+              </a:rPr>
+              <a:t>The claim renders as a claim document (patient, provider, diagnoses, service lines), not raw JSON</a:t>
+            </a:r>
+            <a:endParaRPr lang="en-US" sz="1250" dirty="0"/>
+          </a:p>
+        </p:txBody>
+      </p:sp>
+      <p:sp>
+        <p:nvSpPr>
+          <p:cNvPr id="33" name="Shape 31"/>
+          <p:cNvSpPr/>
+          <p:nvPr/>
+        </p:nvSpPr>
+        <p:spPr>
+          <a:xfrm>
+            <a:off x="7543800" y="4233672"/>
+            <a:ext cx="82296" cy="82296"/>
+          </a:xfrm>
+          <a:prstGeom prst="rect">
+            <a:avLst/>
+          </a:prstGeom>
+          <a:solidFill>
+            <a:srgbClr val="35639C"/>
+          </a:solidFill>
+          <a:ln/>
+        </p:spPr>
+      </p:sp>
+      <p:sp>
+        <p:nvSpPr>
+          <p:cNvPr id="34" name="Text 32"/>
+          <p:cNvSpPr/>
+          <p:nvPr/>
+        </p:nvSpPr>
+        <p:spPr>
+          <a:xfrm>
+            <a:off x="7754112" y="4096512"/>
+            <a:ext cx="3886200" cy="777240"/>
+          </a:xfrm>
+          <a:prstGeom prst="rect">
+            <a:avLst/>
+          </a:prstGeom>
+          <a:noFill/>
+          <a:ln/>
+        </p:spPr>
+        <p:txBody>
+          <a:bodyPr wrap="square" lIns="0" tIns="0" rIns="0" bIns="0" rtlCol="0" anchor="ctr"/>
+          <a:lstStyle/>
+          <a:p>
+            <a:pPr indent="0" marL="0">
+              <a:buNone/>
+            </a:pPr>
+            <a:r>
+              <a:rPr lang="en-US" sz="1250" dirty="0">
+                <a:solidFill>
+                  <a:srgbClr val="23272C"/>
+                </a:solidFill>
+                <a:latin typeface="Calibri" pitchFamily="34" charset="0"/>
+                <a:ea typeface="Calibri" pitchFamily="34" charset="-122"/>
+                <a:cs typeface="Calibri" pitchFamily="34" charset="-120"/>
+              </a:rPr>
+              <a:t>Verdicts carry the payer's reason codes; resolutions and appeal letters are shown in full</a:t>
+            </a:r>
+            <a:endParaRPr lang="en-US" sz="1250" dirty="0"/>
+          </a:p>
+        </p:txBody>
+      </p:sp>
+      <p:sp>
+        <p:nvSpPr>
+          <p:cNvPr id="35" name="Shape 33"/>
+          <p:cNvSpPr/>
+          <p:nvPr/>
+        </p:nvSpPr>
+        <p:spPr>
+          <a:xfrm>
+            <a:off x="7543800" y="5074920"/>
+            <a:ext cx="82296" cy="82296"/>
+          </a:xfrm>
+          <a:prstGeom prst="rect">
+            <a:avLst/>
+          </a:prstGeom>
+          <a:solidFill>
+            <a:srgbClr val="35639C"/>
+          </a:solidFill>
+          <a:ln/>
+        </p:spPr>
+      </p:sp>
+      <p:sp>
+        <p:nvSpPr>
+          <p:cNvPr id="36" name="Text 34"/>
+          <p:cNvSpPr/>
+          <p:nvPr/>
+        </p:nvSpPr>
+        <p:spPr>
+          <a:xfrm>
+            <a:off x="7754112" y="4937760"/>
+            <a:ext cx="3886200" cy="777240"/>
+          </a:xfrm>
+          <a:prstGeom prst="rect">
+            <a:avLst/>
+          </a:prstGeom>
+          <a:noFill/>
+          <a:ln/>
+        </p:spPr>
+        <p:txBody>
+          <a:bodyPr wrap="square" lIns="0" tIns="0" rIns="0" bIns="0" rtlCol="0" anchor="ctr"/>
+          <a:lstStyle/>
+          <a:p>
+            <a:pPr indent="0" marL="0">
+              <a:buNone/>
+            </a:pPr>
+            <a:r>
+              <a:rPr lang="en-US" sz="1250" dirty="0">
+                <a:solidFill>
+                  <a:srgbClr val="23272C"/>
+                </a:solidFill>
+                <a:latin typeface="Calibri" pitchFamily="34" charset="0"/>
+                <a:ea typeface="Calibri" pitchFamily="34" charset="-122"/>
+                <a:cs typeface="Calibri" pitchFamily="34" charset="-120"/>
+              </a:rPr>
+              <a:t>A mock playback mode demos the interface without spending tokens</a:t>
+            </a:r>
+            <a:endParaRPr lang="en-US" sz="1250" dirty="0"/>
+          </a:p>
+        </p:txBody>
+      </p:sp>
+      <p:sp>
+        <p:nvSpPr>
+          <p:cNvPr id="37" name="Text 35"/>
+          <p:cNvSpPr/>
+          <p:nvPr/>
+        </p:nvSpPr>
+        <p:spPr>
+          <a:xfrm>
+            <a:off x="7754112" y="5806440"/>
+            <a:ext cx="3657600" cy="320040"/>
+          </a:xfrm>
+          <a:prstGeom prst="rect">
+            <a:avLst/>
+          </a:prstGeom>
+          <a:noFill/>
+          <a:ln/>
+        </p:spPr>
+        <p:txBody>
+          <a:bodyPr wrap="square" lIns="0" tIns="0" rIns="0" bIns="0" rtlCol="0" anchor="ctr"/>
+          <a:lstStyle/>
+          <a:p>
+            <a:pPr indent="0" marL="0">
+              <a:buNone/>
+            </a:pPr>
+            <a:r>
+              <a:rPr lang="en-US" sz="1150" i="1" dirty="0">
+                <a:solidFill>
+                  <a:srgbClr val="9AA1AA"/>
+                </a:solidFill>
+                <a:latin typeface="Calibri" pitchFamily="34" charset="0"/>
+                <a:ea typeface="Calibri" pitchFamily="34" charset="-122"/>
+                <a:cs typeface="Calibri" pitchFamily="34" charset="-120"/>
+              </a:rPr>
+              <a:t>(live demo in the video)</a:t>
             </a:r>
             <a:endParaRPr lang="en-US" sz="1150" dirty="0"/>
           </a:p>
@@ -9783,7 +11448,7 @@
                 <a:ea typeface="Cambria" pitchFamily="34" charset="-122"/>
                 <a:cs typeface="Cambria" pitchFamily="34" charset="-120"/>
               </a:rPr>
-              <a:t>What the loop can and cannot fix</a:t>
+              <a:t>Sixty encounters, end to end</a:t>
             </a:r>
             <a:endParaRPr lang="en-US" sz="2900" dirty="0"/>
           </a:p>
@@ -9797,7 +11462,7 @@
         </p:nvGraphicFramePr>
         <p:xfrm>
           <a:off x="594360" y="1691640"/>
-          <a:ext cx="6583680" cy="3840480"/>
+          <a:ext cx="6766560" cy="3840480"/>
         </p:xfrm>
         <a:graphic xmlns:a="http://schemas.openxmlformats.org/drawingml/2006/main">
           <a:graphicData uri="http://schemas.openxmlformats.org/drawingml/2006/chart">
@@ -9813,368 +11478,188 @@
         </p:nvSpPr>
         <p:spPr>
           <a:xfrm>
-            <a:off x="7452360" y="1691640"/>
-            <a:ext cx="740664" cy="292608"/>
-          </a:xfrm>
-          <a:prstGeom prst="roundRect">
-            <a:avLst>
-              <a:gd name="adj" fmla="val 10938"/>
-            </a:avLst>
-          </a:prstGeom>
-          <a:solidFill>
-            <a:srgbClr val="FFFFFF"/>
-          </a:solidFill>
-          <a:ln w="9525">
-            <a:solidFill>
-              <a:srgbClr val="CFCBC2"/>
-            </a:solidFill>
-          </a:ln>
-        </p:spPr>
-        <p:txBody>
-          <a:bodyPr wrap="square" lIns="0" tIns="0" rIns="0" bIns="0" rtlCol="0" anchor="ctr"/>
-          <a:lstStyle/>
-          <a:p>
-            <a:pPr algn="ctr" indent="0" marL="0">
-              <a:buNone/>
-            </a:pPr>
-            <a:r>
-              <a:rPr lang="en-US" sz="1050" b="1" dirty="0">
+            <a:off x="7863840" y="1691640"/>
+            <a:ext cx="3657600" cy="822960"/>
+          </a:xfrm>
+          <a:prstGeom prst="rect">
+            <a:avLst/>
+          </a:prstGeom>
+          <a:noFill/>
+          <a:ln/>
+        </p:spPr>
+        <p:txBody>
+          <a:bodyPr wrap="square" lIns="0" tIns="0" rIns="0" bIns="0" rtlCol="0" anchor="ctr"/>
+          <a:lstStyle/>
+          <a:p>
+            <a:pPr indent="0" marL="0">
+              <a:buNone/>
+            </a:pPr>
+            <a:r>
+              <a:rPr lang="en-US" sz="4600" b="1" dirty="0">
                 <a:solidFill>
                   <a:srgbClr val="2E7D4F"/>
+                </a:solidFill>
+                <a:latin typeface="Cambria" pitchFamily="34" charset="0"/>
+                <a:ea typeface="Cambria" pitchFamily="34" charset="-122"/>
+                <a:cs typeface="Cambria" pitchFamily="34" charset="-120"/>
+              </a:rPr>
+              <a:t>83.3%</a:t>
+            </a:r>
+            <a:endParaRPr lang="en-US" sz="4600" dirty="0"/>
+          </a:p>
+        </p:txBody>
+      </p:sp>
+      <p:sp>
+        <p:nvSpPr>
+          <p:cNvPr id="6" name="Text 3"/>
+          <p:cNvSpPr/>
+          <p:nvPr/>
+        </p:nvSpPr>
+        <p:spPr>
+          <a:xfrm>
+            <a:off x="7863840" y="2532888"/>
+            <a:ext cx="3657600" cy="822960"/>
+          </a:xfrm>
+          <a:prstGeom prst="rect">
+            <a:avLst/>
+          </a:prstGeom>
+          <a:noFill/>
+          <a:ln/>
+        </p:spPr>
+        <p:txBody>
+          <a:bodyPr wrap="square" lIns="0" tIns="0" rIns="0" bIns="0" rtlCol="0" anchor="ctr"/>
+          <a:lstStyle/>
+          <a:p>
+            <a:pPr indent="0" marL="0">
+              <a:buNone/>
+            </a:pPr>
+            <a:r>
+              <a:rPr lang="en-US" sz="1250" dirty="0">
+                <a:solidFill>
+                  <a:srgbClr val="6A727C"/>
+                </a:solidFill>
+                <a:latin typeface="Calibri" pitchFamily="34" charset="0"/>
+                <a:ea typeface="Calibri" pitchFamily="34" charset="-122"/>
+                <a:cs typeface="Calibri" pitchFamily="34" charset="-120"/>
+              </a:rPr>
+              <a:t>of claims accepted on the first submission</a:t>
+            </a:r>
+            <a:endParaRPr lang="en-US" sz="1250" dirty="0"/>
+          </a:p>
+        </p:txBody>
+      </p:sp>
+      <p:sp>
+        <p:nvSpPr>
+          <p:cNvPr id="7" name="Text 4"/>
+          <p:cNvSpPr/>
+          <p:nvPr/>
+        </p:nvSpPr>
+        <p:spPr>
+          <a:xfrm>
+            <a:off x="7863840" y="3383280"/>
+            <a:ext cx="3657600" cy="822960"/>
+          </a:xfrm>
+          <a:prstGeom prst="rect">
+            <a:avLst/>
+          </a:prstGeom>
+          <a:noFill/>
+          <a:ln/>
+        </p:spPr>
+        <p:txBody>
+          <a:bodyPr wrap="square" lIns="0" tIns="0" rIns="0" bIns="0" rtlCol="0" anchor="ctr"/>
+          <a:lstStyle/>
+          <a:p>
+            <a:pPr indent="0" marL="0">
+              <a:buNone/>
+            </a:pPr>
+            <a:r>
+              <a:rPr lang="en-US" sz="4600" b="1" dirty="0">
+                <a:solidFill>
+                  <a:srgbClr val="35639C"/>
+                </a:solidFill>
+                <a:latin typeface="Cambria" pitchFamily="34" charset="0"/>
+                <a:ea typeface="Cambria" pitchFamily="34" charset="-122"/>
+                <a:cs typeface="Cambria" pitchFamily="34" charset="-120"/>
+              </a:rPr>
+              <a:t>96.7%</a:t>
+            </a:r>
+            <a:endParaRPr lang="en-US" sz="4600" dirty="0"/>
+          </a:p>
+        </p:txBody>
+      </p:sp>
+      <p:sp>
+        <p:nvSpPr>
+          <p:cNvPr id="8" name="Text 5"/>
+          <p:cNvSpPr/>
+          <p:nvPr/>
+        </p:nvSpPr>
+        <p:spPr>
+          <a:xfrm>
+            <a:off x="7863840" y="4224528"/>
+            <a:ext cx="3657600" cy="822960"/>
+          </a:xfrm>
+          <a:prstGeom prst="rect">
+            <a:avLst/>
+          </a:prstGeom>
+          <a:noFill/>
+          <a:ln/>
+        </p:spPr>
+        <p:txBody>
+          <a:bodyPr wrap="square" lIns="0" tIns="0" rIns="0" bIns="0" rtlCol="0" anchor="ctr"/>
+          <a:lstStyle/>
+          <a:p>
+            <a:pPr indent="0" marL="0">
+              <a:buNone/>
+            </a:pPr>
+            <a:r>
+              <a:rPr lang="en-US" sz="1250" dirty="0">
+                <a:solidFill>
+                  <a:srgbClr val="6A727C"/>
+                </a:solidFill>
+                <a:latin typeface="Calibri" pitchFamily="34" charset="0"/>
+                <a:ea typeface="Calibri" pitchFamily="34" charset="-122"/>
+                <a:cs typeface="Calibri" pitchFamily="34" charset="-120"/>
+              </a:rPr>
+              <a:t>final acceptance after the denial loop, 58 of 60 paid</a:t>
+            </a:r>
+            <a:endParaRPr lang="en-US" sz="1250" dirty="0"/>
+          </a:p>
+        </p:txBody>
+      </p:sp>
+      <p:sp>
+        <p:nvSpPr>
+          <p:cNvPr id="9" name="Text 6"/>
+          <p:cNvSpPr/>
+          <p:nvPr/>
+        </p:nvSpPr>
+        <p:spPr>
+          <a:xfrm>
+            <a:off x="7863840" y="5349240"/>
+            <a:ext cx="3657600" cy="457200"/>
+          </a:xfrm>
+          <a:prstGeom prst="rect">
+            <a:avLst/>
+          </a:prstGeom>
+          <a:noFill/>
+          <a:ln/>
+        </p:spPr>
+        <p:txBody>
+          <a:bodyPr wrap="square" lIns="0" tIns="0" rIns="0" bIns="0" rtlCol="0" anchor="ctr"/>
+          <a:lstStyle/>
+          <a:p>
+            <a:pPr indent="0" marL="0">
+              <a:buNone/>
+            </a:pPr>
+            <a:r>
+              <a:rPr lang="en-US" sz="1150" dirty="0">
+                <a:solidFill>
+                  <a:srgbClr val="9AA1AA"/>
                 </a:solidFill>
                 <a:latin typeface="Courier New" pitchFamily="34" charset="0"/>
                 <a:ea typeface="Courier New" pitchFamily="34" charset="-122"/>
                 <a:cs typeface="Courier New" pitchFamily="34" charset="-120"/>
               </a:rPr>
-              <a:t>CO-197</a:t>
-            </a:r>
-            <a:endParaRPr lang="en-US" sz="1050" dirty="0"/>
-          </a:p>
-        </p:txBody>
-      </p:sp>
-      <p:sp>
-        <p:nvSpPr>
-          <p:cNvPr id="6" name="Text 3"/>
-          <p:cNvSpPr/>
-          <p:nvPr/>
-        </p:nvSpPr>
-        <p:spPr>
-          <a:xfrm>
-            <a:off x="8549640" y="1664208"/>
-            <a:ext cx="3017520" cy="365760"/>
-          </a:xfrm>
-          <a:prstGeom prst="rect">
-            <a:avLst/>
-          </a:prstGeom>
-          <a:noFill/>
-          <a:ln/>
-        </p:spPr>
-        <p:txBody>
-          <a:bodyPr wrap="square" lIns="0" tIns="0" rIns="0" bIns="0" rtlCol="0" anchor="ctr"/>
-          <a:lstStyle/>
-          <a:p>
-            <a:pPr indent="0" marL="0">
-              <a:buNone/>
-            </a:pPr>
-            <a:r>
-              <a:rPr lang="en-US" sz="1350" b="1" dirty="0">
-                <a:solidFill>
-                  <a:srgbClr val="23272C"/>
-                </a:solidFill>
-                <a:latin typeface="Calibri" pitchFamily="34" charset="0"/>
-                <a:ea typeface="Calibri" pitchFamily="34" charset="-122"/>
-                <a:cs typeface="Calibri" pitchFamily="34" charset="-120"/>
-              </a:rPr>
-              <a:t>prior authorization</a:t>
-            </a:r>
-            <a:endParaRPr lang="en-US" sz="1350" dirty="0"/>
-          </a:p>
-        </p:txBody>
-      </p:sp>
-      <p:sp>
-        <p:nvSpPr>
-          <p:cNvPr id="7" name="Text 4"/>
-          <p:cNvSpPr/>
-          <p:nvPr/>
-        </p:nvSpPr>
-        <p:spPr>
-          <a:xfrm>
-            <a:off x="7452360" y="2057400"/>
-            <a:ext cx="4114800" cy="914400"/>
-          </a:xfrm>
-          <a:prstGeom prst="rect">
-            <a:avLst/>
-          </a:prstGeom>
-          <a:noFill/>
-          <a:ln/>
-        </p:spPr>
-        <p:txBody>
-          <a:bodyPr wrap="square" lIns="0" tIns="0" rIns="0" bIns="0" rtlCol="0" anchor="ctr"/>
-          <a:lstStyle/>
-          <a:p>
-            <a:pPr indent="0" marL="0">
-              <a:buNone/>
-            </a:pPr>
-            <a:r>
-              <a:rPr lang="en-US" sz="1150" dirty="0">
-                <a:solidFill>
-                  <a:srgbClr val="6A727C"/>
-                </a:solidFill>
-                <a:latin typeface="Calibri" pitchFamily="34" charset="0"/>
-                <a:ea typeface="Calibri" pitchFamily="34" charset="-122"/>
-                <a:cs typeface="Calibri" pitchFamily="34" charset="-120"/>
-              </a:rPr>
-              <a:t>2 of 2 automated away: the resolver calls the auth portal tool and resubmits with the number attached</a:t>
-            </a:r>
-            <a:endParaRPr lang="en-US" sz="1150" dirty="0"/>
-          </a:p>
-        </p:txBody>
-      </p:sp>
-      <p:sp>
-        <p:nvSpPr>
-          <p:cNvPr id="8" name="Text 5"/>
-          <p:cNvSpPr/>
-          <p:nvPr/>
-        </p:nvSpPr>
-        <p:spPr>
-          <a:xfrm>
-            <a:off x="7452360" y="3063240"/>
-            <a:ext cx="740664" cy="292608"/>
-          </a:xfrm>
-          <a:prstGeom prst="roundRect">
-            <a:avLst>
-              <a:gd name="adj" fmla="val 10938"/>
-            </a:avLst>
-          </a:prstGeom>
-          <a:solidFill>
-            <a:srgbClr val="FFFFFF"/>
-          </a:solidFill>
-          <a:ln w="9525">
-            <a:solidFill>
-              <a:srgbClr val="CFCBC2"/>
-            </a:solidFill>
-          </a:ln>
-        </p:spPr>
-        <p:txBody>
-          <a:bodyPr wrap="square" lIns="0" tIns="0" rIns="0" bIns="0" rtlCol="0" anchor="ctr"/>
-          <a:lstStyle/>
-          <a:p>
-            <a:pPr algn="ctr" indent="0" marL="0">
-              <a:buNone/>
-            </a:pPr>
-            <a:r>
-              <a:rPr lang="en-US" sz="1050" b="1" dirty="0">
-                <a:solidFill>
-                  <a:srgbClr val="2E7D4F"/>
-                </a:solidFill>
-                <a:latin typeface="Courier New" pitchFamily="34" charset="0"/>
-                <a:ea typeface="Courier New" pitchFamily="34" charset="-122"/>
-                <a:cs typeface="Courier New" pitchFamily="34" charset="-120"/>
-              </a:rPr>
-              <a:t>CO-150</a:t>
-            </a:r>
-            <a:endParaRPr lang="en-US" sz="1050" dirty="0"/>
-          </a:p>
-        </p:txBody>
-      </p:sp>
-      <p:sp>
-        <p:nvSpPr>
-          <p:cNvPr id="9" name="Text 6"/>
-          <p:cNvSpPr/>
-          <p:nvPr/>
-        </p:nvSpPr>
-        <p:spPr>
-          <a:xfrm>
-            <a:off x="8549640" y="3035808"/>
-            <a:ext cx="3017520" cy="365760"/>
-          </a:xfrm>
-          <a:prstGeom prst="rect">
-            <a:avLst/>
-          </a:prstGeom>
-          <a:noFill/>
-          <a:ln/>
-        </p:spPr>
-        <p:txBody>
-          <a:bodyPr wrap="square" lIns="0" tIns="0" rIns="0" bIns="0" rtlCol="0" anchor="ctr"/>
-          <a:lstStyle/>
-          <a:p>
-            <a:pPr indent="0" marL="0">
-              <a:buNone/>
-            </a:pPr>
-            <a:r>
-              <a:rPr lang="en-US" sz="1350" b="1" dirty="0">
-                <a:solidFill>
-                  <a:srgbClr val="23272C"/>
-                </a:solidFill>
-                <a:latin typeface="Calibri" pitchFamily="34" charset="0"/>
-                <a:ea typeface="Calibri" pitchFamily="34" charset="-122"/>
-                <a:cs typeface="Calibri" pitchFamily="34" charset="-120"/>
-              </a:rPr>
-              <a:t>documentation level</a:t>
-            </a:r>
-            <a:endParaRPr lang="en-US" sz="1350" dirty="0"/>
-          </a:p>
-        </p:txBody>
-      </p:sp>
-      <p:sp>
-        <p:nvSpPr>
-          <p:cNvPr id="10" name="Text 7"/>
-          <p:cNvSpPr/>
-          <p:nvPr/>
-        </p:nvSpPr>
-        <p:spPr>
-          <a:xfrm>
-            <a:off x="7452360" y="3429000"/>
-            <a:ext cx="4114800" cy="914400"/>
-          </a:xfrm>
-          <a:prstGeom prst="rect">
-            <a:avLst/>
-          </a:prstGeom>
-          <a:noFill/>
-          <a:ln/>
-        </p:spPr>
-        <p:txBody>
-          <a:bodyPr wrap="square" lIns="0" tIns="0" rIns="0" bIns="0" rtlCol="0" anchor="ctr"/>
-          <a:lstStyle/>
-          <a:p>
-            <a:pPr indent="0" marL="0">
-              <a:buNone/>
-            </a:pPr>
-            <a:r>
-              <a:rPr lang="en-US" sz="1150" dirty="0">
-                <a:solidFill>
-                  <a:srgbClr val="6A727C"/>
-                </a:solidFill>
-                <a:latin typeface="Calibri" pitchFamily="34" charset="0"/>
-                <a:ea typeface="Calibri" pitchFamily="34" charset="-122"/>
-                <a:cs typeface="Calibri" pitchFamily="34" charset="-120"/>
-              </a:rPr>
-              <a:t>2 of 2 fixed: added a documented diagnosis the coder dropped, or downcoded the visit. Never upcoded.</a:t>
-            </a:r>
-            <a:endParaRPr lang="en-US" sz="1150" dirty="0"/>
-          </a:p>
-        </p:txBody>
-      </p:sp>
-      <p:sp>
-        <p:nvSpPr>
-          <p:cNvPr id="11" name="Text 8"/>
-          <p:cNvSpPr/>
-          <p:nvPr/>
-        </p:nvSpPr>
-        <p:spPr>
-          <a:xfrm>
-            <a:off x="7452360" y="4434840"/>
-            <a:ext cx="662940" cy="292608"/>
-          </a:xfrm>
-          <a:prstGeom prst="roundRect">
-            <a:avLst>
-              <a:gd name="adj" fmla="val 10938"/>
-            </a:avLst>
-          </a:prstGeom>
-          <a:solidFill>
-            <a:srgbClr val="FFFFFF"/>
-          </a:solidFill>
-          <a:ln w="9525">
-            <a:solidFill>
-              <a:srgbClr val="CFCBC2"/>
-            </a:solidFill>
-          </a:ln>
-        </p:spPr>
-        <p:txBody>
-          <a:bodyPr wrap="square" lIns="0" tIns="0" rIns="0" bIns="0" rtlCol="0" anchor="ctr"/>
-          <a:lstStyle/>
-          <a:p>
-            <a:pPr algn="ctr" indent="0" marL="0">
-              <a:buNone/>
-            </a:pPr>
-            <a:r>
-              <a:rPr lang="en-US" sz="1050" b="1" dirty="0">
-                <a:solidFill>
-                  <a:srgbClr val="8A6116"/>
-                </a:solidFill>
-                <a:latin typeface="Courier New" pitchFamily="34" charset="0"/>
-                <a:ea typeface="Courier New" pitchFamily="34" charset="-122"/>
-                <a:cs typeface="Courier New" pitchFamily="34" charset="-120"/>
-              </a:rPr>
-              <a:t>CO-50</a:t>
-            </a:r>
-            <a:endParaRPr lang="en-US" sz="1050" dirty="0"/>
-          </a:p>
-        </p:txBody>
-      </p:sp>
-      <p:sp>
-        <p:nvSpPr>
-          <p:cNvPr id="12" name="Text 9"/>
-          <p:cNvSpPr/>
-          <p:nvPr/>
-        </p:nvSpPr>
-        <p:spPr>
-          <a:xfrm>
-            <a:off x="8549640" y="4407408"/>
-            <a:ext cx="3017520" cy="365760"/>
-          </a:xfrm>
-          <a:prstGeom prst="rect">
-            <a:avLst/>
-          </a:prstGeom>
-          <a:noFill/>
-          <a:ln/>
-        </p:spPr>
-        <p:txBody>
-          <a:bodyPr wrap="square" lIns="0" tIns="0" rIns="0" bIns="0" rtlCol="0" anchor="ctr"/>
-          <a:lstStyle/>
-          <a:p>
-            <a:pPr indent="0" marL="0">
-              <a:buNone/>
-            </a:pPr>
-            <a:r>
-              <a:rPr lang="en-US" sz="1350" b="1" dirty="0">
-                <a:solidFill>
-                  <a:srgbClr val="23272C"/>
-                </a:solidFill>
-                <a:latin typeface="Calibri" pitchFamily="34" charset="0"/>
-                <a:ea typeface="Calibri" pitchFamily="34" charset="-122"/>
-                <a:cs typeface="Calibri" pitchFamily="34" charset="-120"/>
-              </a:rPr>
-              <a:t>medical necessity</a:t>
-            </a:r>
-            <a:endParaRPr lang="en-US" sz="1350" dirty="0"/>
-          </a:p>
-        </p:txBody>
-      </p:sp>
-      <p:sp>
-        <p:nvSpPr>
-          <p:cNvPr id="13" name="Text 10"/>
-          <p:cNvSpPr/>
-          <p:nvPr/>
-        </p:nvSpPr>
-        <p:spPr>
-          <a:xfrm>
-            <a:off x="7452360" y="4800600"/>
-            <a:ext cx="4114800" cy="914400"/>
-          </a:xfrm>
-          <a:prstGeom prst="rect">
-            <a:avLst/>
-          </a:prstGeom>
-          <a:noFill/>
-          <a:ln/>
-        </p:spPr>
-        <p:txBody>
-          <a:bodyPr wrap="square" lIns="0" tIns="0" rIns="0" bIns="0" rtlCol="0" anchor="ctr"/>
-          <a:lstStyle/>
-          <a:p>
-            <a:pPr indent="0" marL="0">
-              <a:buNone/>
-            </a:pPr>
-            <a:r>
-              <a:rPr lang="en-US" sz="1150" dirty="0">
-                <a:solidFill>
-                  <a:srgbClr val="6A727C"/>
-                </a:solidFill>
-                <a:latin typeface="Calibri" pitchFamily="34" charset="0"/>
-                <a:ea typeface="Calibri" pitchFamily="34" charset="-122"/>
-                <a:cs typeface="Calibri" pitchFamily="34" charset="-120"/>
-              </a:rPr>
-              <a:t>6 of 8, the hard category. Includes 2 written appeals, both overturned on review</a:t>
+              <a:t>mean 1.17 submissions · 33 seconds per encounter</a:t>
             </a:r>
             <a:endParaRPr lang="en-US" sz="1150" dirty="0"/>
           </a:p>
